--- a/decks/the-false-alarm-lesson-v2.pptx
+++ b/decks/the-false-alarm-lesson-v2.pptx
@@ -18,6 +18,7 @@
     <p:sldId id="266" r:id="rId18"/>
     <p:sldId id="267" r:id="rId19"/>
     <p:sldId id="268" r:id="rId20"/>
+    <p:sldId id="269" r:id="rId21"/>
   </p:sldIdLst>
   <p:sldSz cx="12192000" cy="6858000" type="screen4x3"/>
   <p:notesSz cx="6858000" cy="9144000"/>
@@ -514,7 +515,7 @@
           <a:lstStyle/>
           <a:p>
             <a:r>
-              <a:t>This page and the next three are hidden. They stay in the deck for you and are skipped when you present.</a:t>
+              <a:t>This page is hidden and skipped when you present. The full plan, care notes and research are on the hidden pages at the end of the deck, if you want them.</a:t>
             </a:r>
           </a:p>
         </p:txBody>
@@ -585,6 +586,76 @@
           <a:p>
             <a:r>
               <a:t>3 MINUTES. Collect anonymously. Share the take-home link on the slide (post it on your class page too). It has the experiment, the in-the-moment tools, a private check-in, and who to talk to. Say again that a counselor is available today for anyone who wants to talk, and that anxiety is one of the most treatable things teens deal with.</a:t>
+            </a:r>
+          </a:p>
+        </p:txBody>
+      </p:sp>
+      <p:sp>
+        <p:nvSpPr>
+          <p:cNvPr id="4" name="Slide Number Placeholder 3"/>
+          <p:cNvSpPr>
+            <a:spLocks noGrp="1"/>
+          </p:cNvSpPr>
+          <p:nvPr>
+            <p:ph type="sldNum" idx="5" sz="quarter"/>
+          </p:nvPr>
+        </p:nvSpPr>
+        <p:spPr/>
+      </p:sp>
+    </p:spTree>
+  </p:cSld>
+  <p:clrMapOvr>
+    <a:masterClrMapping/>
+  </p:clrMapOvr>
+</p:notes>
+</file>
+
+<file path=ppt/notesSlides/notesSlide11.xml><?xml version="1.0" encoding="utf-8"?>
+<p:notes xmlns:a="http://schemas.openxmlformats.org/drawingml/2006/main" xmlns:p="http://schemas.openxmlformats.org/presentationml/2006/main" xmlns:r="http://schemas.openxmlformats.org/officeDocument/2006/relationships">
+  <p:cSld>
+    <p:spTree>
+      <p:nvGrpSpPr>
+        <p:cNvPr id="1" name=""/>
+        <p:cNvGrpSpPr/>
+        <p:nvPr/>
+      </p:nvGrpSpPr>
+      <p:grpSpPr>
+        <a:xfrm>
+          <a:off x="0" y="0"/>
+          <a:ext cx="0" cy="0"/>
+          <a:chOff x="0" y="0"/>
+          <a:chExt cx="0" cy="0"/>
+        </a:xfrm>
+      </p:grpSpPr>
+      <p:sp>
+        <p:nvSpPr>
+          <p:cNvPr id="2" name="Slide Image Placeholder 1"/>
+          <p:cNvSpPr>
+            <a:spLocks noGrp="1"/>
+          </p:cNvSpPr>
+          <p:nvPr>
+            <p:ph type="sldImg" idx="2"/>
+          </p:nvPr>
+        </p:nvSpPr>
+        <p:spPr/>
+      </p:sp>
+      <p:sp>
+        <p:nvSpPr>
+          <p:cNvPr id="3" name="Notes Placeholder 2"/>
+          <p:cNvSpPr>
+            <a:spLocks noGrp="1"/>
+          </p:cNvSpPr>
+          <p:nvPr>
+            <p:ph type="body" idx="3" sz="quarter"/>
+          </p:nvPr>
+        </p:nvSpPr>
+        <p:spPr/>
+        <p:txBody>
+          <a:bodyPr/>
+          <a:lstStyle/>
+          <a:p>
+            <a:r>
+              <a:t>If you want more: this page and the next three are hidden and skipped when you present.</a:t>
             </a:r>
           </a:p>
         </p:txBody>
@@ -4236,7 +4307,7 @@
                 </a:solidFill>
                 <a:latin typeface="Inter Tight"/>
               </a:rPr>
-              <a:t>TEACHER PAGE  ·  skipped when you present  ·  Lesson plan</a:t>
+              <a:t>TEACHER PAGE  ·  skipped when you present  ·  Before you start</a:t>
             </a:r>
           </a:p>
         </p:txBody>
@@ -4327,8 +4398,8 @@
         </p:nvSpPr>
         <p:spPr>
           <a:xfrm>
-            <a:off x="548640" y="1828800"/>
-            <a:ext cx="5120640" cy="4389120"/>
+            <a:off x="548640" y="2011680"/>
+            <a:ext cx="11064240" cy="4206240"/>
           </a:xfrm>
           <a:prstGeom prst="rect">
             <a:avLst/>
@@ -4343,43 +4414,43 @@
           <a:p>
             <a:pPr algn="l">
               <a:spcAft>
-                <a:spcPts val="675"/>
-              </a:spcAft>
-            </a:pPr>
-            <a:r>
-              <a:rPr sz="1100" b="1" i="0">
+                <a:spcPts val="810"/>
+              </a:spcAft>
+            </a:pPr>
+            <a:r>
+              <a:rPr sz="1200" b="1" i="0">
                 <a:solidFill>
                   <a:srgbClr val="0B2D5B"/>
                 </a:solidFill>
                 <a:latin typeface="Inter Tight"/>
               </a:rPr>
-              <a:t>GOAL</a:t>
-            </a:r>
-          </a:p>
-          <a:p>
-            <a:pPr algn="l">
-              <a:spcAft>
-                <a:spcPts val="675"/>
-              </a:spcAft>
-            </a:pPr>
-            <a:r>
-              <a:rPr sz="1500" b="0" i="0">
+              <a:t>BEFORE YOU START</a:t>
+            </a:r>
+          </a:p>
+          <a:p>
+            <a:pPr algn="l">
+              <a:spcAft>
+                <a:spcPts val="810"/>
+              </a:spcAft>
+            </a:pPr>
+            <a:r>
+              <a:rPr sz="1800" b="0" i="0">
                 <a:solidFill>
                   <a:srgbClr val="1C1B19"/>
                 </a:solidFill>
                 <a:latin typeface="Source Serif 4"/>
               </a:rPr>
-              <a:t>Students can explain how avoidance teaches anxiety to ring louder, describe a panic attack as an alarm with no fire that peaks and passes, and run one small experiment that tests an anxious prediction. Nobody is asked to name their own fears.</a:t>
-            </a:r>
-          </a:p>
-          <a:p>
-            <a:pPr algn="l">
-              <a:spcAft>
-                <a:spcPts val="675"/>
-              </a:spcAft>
-            </a:pPr>
-            <a:r>
-              <a:rPr sz="1500" b="0" i="0">
+              <a:t>Students learn how avoidance teaches anxiety to ring louder, that a panic attack peaks and passes, and how to test one anxious prediction. Bring index cards and the three corner signs, assume someone in the room has panic attacks, and tell a counselor the same day after any panic in class.</a:t>
+            </a:r>
+          </a:p>
+          <a:p>
+            <a:pPr algn="l">
+              <a:spcAft>
+                <a:spcPts val="810"/>
+              </a:spcAft>
+            </a:pPr>
+            <a:r>
+              <a:rPr sz="1800" b="0" i="0">
                 <a:solidFill>
                   <a:srgbClr val="1C1B19"/>
                 </a:solidFill>
@@ -4391,321 +4462,75 @@
           <a:p>
             <a:pPr algn="l">
               <a:spcAft>
-                <a:spcPts val="675"/>
-              </a:spcAft>
-            </a:pPr>
-            <a:r>
-              <a:rPr sz="1100" b="1" i="0">
+                <a:spcPts val="810"/>
+              </a:spcAft>
+            </a:pPr>
+            <a:r>
+              <a:rPr sz="1200" b="1" i="0">
                 <a:solidFill>
                   <a:srgbClr val="0B2D5B"/>
                 </a:solidFill>
                 <a:latin typeface="Inter Tight"/>
               </a:rPr>
-              <a:t>MATERIALS</a:t>
-            </a:r>
-          </a:p>
-          <a:p>
-            <a:pPr algn="l">
-              <a:spcAft>
-                <a:spcPts val="675"/>
-              </a:spcAft>
-            </a:pPr>
-            <a:r>
-              <a:rPr sz="1500" b="0" i="0">
+              <a:t>EVERY STUDENT IN THE ROOM</a:t>
+            </a:r>
+          </a:p>
+          <a:p>
+            <a:pPr algn="l">
+              <a:spcAft>
+                <a:spcPts val="810"/>
+              </a:spcAft>
+            </a:pPr>
+            <a:r>
+              <a:rPr sz="1800" b="0" i="0">
                 <a:solidFill>
                   <a:srgbClr val="1C1B19"/>
                 </a:solidFill>
                 <a:latin typeface="Source Serif 4"/>
               </a:rPr>
-              <a:t>Index cards, one per student</a:t>
-            </a:r>
-          </a:p>
-          <a:p>
-            <a:pPr algn="l">
-              <a:spcAft>
-                <a:spcPts val="675"/>
-              </a:spcAft>
-            </a:pPr>
-            <a:r>
-              <a:rPr sz="1500" b="0" i="0">
+              <a:t>Some fears match real danger, like racism or immigration worries, so treat those as real, and never use coming out as an exposure example.</a:t>
+            </a:r>
+          </a:p>
+          <a:p>
+            <a:pPr algn="l">
+              <a:spcAft>
+                <a:spcPts val="810"/>
+              </a:spcAft>
+            </a:pPr>
+            <a:r>
+              <a:rPr sz="1800" b="0" i="0">
                 <a:solidFill>
                   <a:srgbClr val="1C1B19"/>
                 </a:solidFill>
                 <a:latin typeface="Source Serif 4"/>
               </a:rPr>
-              <a:t>Three corner signs: Real danger, False alarm, Somewhere in between</a:t>
-            </a:r>
-          </a:p>
-          <a:p>
-            <a:pPr algn="l">
-              <a:spcAft>
-                <a:spcPts val="675"/>
-              </a:spcAft>
-            </a:pPr>
-            <a:r>
-              <a:rPr sz="1500" b="0" i="0">
-                <a:solidFill>
-                  <a:srgbClr val="1C1B19"/>
-                </a:solidFill>
-                <a:latin typeface="Source Serif 4"/>
-              </a:rPr>
-              <a:t>The take-home link (last slide) to share after class</a:t>
-            </a:r>
-          </a:p>
-        </p:txBody>
-      </p:sp>
-      <p:sp>
-        <p:nvSpPr>
-          <p:cNvPr id="7" name="TextBox 6"/>
-          <p:cNvSpPr txBox="1"/>
-          <p:nvPr/>
-        </p:nvSpPr>
-        <p:spPr>
-          <a:xfrm>
-            <a:off x="6126480" y="1828800"/>
-            <a:ext cx="5486400" cy="4389120"/>
-          </a:xfrm>
-          <a:prstGeom prst="rect">
-            <a:avLst/>
-          </a:prstGeom>
-          <a:noFill/>
-        </p:spPr>
-        <p:txBody>
-          <a:bodyPr wrap="square" anchor="t" lIns="0" rIns="0" tIns="0" bIns="0">
-            <a:spAutoFit/>
-          </a:bodyPr>
-          <a:lstStyle/>
-          <a:p>
-            <a:pPr algn="l">
-              <a:spcAft>
-                <a:spcPts val="630"/>
-              </a:spcAft>
-            </a:pPr>
-            <a:r>
-              <a:rPr sz="1100" b="1" i="0">
+              <a:t/>
+            </a:r>
+          </a:p>
+          <a:p>
+            <a:pPr algn="l">
+              <a:spcAft>
+                <a:spcPts val="810"/>
+              </a:spcAft>
+            </a:pPr>
+            <a:r>
+              <a:rPr sz="1200" b="1" i="0">
                 <a:solidFill>
                   <a:srgbClr val="0B2D5B"/>
                 </a:solidFill>
                 <a:latin typeface="Inter Tight"/>
               </a:rPr>
-              <a:t>FLOW</a:t>
-            </a:r>
-          </a:p>
-          <a:p>
-            <a:pPr algn="l">
-              <a:spcAft>
-                <a:spcPts val="630"/>
-              </a:spcAft>
-            </a:pPr>
-            <a:r>
-              <a:rPr sz="1300" b="1" i="0">
-                <a:solidFill>
-                  <a:srgbClr val="F47B20"/>
-                </a:solidFill>
-                <a:latin typeface="Inter Tight"/>
-              </a:rPr>
-              <a:t>5 min   </a:t>
-            </a:r>
-            <a:r>
-              <a:rPr sz="1400" b="0" i="0">
-                <a:solidFill>
-                  <a:srgbClr val="1C1B19"/>
-                </a:solidFill>
-                <a:latin typeface="Source Serif 4"/>
-              </a:rPr>
-              <a:t>Myth or fact (stand up, sit down)</a:t>
-            </a:r>
-          </a:p>
-          <a:p>
-            <a:pPr algn="l">
-              <a:spcAft>
-                <a:spcPts val="630"/>
-              </a:spcAft>
-            </a:pPr>
-            <a:r>
-              <a:rPr sz="1300" b="1" i="0">
-                <a:solidFill>
-                  <a:srgbClr val="F47B20"/>
-                </a:solidFill>
-                <a:latin typeface="Inter Tight"/>
-              </a:rPr>
-              <a:t>8 min   </a:t>
-            </a:r>
-            <a:r>
-              <a:rPr sz="1400" b="0" i="0">
-                <a:solidFill>
-                  <a:srgbClr val="1C1B19"/>
-                </a:solidFill>
-                <a:latin typeface="Source Serif 4"/>
-              </a:rPr>
-              <a:t>The avoidance loop</a:t>
-            </a:r>
-          </a:p>
-          <a:p>
-            <a:pPr algn="l">
-              <a:spcAft>
-                <a:spcPts val="630"/>
-              </a:spcAft>
-            </a:pPr>
-            <a:r>
-              <a:rPr sz="1300" b="1" i="0">
-                <a:solidFill>
-                  <a:srgbClr val="F47B20"/>
-                </a:solidFill>
-                <a:latin typeface="Inter Tight"/>
-              </a:rPr>
-              <a:t>7 min   </a:t>
-            </a:r>
-            <a:r>
-              <a:rPr sz="1400" b="0" i="0">
-                <a:solidFill>
-                  <a:srgbClr val="1C1B19"/>
-                </a:solidFill>
-                <a:latin typeface="Source Serif 4"/>
-              </a:rPr>
-              <a:t>Panic: the alarm with no fire</a:t>
-            </a:r>
-          </a:p>
-          <a:p>
-            <a:pPr algn="l">
-              <a:spcAft>
-                <a:spcPts val="630"/>
-              </a:spcAft>
-            </a:pPr>
-            <a:r>
-              <a:rPr sz="1300" b="1" i="0">
-                <a:solidFill>
-                  <a:srgbClr val="F47B20"/>
-                </a:solidFill>
-                <a:latin typeface="Inter Tight"/>
-              </a:rPr>
-              <a:t>5 min   </a:t>
-            </a:r>
-            <a:r>
-              <a:rPr sz="1400" b="0" i="0">
-                <a:solidFill>
-                  <a:srgbClr val="1C1B19"/>
-                </a:solidFill>
-                <a:latin typeface="Source Serif 4"/>
-              </a:rPr>
-              <a:t>Run the experiment</a:t>
-            </a:r>
-          </a:p>
-          <a:p>
-            <a:pPr algn="l">
-              <a:spcAft>
-                <a:spcPts val="630"/>
-              </a:spcAft>
-            </a:pPr>
-            <a:r>
-              <a:rPr sz="1300" b="1" i="0">
-                <a:solidFill>
-                  <a:srgbClr val="F47B20"/>
-                </a:solidFill>
-                <a:latin typeface="Inter Tight"/>
-              </a:rPr>
-              <a:t>10 min   </a:t>
-            </a:r>
-            <a:r>
-              <a:rPr sz="1400" b="0" i="0">
-                <a:solidFill>
-                  <a:srgbClr val="1C1B19"/>
-                </a:solidFill>
-                <a:latin typeface="Source Serif 4"/>
-              </a:rPr>
-              <a:t>Toast or fire? (vote with your feet)</a:t>
-            </a:r>
-          </a:p>
-          <a:p>
-            <a:pPr algn="l">
-              <a:spcAft>
-                <a:spcPts val="630"/>
-              </a:spcAft>
-            </a:pPr>
-            <a:r>
-              <a:rPr sz="1300" b="1" i="0">
-                <a:solidFill>
-                  <a:srgbClr val="F47B20"/>
-                </a:solidFill>
-                <a:latin typeface="Inter Tight"/>
-              </a:rPr>
-              <a:t>7 min   </a:t>
-            </a:r>
-            <a:r>
-              <a:rPr sz="1400" b="0" i="0">
-                <a:solidFill>
-                  <a:srgbClr val="1C1B19"/>
-                </a:solidFill>
-                <a:latin typeface="Source Serif 4"/>
-              </a:rPr>
-              <a:t>Build a ladder (private)</a:t>
-            </a:r>
-          </a:p>
-          <a:p>
-            <a:pPr algn="l">
-              <a:spcAft>
-                <a:spcPts val="630"/>
-              </a:spcAft>
-            </a:pPr>
-            <a:r>
-              <a:rPr sz="1300" b="1" i="0">
-                <a:solidFill>
-                  <a:srgbClr val="F47B20"/>
-                </a:solidFill>
-                <a:latin typeface="Inter Tight"/>
-              </a:rPr>
-              <a:t>3 min   </a:t>
-            </a:r>
-            <a:r>
-              <a:rPr sz="1400" b="0" i="0">
-                <a:solidFill>
-                  <a:srgbClr val="1C1B19"/>
-                </a:solidFill>
-                <a:latin typeface="Source Serif 4"/>
-              </a:rPr>
-              <a:t>Exit card and take-home link</a:t>
-            </a:r>
-          </a:p>
-          <a:p>
-            <a:pPr algn="l">
-              <a:spcAft>
-                <a:spcPts val="630"/>
-              </a:spcAft>
-            </a:pPr>
-            <a:r>
-              <a:rPr sz="1400" b="0" i="0">
-                <a:solidFill>
-                  <a:srgbClr val="1C1B19"/>
-                </a:solidFill>
-                <a:latin typeface="Source Serif 4"/>
-              </a:rPr>
-              <a:t/>
-            </a:r>
-          </a:p>
-          <a:p>
-            <a:pPr algn="l">
-              <a:spcAft>
-                <a:spcPts val="630"/>
-              </a:spcAft>
-            </a:pPr>
-            <a:r>
-              <a:rPr sz="1100" b="1" i="0">
-                <a:solidFill>
-                  <a:srgbClr val="0B2D5B"/>
-                </a:solidFill>
-                <a:latin typeface="Inter Tight"/>
-              </a:rPr>
               <a:t>SHORT ON TIME (20-MINUTE ADVISORY)</a:t>
             </a:r>
           </a:p>
           <a:p>
             <a:pPr algn="l">
               <a:spcAft>
-                <a:spcPts val="630"/>
-              </a:spcAft>
-            </a:pPr>
-            <a:r>
-              <a:rPr sz="1400" b="0" i="0">
+                <a:spcPts val="810"/>
+              </a:spcAft>
+            </a:pPr>
+            <a:r>
+              <a:rPr sz="1800" b="0" i="0">
                 <a:solidFill>
                   <a:srgbClr val="1C1B19"/>
                 </a:solidFill>
@@ -4820,7 +4645,7 @@
                 </a:solidFill>
                 <a:latin typeface="Inter Tight"/>
               </a:rPr>
-              <a:t>THE CORE SKILL</a:t>
+              <a:t>BEFORE YOU GO</a:t>
             </a:r>
           </a:p>
         </p:txBody>
@@ -4872,8 +4697,8 @@
         </p:nvSpPr>
         <p:spPr>
           <a:xfrm>
-            <a:off x="822960" y="1005840"/>
-            <a:ext cx="10515600" cy="1097280"/>
+            <a:off x="822960" y="1188720"/>
+            <a:ext cx="10515600" cy="914400"/>
           </a:xfrm>
           <a:prstGeom prst="rect">
             <a:avLst/>
@@ -4898,7 +4723,7 @@
                 </a:solidFill>
                 <a:latin typeface="Source Serif 4"/>
               </a:rPr>
-              <a:t>Run the experiment</a:t>
+              <a:t>Exit card</a:t>
             </a:r>
           </a:p>
         </p:txBody>
@@ -4911,8 +4736,8 @@
         </p:nvSpPr>
         <p:spPr>
           <a:xfrm>
-            <a:off x="822960" y="2194560"/>
-            <a:ext cx="548640" cy="1005840"/>
+            <a:off x="822960" y="2286000"/>
+            <a:ext cx="10515600" cy="1463040"/>
           </a:xfrm>
           <a:prstGeom prst="rect">
             <a:avLst/>
@@ -4927,31 +4752,77 @@
           <a:p>
             <a:pPr algn="l">
               <a:spcAft>
-                <a:spcPts val="1170"/>
-              </a:spcAft>
-            </a:pPr>
-            <a:r>
-              <a:rPr sz="2600" b="1" i="0">
-                <a:solidFill>
-                  <a:srgbClr val="F47B20"/>
-                </a:solidFill>
-                <a:latin typeface="Source Serif 4"/>
-              </a:rPr>
-              <a:t>1</a:t>
-            </a:r>
-          </a:p>
-        </p:txBody>
-      </p:sp>
-      <p:sp>
-        <p:nvSpPr>
-          <p:cNvPr id="7" name="TextBox 6"/>
+                <a:spcPts val="1080"/>
+              </a:spcAft>
+            </a:pPr>
+            <a:r>
+              <a:rPr sz="2400" b="0" i="0">
+                <a:solidFill>
+                  <a:srgbClr val="1C1B19"/>
+                </a:solidFill>
+                <a:latin typeface="Source Serif 4"/>
+              </a:rPr>
+              <a:t>What could you say to a friend whose alarm is going off for burnt toast?</a:t>
+            </a:r>
+          </a:p>
+        </p:txBody>
+      </p:sp>
+      <p:sp>
+        <p:nvSpPr>
+          <p:cNvPr id="7" name="Rectangle 6"/>
+          <p:cNvSpPr/>
+          <p:nvPr/>
+        </p:nvSpPr>
+        <p:spPr>
+          <a:xfrm>
+            <a:off x="822960" y="4023360"/>
+            <a:ext cx="10515600" cy="1371600"/>
+          </a:xfrm>
+          <a:prstGeom prst="rect">
+            <a:avLst/>
+          </a:prstGeom>
+          <a:solidFill>
+            <a:srgbClr val="FFFFFF"/>
+          </a:solidFill>
+          <a:ln w="15875">
+            <a:solidFill>
+              <a:srgbClr val="1C1B19"/>
+            </a:solidFill>
+          </a:ln>
+          <a:effectLst/>
+        </p:spPr>
+        <p:style>
+          <a:lnRef idx="1">
+            <a:schemeClr val="accent1"/>
+          </a:lnRef>
+          <a:fillRef idx="3">
+            <a:schemeClr val="accent1"/>
+          </a:fillRef>
+          <a:effectRef idx="2">
+            <a:schemeClr val="accent1"/>
+          </a:effectRef>
+          <a:fontRef idx="minor">
+            <a:schemeClr val="lt1"/>
+          </a:fontRef>
+        </p:style>
+        <p:txBody>
+          <a:bodyPr rtlCol="0" anchor="ctr"/>
+          <a:lstStyle/>
+          <a:p>
+            <a:pPr algn="ctr"/>
+          </a:p>
+        </p:txBody>
+      </p:sp>
+      <p:sp>
+        <p:nvSpPr>
+          <p:cNvPr id="8" name="TextBox 7"/>
           <p:cNvSpPr txBox="1"/>
           <p:nvPr/>
         </p:nvSpPr>
         <p:spPr>
           <a:xfrm>
-            <a:off x="1463040" y="2231136"/>
-            <a:ext cx="9875520" cy="1005840"/>
+            <a:off x="1097280" y="4206240"/>
+            <a:ext cx="10058400" cy="365760"/>
           </a:xfrm>
           <a:prstGeom prst="rect">
             <a:avLst/>
@@ -4966,47 +4837,31 @@
           <a:p>
             <a:pPr algn="l">
               <a:spcAft>
-                <a:spcPts val="945"/>
-              </a:spcAft>
-            </a:pPr>
-            <a:r>
-              <a:rPr sz="2100" b="1" i="0">
-                <a:solidFill>
-                  <a:srgbClr val="1C1B19"/>
-                </a:solidFill>
-                <a:latin typeface="Source Serif 4"/>
-              </a:rPr>
-              <a:t>Name the prediction.</a:t>
-            </a:r>
-          </a:p>
-          <a:p>
-            <a:pPr algn="l">
-              <a:spcAft>
-                <a:spcPts val="945"/>
-              </a:spcAft>
-            </a:pPr>
-            <a:r>
-              <a:rPr sz="1600" b="0" i="0">
-                <a:solidFill>
-                  <a:srgbClr val="5D5A54"/>
-                </a:solidFill>
-                <a:latin typeface="Source Serif 4"/>
-              </a:rPr>
-              <a:t>"If I call, I'll freeze and sound stupid."</a:t>
-            </a:r>
-          </a:p>
-        </p:txBody>
-      </p:sp>
-      <p:sp>
-        <p:nvSpPr>
-          <p:cNvPr id="8" name="TextBox 7"/>
+                <a:spcPts val="540"/>
+              </a:spcAft>
+            </a:pPr>
+            <a:r>
+              <a:rPr sz="1200" b="1" i="0">
+                <a:solidFill>
+                  <a:srgbClr val="0B2D5B"/>
+                </a:solidFill>
+                <a:latin typeface="Inter Tight"/>
+              </a:rPr>
+              <a:t>ON THE BVR DINER MENU</a:t>
+            </a:r>
+          </a:p>
+        </p:txBody>
+      </p:sp>
+      <p:sp>
+        <p:nvSpPr>
+          <p:cNvPr id="9" name="TextBox 8"/>
           <p:cNvSpPr txBox="1"/>
           <p:nvPr/>
         </p:nvSpPr>
         <p:spPr>
           <a:xfrm>
-            <a:off x="822960" y="3200400"/>
-            <a:ext cx="548640" cy="1005840"/>
+            <a:off x="1097280" y="4617720"/>
+            <a:ext cx="10058400" cy="640080"/>
           </a:xfrm>
           <a:prstGeom prst="rect">
             <a:avLst/>
@@ -5021,260 +4876,17 @@
           <a:p>
             <a:pPr algn="l">
               <a:spcAft>
-                <a:spcPts val="1170"/>
-              </a:spcAft>
-            </a:pPr>
-            <a:r>
-              <a:rPr sz="2600" b="1" i="0">
-                <a:solidFill>
-                  <a:srgbClr val="F47B20"/>
-                </a:solidFill>
-                <a:latin typeface="Source Serif 4"/>
-              </a:rPr>
-              <a:t>2</a:t>
-            </a:r>
-          </a:p>
-        </p:txBody>
-      </p:sp>
-      <p:sp>
-        <p:nvSpPr>
-          <p:cNvPr id="9" name="TextBox 8"/>
-          <p:cNvSpPr txBox="1"/>
-          <p:nvPr/>
-        </p:nvSpPr>
-        <p:spPr>
-          <a:xfrm>
-            <a:off x="1463040" y="3236976"/>
-            <a:ext cx="9875520" cy="1005840"/>
-          </a:xfrm>
-          <a:prstGeom prst="rect">
-            <a:avLst/>
-          </a:prstGeom>
-          <a:noFill/>
-        </p:spPr>
-        <p:txBody>
-          <a:bodyPr wrap="square" anchor="t" lIns="0" rIns="0" tIns="0" bIns="0">
-            <a:spAutoFit/>
-          </a:bodyPr>
-          <a:lstStyle/>
-          <a:p>
-            <a:pPr algn="l">
-              <a:spcAft>
-                <a:spcPts val="945"/>
-              </a:spcAft>
-            </a:pPr>
-            <a:r>
-              <a:rPr sz="2100" b="1" i="0">
+                <a:spcPts val="900"/>
+              </a:spcAft>
+            </a:pPr>
+            <a:r>
+              <a:rPr sz="2000" b="0" i="0">
                 <a:solidFill>
                   <a:srgbClr val="1C1B19"/>
                 </a:solidFill>
-                <a:latin typeface="Source Serif 4"/>
-              </a:rPr>
-              <a:t>Rate it.</a:t>
-            </a:r>
-          </a:p>
-          <a:p>
-            <a:pPr algn="l">
-              <a:spcAft>
-                <a:spcPts val="945"/>
-              </a:spcAft>
-            </a:pPr>
-            <a:r>
-              <a:rPr sz="1600" b="0" i="0">
-                <a:solidFill>
-                  <a:srgbClr val="5D5A54"/>
-                </a:solidFill>
-                <a:latin typeface="Source Serif 4"/>
-              </a:rPr>
-              <a:t>How sure are you, 0 to 100%?</a:t>
-            </a:r>
-          </a:p>
-        </p:txBody>
-      </p:sp>
-      <p:sp>
-        <p:nvSpPr>
-          <p:cNvPr id="10" name="TextBox 9"/>
-          <p:cNvSpPr txBox="1"/>
-          <p:nvPr/>
-        </p:nvSpPr>
-        <p:spPr>
-          <a:xfrm>
-            <a:off x="822960" y="4206240"/>
-            <a:ext cx="548640" cy="1005840"/>
-          </a:xfrm>
-          <a:prstGeom prst="rect">
-            <a:avLst/>
-          </a:prstGeom>
-          <a:noFill/>
-        </p:spPr>
-        <p:txBody>
-          <a:bodyPr wrap="square" anchor="t" lIns="0" rIns="0" tIns="0" bIns="0">
-            <a:spAutoFit/>
-          </a:bodyPr>
-          <a:lstStyle/>
-          <a:p>
-            <a:pPr algn="l">
-              <a:spcAft>
-                <a:spcPts val="1170"/>
-              </a:spcAft>
-            </a:pPr>
-            <a:r>
-              <a:rPr sz="2600" b="1" i="0">
-                <a:solidFill>
-                  <a:srgbClr val="F47B20"/>
-                </a:solidFill>
-                <a:latin typeface="Source Serif 4"/>
-              </a:rPr>
-              <a:t>3</a:t>
-            </a:r>
-          </a:p>
-        </p:txBody>
-      </p:sp>
-      <p:sp>
-        <p:nvSpPr>
-          <p:cNvPr id="11" name="TextBox 10"/>
-          <p:cNvSpPr txBox="1"/>
-          <p:nvPr/>
-        </p:nvSpPr>
-        <p:spPr>
-          <a:xfrm>
-            <a:off x="1463040" y="4242816"/>
-            <a:ext cx="9875520" cy="1005840"/>
-          </a:xfrm>
-          <a:prstGeom prst="rect">
-            <a:avLst/>
-          </a:prstGeom>
-          <a:noFill/>
-        </p:spPr>
-        <p:txBody>
-          <a:bodyPr wrap="square" anchor="t" lIns="0" rIns="0" tIns="0" bIns="0">
-            <a:spAutoFit/>
-          </a:bodyPr>
-          <a:lstStyle/>
-          <a:p>
-            <a:pPr algn="l">
-              <a:spcAft>
-                <a:spcPts val="945"/>
-              </a:spcAft>
-            </a:pPr>
-            <a:r>
-              <a:rPr sz="2100" b="1" i="0">
-                <a:solidFill>
-                  <a:srgbClr val="1C1B19"/>
-                </a:solidFill>
-                <a:latin typeface="Source Serif 4"/>
-              </a:rPr>
-              <a:t>Drop the safety moves.</a:t>
-            </a:r>
-          </a:p>
-          <a:p>
-            <a:pPr algn="l">
-              <a:spcAft>
-                <a:spcPts val="945"/>
-              </a:spcAft>
-            </a:pPr>
-            <a:r>
-              <a:rPr sz="1600" b="0" i="0">
-                <a:solidFill>
-                  <a:srgbClr val="5D5A54"/>
-                </a:solidFill>
-                <a:latin typeface="Source Serif 4"/>
-              </a:rPr>
-              <a:t>The script, the excuse, the friend who talks for you.</a:t>
-            </a:r>
-          </a:p>
-        </p:txBody>
-      </p:sp>
-      <p:sp>
-        <p:nvSpPr>
-          <p:cNvPr id="12" name="TextBox 11"/>
-          <p:cNvSpPr txBox="1"/>
-          <p:nvPr/>
-        </p:nvSpPr>
-        <p:spPr>
-          <a:xfrm>
-            <a:off x="822960" y="5212080"/>
-            <a:ext cx="548640" cy="1005840"/>
-          </a:xfrm>
-          <a:prstGeom prst="rect">
-            <a:avLst/>
-          </a:prstGeom>
-          <a:noFill/>
-        </p:spPr>
-        <p:txBody>
-          <a:bodyPr wrap="square" anchor="t" lIns="0" rIns="0" tIns="0" bIns="0">
-            <a:spAutoFit/>
-          </a:bodyPr>
-          <a:lstStyle/>
-          <a:p>
-            <a:pPr algn="l">
-              <a:spcAft>
-                <a:spcPts val="1170"/>
-              </a:spcAft>
-            </a:pPr>
-            <a:r>
-              <a:rPr sz="2600" b="1" i="0">
-                <a:solidFill>
-                  <a:srgbClr val="F47B20"/>
-                </a:solidFill>
-                <a:latin typeface="Source Serif 4"/>
-              </a:rPr>
-              <a:t>4</a:t>
-            </a:r>
-          </a:p>
-        </p:txBody>
-      </p:sp>
-      <p:sp>
-        <p:nvSpPr>
-          <p:cNvPr id="13" name="TextBox 12"/>
-          <p:cNvSpPr txBox="1"/>
-          <p:nvPr/>
-        </p:nvSpPr>
-        <p:spPr>
-          <a:xfrm>
-            <a:off x="1463040" y="5248656"/>
-            <a:ext cx="9875520" cy="1005840"/>
-          </a:xfrm>
-          <a:prstGeom prst="rect">
-            <a:avLst/>
-          </a:prstGeom>
-          <a:noFill/>
-        </p:spPr>
-        <p:txBody>
-          <a:bodyPr wrap="square" anchor="t" lIns="0" rIns="0" tIns="0" bIns="0">
-            <a:spAutoFit/>
-          </a:bodyPr>
-          <a:lstStyle/>
-          <a:p>
-            <a:pPr algn="l">
-              <a:spcAft>
-                <a:spcPts val="945"/>
-              </a:spcAft>
-            </a:pPr>
-            <a:r>
-              <a:rPr sz="2100" b="1" i="0">
-                <a:solidFill>
-                  <a:srgbClr val="1C1B19"/>
-                </a:solidFill>
-                <a:latin typeface="Source Serif 4"/>
-              </a:rPr>
-              <a:t>Compare.</a:t>
-            </a:r>
-          </a:p>
-          <a:p>
-            <a:pPr algn="l">
-              <a:spcAft>
-                <a:spcPts val="945"/>
-              </a:spcAft>
-            </a:pPr>
-            <a:r>
-              <a:rPr sz="1600" b="0" i="0">
-                <a:solidFill>
-                  <a:srgbClr val="5D5A54"/>
-                </a:solidFill>
-                <a:latin typeface="Source Serif 4"/>
-              </a:rPr>
-              <a:t>What happened? How close was the forecast?</a:t>
+                <a:latin typeface="Inter Tight"/>
+              </a:rPr>
+              <a:t>https://rmwtoolkit.github.io/bcds-toolkit/the-false-alarm-high-school.html</a:t>
             </a:r>
           </a:p>
         </p:txBody>
@@ -5288,6 +4900,2244 @@
 </file>
 
 <file path=ppt/slides/slide11.xml><?xml version="1.0" encoding="utf-8"?>
+<p:sld xmlns:a="http://schemas.openxmlformats.org/drawingml/2006/main" xmlns:p="http://schemas.openxmlformats.org/presentationml/2006/main" xmlns:r="http://schemas.openxmlformats.org/officeDocument/2006/relationships" show="0">
+  <p:cSld>
+    <p:bg>
+      <p:bgPr>
+        <a:solidFill>
+          <a:srgbClr val="EEEBE4"/>
+        </a:solidFill>
+        <a:effectLst/>
+      </p:bgPr>
+    </p:bg>
+    <p:spTree>
+      <p:nvGrpSpPr>
+        <p:cNvPr id="1" name=""/>
+        <p:cNvGrpSpPr/>
+        <p:nvPr/>
+      </p:nvGrpSpPr>
+      <p:grpSpPr/>
+      <p:sp>
+        <p:nvSpPr>
+          <p:cNvPr id="2" name="Rectangle 1"/>
+          <p:cNvSpPr/>
+          <p:nvPr/>
+        </p:nvSpPr>
+        <p:spPr>
+          <a:xfrm>
+            <a:off x="0" y="0"/>
+            <a:ext cx="12191695" cy="384048"/>
+          </a:xfrm>
+          <a:prstGeom prst="rect">
+            <a:avLst/>
+          </a:prstGeom>
+          <a:solidFill>
+            <a:srgbClr val="0B2D5B"/>
+          </a:solidFill>
+          <a:ln>
+            <a:noFill/>
+          </a:ln>
+          <a:effectLst/>
+        </p:spPr>
+        <p:style>
+          <a:lnRef idx="1">
+            <a:schemeClr val="accent1"/>
+          </a:lnRef>
+          <a:fillRef idx="3">
+            <a:schemeClr val="accent1"/>
+          </a:fillRef>
+          <a:effectRef idx="2">
+            <a:schemeClr val="accent1"/>
+          </a:effectRef>
+          <a:fontRef idx="minor">
+            <a:schemeClr val="lt1"/>
+          </a:fontRef>
+        </p:style>
+        <p:txBody>
+          <a:bodyPr rtlCol="0" anchor="ctr"/>
+          <a:lstStyle/>
+          <a:p>
+            <a:pPr algn="ctr"/>
+          </a:p>
+        </p:txBody>
+      </p:sp>
+      <p:sp>
+        <p:nvSpPr>
+          <p:cNvPr id="3" name="TextBox 2"/>
+          <p:cNvSpPr txBox="1"/>
+          <p:nvPr/>
+        </p:nvSpPr>
+        <p:spPr>
+          <a:xfrm>
+            <a:off x="548640" y="100584"/>
+            <a:ext cx="10972800" cy="274320"/>
+          </a:xfrm>
+          <a:prstGeom prst="rect">
+            <a:avLst/>
+          </a:prstGeom>
+          <a:noFill/>
+        </p:spPr>
+        <p:txBody>
+          <a:bodyPr wrap="square" anchor="t" lIns="0" rIns="0" tIns="0" bIns="0">
+            <a:spAutoFit/>
+          </a:bodyPr>
+          <a:lstStyle/>
+          <a:p>
+            <a:pPr algn="l">
+              <a:spcAft>
+                <a:spcPts val="495"/>
+              </a:spcAft>
+            </a:pPr>
+            <a:r>
+              <a:rPr sz="1100" b="1" i="0">
+                <a:solidFill>
+                  <a:srgbClr val="FFFFFF"/>
+                </a:solidFill>
+                <a:latin typeface="Inter Tight"/>
+              </a:rPr>
+              <a:t>TEACHER PAGE  ·  skipped when you present  ·  Lesson plan</a:t>
+            </a:r>
+          </a:p>
+        </p:txBody>
+      </p:sp>
+      <p:sp>
+        <p:nvSpPr>
+          <p:cNvPr id="4" name="TextBox 3"/>
+          <p:cNvSpPr txBox="1"/>
+          <p:nvPr/>
+        </p:nvSpPr>
+        <p:spPr>
+          <a:xfrm>
+            <a:off x="548640" y="685800"/>
+            <a:ext cx="10972800" cy="731520"/>
+          </a:xfrm>
+          <a:prstGeom prst="rect">
+            <a:avLst/>
+          </a:prstGeom>
+          <a:noFill/>
+        </p:spPr>
+        <p:txBody>
+          <a:bodyPr wrap="square" anchor="t" lIns="0" rIns="0" tIns="0" bIns="0">
+            <a:spAutoFit/>
+          </a:bodyPr>
+          <a:lstStyle/>
+          <a:p>
+            <a:pPr algn="l">
+              <a:spcAft>
+                <a:spcPts val="1530"/>
+              </a:spcAft>
+            </a:pPr>
+            <a:r>
+              <a:rPr sz="3400" b="1" i="0">
+                <a:solidFill>
+                  <a:srgbClr val="1C1B19"/>
+                </a:solidFill>
+                <a:latin typeface="Source Serif 4"/>
+              </a:rPr>
+              <a:t>The False Alarm</a:t>
+            </a:r>
+          </a:p>
+        </p:txBody>
+      </p:sp>
+      <p:sp>
+        <p:nvSpPr>
+          <p:cNvPr id="5" name="TextBox 4"/>
+          <p:cNvSpPr txBox="1"/>
+          <p:nvPr/>
+        </p:nvSpPr>
+        <p:spPr>
+          <a:xfrm>
+            <a:off x="548640" y="1325880"/>
+            <a:ext cx="10972800" cy="365760"/>
+          </a:xfrm>
+          <a:prstGeom prst="rect">
+            <a:avLst/>
+          </a:prstGeom>
+          <a:noFill/>
+        </p:spPr>
+        <p:txBody>
+          <a:bodyPr wrap="square" anchor="t" lIns="0" rIns="0" tIns="0" bIns="0">
+            <a:spAutoFit/>
+          </a:bodyPr>
+          <a:lstStyle/>
+          <a:p>
+            <a:pPr algn="l">
+              <a:spcAft>
+                <a:spcPts val="630"/>
+              </a:spcAft>
+            </a:pPr>
+            <a:r>
+              <a:rPr sz="1400" b="0" i="0">
+                <a:solidFill>
+                  <a:srgbClr val="5D5A54"/>
+                </a:solidFill>
+                <a:latin typeface="Inter Tight"/>
+              </a:rPr>
+              <a:t>Upper School  ·  45 minutes (20-minute advisory version below)  ·  9th grade advisory, health class, or a counselor-led group</a:t>
+            </a:r>
+          </a:p>
+        </p:txBody>
+      </p:sp>
+      <p:sp>
+        <p:nvSpPr>
+          <p:cNvPr id="6" name="TextBox 5"/>
+          <p:cNvSpPr txBox="1"/>
+          <p:nvPr/>
+        </p:nvSpPr>
+        <p:spPr>
+          <a:xfrm>
+            <a:off x="548640" y="1828800"/>
+            <a:ext cx="5120640" cy="4389120"/>
+          </a:xfrm>
+          <a:prstGeom prst="rect">
+            <a:avLst/>
+          </a:prstGeom>
+          <a:noFill/>
+        </p:spPr>
+        <p:txBody>
+          <a:bodyPr wrap="square" anchor="t" lIns="0" rIns="0" tIns="0" bIns="0">
+            <a:spAutoFit/>
+          </a:bodyPr>
+          <a:lstStyle/>
+          <a:p>
+            <a:pPr algn="l">
+              <a:spcAft>
+                <a:spcPts val="675"/>
+              </a:spcAft>
+            </a:pPr>
+            <a:r>
+              <a:rPr sz="1100" b="1" i="0">
+                <a:solidFill>
+                  <a:srgbClr val="0B2D5B"/>
+                </a:solidFill>
+                <a:latin typeface="Inter Tight"/>
+              </a:rPr>
+              <a:t>GOAL</a:t>
+            </a:r>
+          </a:p>
+          <a:p>
+            <a:pPr algn="l">
+              <a:spcAft>
+                <a:spcPts val="675"/>
+              </a:spcAft>
+            </a:pPr>
+            <a:r>
+              <a:rPr sz="1500" b="0" i="0">
+                <a:solidFill>
+                  <a:srgbClr val="1C1B19"/>
+                </a:solidFill>
+                <a:latin typeface="Source Serif 4"/>
+              </a:rPr>
+              <a:t>Students can explain how avoidance teaches anxiety to ring louder, describe a panic attack as an alarm with no fire that peaks and passes, and run one small experiment that tests an anxious prediction. Nobody is asked to name their own fears.</a:t>
+            </a:r>
+          </a:p>
+          <a:p>
+            <a:pPr algn="l">
+              <a:spcAft>
+                <a:spcPts val="675"/>
+              </a:spcAft>
+            </a:pPr>
+            <a:r>
+              <a:rPr sz="1500" b="0" i="0">
+                <a:solidFill>
+                  <a:srgbClr val="1C1B19"/>
+                </a:solidFill>
+                <a:latin typeface="Source Serif 4"/>
+              </a:rPr>
+              <a:t/>
+            </a:r>
+          </a:p>
+          <a:p>
+            <a:pPr algn="l">
+              <a:spcAft>
+                <a:spcPts val="675"/>
+              </a:spcAft>
+            </a:pPr>
+            <a:r>
+              <a:rPr sz="1100" b="1" i="0">
+                <a:solidFill>
+                  <a:srgbClr val="0B2D5B"/>
+                </a:solidFill>
+                <a:latin typeface="Inter Tight"/>
+              </a:rPr>
+              <a:t>MATERIALS</a:t>
+            </a:r>
+          </a:p>
+          <a:p>
+            <a:pPr algn="l">
+              <a:spcAft>
+                <a:spcPts val="675"/>
+              </a:spcAft>
+            </a:pPr>
+            <a:r>
+              <a:rPr sz="1500" b="0" i="0">
+                <a:solidFill>
+                  <a:srgbClr val="1C1B19"/>
+                </a:solidFill>
+                <a:latin typeface="Source Serif 4"/>
+              </a:rPr>
+              <a:t>Index cards, one per student</a:t>
+            </a:r>
+          </a:p>
+          <a:p>
+            <a:pPr algn="l">
+              <a:spcAft>
+                <a:spcPts val="675"/>
+              </a:spcAft>
+            </a:pPr>
+            <a:r>
+              <a:rPr sz="1500" b="0" i="0">
+                <a:solidFill>
+                  <a:srgbClr val="1C1B19"/>
+                </a:solidFill>
+                <a:latin typeface="Source Serif 4"/>
+              </a:rPr>
+              <a:t>Three corner signs: Real danger, False alarm, Somewhere in between</a:t>
+            </a:r>
+          </a:p>
+          <a:p>
+            <a:pPr algn="l">
+              <a:spcAft>
+                <a:spcPts val="675"/>
+              </a:spcAft>
+            </a:pPr>
+            <a:r>
+              <a:rPr sz="1500" b="0" i="0">
+                <a:solidFill>
+                  <a:srgbClr val="1C1B19"/>
+                </a:solidFill>
+                <a:latin typeface="Source Serif 4"/>
+              </a:rPr>
+              <a:t>The take-home link (last slide) to share after class</a:t>
+            </a:r>
+          </a:p>
+        </p:txBody>
+      </p:sp>
+      <p:sp>
+        <p:nvSpPr>
+          <p:cNvPr id="7" name="TextBox 6"/>
+          <p:cNvSpPr txBox="1"/>
+          <p:nvPr/>
+        </p:nvSpPr>
+        <p:spPr>
+          <a:xfrm>
+            <a:off x="6126480" y="1828800"/>
+            <a:ext cx="5486400" cy="4389120"/>
+          </a:xfrm>
+          <a:prstGeom prst="rect">
+            <a:avLst/>
+          </a:prstGeom>
+          <a:noFill/>
+        </p:spPr>
+        <p:txBody>
+          <a:bodyPr wrap="square" anchor="t" lIns="0" rIns="0" tIns="0" bIns="0">
+            <a:spAutoFit/>
+          </a:bodyPr>
+          <a:lstStyle/>
+          <a:p>
+            <a:pPr algn="l">
+              <a:spcAft>
+                <a:spcPts val="630"/>
+              </a:spcAft>
+            </a:pPr>
+            <a:r>
+              <a:rPr sz="1100" b="1" i="0">
+                <a:solidFill>
+                  <a:srgbClr val="0B2D5B"/>
+                </a:solidFill>
+                <a:latin typeface="Inter Tight"/>
+              </a:rPr>
+              <a:t>FLOW</a:t>
+            </a:r>
+          </a:p>
+          <a:p>
+            <a:pPr algn="l">
+              <a:spcAft>
+                <a:spcPts val="630"/>
+              </a:spcAft>
+            </a:pPr>
+            <a:r>
+              <a:rPr sz="1300" b="1" i="0">
+                <a:solidFill>
+                  <a:srgbClr val="F47B20"/>
+                </a:solidFill>
+                <a:latin typeface="Inter Tight"/>
+              </a:rPr>
+              <a:t>5 min   </a:t>
+            </a:r>
+            <a:r>
+              <a:rPr sz="1400" b="0" i="0">
+                <a:solidFill>
+                  <a:srgbClr val="1C1B19"/>
+                </a:solidFill>
+                <a:latin typeface="Source Serif 4"/>
+              </a:rPr>
+              <a:t>Myth or fact (stand up, sit down)</a:t>
+            </a:r>
+          </a:p>
+          <a:p>
+            <a:pPr algn="l">
+              <a:spcAft>
+                <a:spcPts val="630"/>
+              </a:spcAft>
+            </a:pPr>
+            <a:r>
+              <a:rPr sz="1300" b="1" i="0">
+                <a:solidFill>
+                  <a:srgbClr val="F47B20"/>
+                </a:solidFill>
+                <a:latin typeface="Inter Tight"/>
+              </a:rPr>
+              <a:t>8 min   </a:t>
+            </a:r>
+            <a:r>
+              <a:rPr sz="1400" b="0" i="0">
+                <a:solidFill>
+                  <a:srgbClr val="1C1B19"/>
+                </a:solidFill>
+                <a:latin typeface="Source Serif 4"/>
+              </a:rPr>
+              <a:t>The avoidance loop</a:t>
+            </a:r>
+          </a:p>
+          <a:p>
+            <a:pPr algn="l">
+              <a:spcAft>
+                <a:spcPts val="630"/>
+              </a:spcAft>
+            </a:pPr>
+            <a:r>
+              <a:rPr sz="1300" b="1" i="0">
+                <a:solidFill>
+                  <a:srgbClr val="F47B20"/>
+                </a:solidFill>
+                <a:latin typeface="Inter Tight"/>
+              </a:rPr>
+              <a:t>7 min   </a:t>
+            </a:r>
+            <a:r>
+              <a:rPr sz="1400" b="0" i="0">
+                <a:solidFill>
+                  <a:srgbClr val="1C1B19"/>
+                </a:solidFill>
+                <a:latin typeface="Source Serif 4"/>
+              </a:rPr>
+              <a:t>Panic: the alarm with no fire</a:t>
+            </a:r>
+          </a:p>
+          <a:p>
+            <a:pPr algn="l">
+              <a:spcAft>
+                <a:spcPts val="630"/>
+              </a:spcAft>
+            </a:pPr>
+            <a:r>
+              <a:rPr sz="1300" b="1" i="0">
+                <a:solidFill>
+                  <a:srgbClr val="F47B20"/>
+                </a:solidFill>
+                <a:latin typeface="Inter Tight"/>
+              </a:rPr>
+              <a:t>5 min   </a:t>
+            </a:r>
+            <a:r>
+              <a:rPr sz="1400" b="0" i="0">
+                <a:solidFill>
+                  <a:srgbClr val="1C1B19"/>
+                </a:solidFill>
+                <a:latin typeface="Source Serif 4"/>
+              </a:rPr>
+              <a:t>Run the experiment</a:t>
+            </a:r>
+          </a:p>
+          <a:p>
+            <a:pPr algn="l">
+              <a:spcAft>
+                <a:spcPts val="630"/>
+              </a:spcAft>
+            </a:pPr>
+            <a:r>
+              <a:rPr sz="1300" b="1" i="0">
+                <a:solidFill>
+                  <a:srgbClr val="F47B20"/>
+                </a:solidFill>
+                <a:latin typeface="Inter Tight"/>
+              </a:rPr>
+              <a:t>10 min   </a:t>
+            </a:r>
+            <a:r>
+              <a:rPr sz="1400" b="0" i="0">
+                <a:solidFill>
+                  <a:srgbClr val="1C1B19"/>
+                </a:solidFill>
+                <a:latin typeface="Source Serif 4"/>
+              </a:rPr>
+              <a:t>Toast or fire? (vote with your feet)</a:t>
+            </a:r>
+          </a:p>
+          <a:p>
+            <a:pPr algn="l">
+              <a:spcAft>
+                <a:spcPts val="630"/>
+              </a:spcAft>
+            </a:pPr>
+            <a:r>
+              <a:rPr sz="1300" b="1" i="0">
+                <a:solidFill>
+                  <a:srgbClr val="F47B20"/>
+                </a:solidFill>
+                <a:latin typeface="Inter Tight"/>
+              </a:rPr>
+              <a:t>7 min   </a:t>
+            </a:r>
+            <a:r>
+              <a:rPr sz="1400" b="0" i="0">
+                <a:solidFill>
+                  <a:srgbClr val="1C1B19"/>
+                </a:solidFill>
+                <a:latin typeface="Source Serif 4"/>
+              </a:rPr>
+              <a:t>Build a ladder (private)</a:t>
+            </a:r>
+          </a:p>
+          <a:p>
+            <a:pPr algn="l">
+              <a:spcAft>
+                <a:spcPts val="630"/>
+              </a:spcAft>
+            </a:pPr>
+            <a:r>
+              <a:rPr sz="1300" b="1" i="0">
+                <a:solidFill>
+                  <a:srgbClr val="F47B20"/>
+                </a:solidFill>
+                <a:latin typeface="Inter Tight"/>
+              </a:rPr>
+              <a:t>3 min   </a:t>
+            </a:r>
+            <a:r>
+              <a:rPr sz="1400" b="0" i="0">
+                <a:solidFill>
+                  <a:srgbClr val="1C1B19"/>
+                </a:solidFill>
+                <a:latin typeface="Source Serif 4"/>
+              </a:rPr>
+              <a:t>Exit card and take-home link</a:t>
+            </a:r>
+          </a:p>
+          <a:p>
+            <a:pPr algn="l">
+              <a:spcAft>
+                <a:spcPts val="630"/>
+              </a:spcAft>
+            </a:pPr>
+            <a:r>
+              <a:rPr sz="1400" b="0" i="0">
+                <a:solidFill>
+                  <a:srgbClr val="1C1B19"/>
+                </a:solidFill>
+                <a:latin typeface="Source Serif 4"/>
+              </a:rPr>
+              <a:t/>
+            </a:r>
+          </a:p>
+          <a:p>
+            <a:pPr algn="l">
+              <a:spcAft>
+                <a:spcPts val="630"/>
+              </a:spcAft>
+            </a:pPr>
+            <a:r>
+              <a:rPr sz="1100" b="1" i="0">
+                <a:solidFill>
+                  <a:srgbClr val="0B2D5B"/>
+                </a:solidFill>
+                <a:latin typeface="Inter Tight"/>
+              </a:rPr>
+              <a:t>SHORT ON TIME (20-MINUTE ADVISORY)</a:t>
+            </a:r>
+          </a:p>
+          <a:p>
+            <a:pPr algn="l">
+              <a:spcAft>
+                <a:spcPts val="630"/>
+              </a:spcAft>
+            </a:pPr>
+            <a:r>
+              <a:rPr sz="1400" b="0" i="0">
+                <a:solidFill>
+                  <a:srgbClr val="1C1B19"/>
+                </a:solidFill>
+                <a:latin typeface="Source Serif 4"/>
+              </a:rPr>
+              <a:t>Myth or fact (5), the avoidance loop (5), toast or fire with two of the stories (7), exit card (3). Share the take-home link so students get the ladder and the rest.</a:t>
+            </a:r>
+          </a:p>
+        </p:txBody>
+      </p:sp>
+    </p:spTree>
+  </p:cSld>
+  <p:clrMapOvr>
+    <a:masterClrMapping/>
+  </p:clrMapOvr>
+</p:sld>
+</file>
+
+<file path=ppt/slides/slide12.xml><?xml version="1.0" encoding="utf-8"?>
+<p:sld xmlns:a="http://schemas.openxmlformats.org/drawingml/2006/main" xmlns:p="http://schemas.openxmlformats.org/presentationml/2006/main" xmlns:r="http://schemas.openxmlformats.org/officeDocument/2006/relationships" show="0">
+  <p:cSld>
+    <p:bg>
+      <p:bgPr>
+        <a:solidFill>
+          <a:srgbClr val="EEEBE4"/>
+        </a:solidFill>
+        <a:effectLst/>
+      </p:bgPr>
+    </p:bg>
+    <p:spTree>
+      <p:nvGrpSpPr>
+        <p:cNvPr id="1" name=""/>
+        <p:cNvGrpSpPr/>
+        <p:nvPr/>
+      </p:nvGrpSpPr>
+      <p:grpSpPr/>
+      <p:sp>
+        <p:nvSpPr>
+          <p:cNvPr id="2" name="Rectangle 1"/>
+          <p:cNvSpPr/>
+          <p:nvPr/>
+        </p:nvSpPr>
+        <p:spPr>
+          <a:xfrm>
+            <a:off x="0" y="0"/>
+            <a:ext cx="12191695" cy="384048"/>
+          </a:xfrm>
+          <a:prstGeom prst="rect">
+            <a:avLst/>
+          </a:prstGeom>
+          <a:solidFill>
+            <a:srgbClr val="0B2D5B"/>
+          </a:solidFill>
+          <a:ln>
+            <a:noFill/>
+          </a:ln>
+          <a:effectLst/>
+        </p:spPr>
+        <p:style>
+          <a:lnRef idx="1">
+            <a:schemeClr val="accent1"/>
+          </a:lnRef>
+          <a:fillRef idx="3">
+            <a:schemeClr val="accent1"/>
+          </a:fillRef>
+          <a:effectRef idx="2">
+            <a:schemeClr val="accent1"/>
+          </a:effectRef>
+          <a:fontRef idx="minor">
+            <a:schemeClr val="lt1"/>
+          </a:fontRef>
+        </p:style>
+        <p:txBody>
+          <a:bodyPr rtlCol="0" anchor="ctr"/>
+          <a:lstStyle/>
+          <a:p>
+            <a:pPr algn="ctr"/>
+          </a:p>
+        </p:txBody>
+      </p:sp>
+      <p:sp>
+        <p:nvSpPr>
+          <p:cNvPr id="3" name="TextBox 2"/>
+          <p:cNvSpPr txBox="1"/>
+          <p:nvPr/>
+        </p:nvSpPr>
+        <p:spPr>
+          <a:xfrm>
+            <a:off x="548640" y="100584"/>
+            <a:ext cx="10972800" cy="274320"/>
+          </a:xfrm>
+          <a:prstGeom prst="rect">
+            <a:avLst/>
+          </a:prstGeom>
+          <a:noFill/>
+        </p:spPr>
+        <p:txBody>
+          <a:bodyPr wrap="square" anchor="t" lIns="0" rIns="0" tIns="0" bIns="0">
+            <a:spAutoFit/>
+          </a:bodyPr>
+          <a:lstStyle/>
+          <a:p>
+            <a:pPr algn="l">
+              <a:spcAft>
+                <a:spcPts val="495"/>
+              </a:spcAft>
+            </a:pPr>
+            <a:r>
+              <a:rPr sz="1100" b="1" i="0">
+                <a:solidFill>
+                  <a:srgbClr val="FFFFFF"/>
+                </a:solidFill>
+                <a:latin typeface="Inter Tight"/>
+              </a:rPr>
+              <a:t>TEACHER PAGE  ·  skipped when you present  ·  Before you teach</a:t>
+            </a:r>
+          </a:p>
+        </p:txBody>
+      </p:sp>
+      <p:sp>
+        <p:nvSpPr>
+          <p:cNvPr id="4" name="TextBox 3"/>
+          <p:cNvSpPr txBox="1"/>
+          <p:nvPr/>
+        </p:nvSpPr>
+        <p:spPr>
+          <a:xfrm>
+            <a:off x="548640" y="685800"/>
+            <a:ext cx="10972800" cy="640080"/>
+          </a:xfrm>
+          <a:prstGeom prst="rect">
+            <a:avLst/>
+          </a:prstGeom>
+          <a:noFill/>
+        </p:spPr>
+        <p:txBody>
+          <a:bodyPr wrap="square" anchor="t" lIns="0" rIns="0" tIns="0" bIns="0">
+            <a:spAutoFit/>
+          </a:bodyPr>
+          <a:lstStyle/>
+          <a:p>
+            <a:pPr algn="l">
+              <a:spcAft>
+                <a:spcPts val="1350"/>
+              </a:spcAft>
+            </a:pPr>
+            <a:r>
+              <a:rPr sz="3000" b="1" i="0">
+                <a:solidFill>
+                  <a:srgbClr val="1C1B19"/>
+                </a:solidFill>
+                <a:latin typeface="Source Serif 4"/>
+              </a:rPr>
+              <a:t>Before you teach</a:t>
+            </a:r>
+          </a:p>
+        </p:txBody>
+      </p:sp>
+      <p:sp>
+        <p:nvSpPr>
+          <p:cNvPr id="5" name="TextBox 4"/>
+          <p:cNvSpPr txBox="1"/>
+          <p:nvPr/>
+        </p:nvSpPr>
+        <p:spPr>
+          <a:xfrm>
+            <a:off x="548640" y="1463040"/>
+            <a:ext cx="5394960" cy="4937760"/>
+          </a:xfrm>
+          <a:prstGeom prst="rect">
+            <a:avLst/>
+          </a:prstGeom>
+          <a:noFill/>
+        </p:spPr>
+        <p:txBody>
+          <a:bodyPr wrap="square" anchor="t" lIns="0" rIns="0" tIns="0" bIns="0">
+            <a:spAutoFit/>
+          </a:bodyPr>
+          <a:lstStyle/>
+          <a:p>
+            <a:pPr algn="l">
+              <a:spcAft>
+                <a:spcPts val="585"/>
+              </a:spcAft>
+            </a:pPr>
+            <a:r>
+              <a:rPr sz="1500" b="1" i="0">
+                <a:solidFill>
+                  <a:srgbClr val="1C1B19"/>
+                </a:solidFill>
+                <a:latin typeface="Source Serif 4"/>
+              </a:rPr>
+              <a:t>Assume someone in the room has panic attacks.</a:t>
+            </a:r>
+          </a:p>
+          <a:p>
+            <a:pPr algn="l">
+              <a:spcAft>
+                <a:spcPts val="585"/>
+              </a:spcAft>
+            </a:pPr>
+            <a:r>
+              <a:rPr sz="1300" b="0" i="0">
+                <a:solidFill>
+                  <a:srgbClr val="1C1B19"/>
+                </a:solidFill>
+                <a:latin typeface="Source Serif 4"/>
+              </a:rPr>
+              <a:t>About 1 in 3 teens meets criteria for an anxiety disorder by 18. Never ask students to name their own fears or share a ladder. If someone volunteers, keep it brief and thank them. Say at the start and the end that a counselor is available afterward.</a:t>
+            </a:r>
+          </a:p>
+          <a:p>
+            <a:pPr algn="l">
+              <a:spcAft>
+                <a:spcPts val="585"/>
+              </a:spcAft>
+            </a:pPr>
+            <a:r>
+              <a:rPr sz="1300" b="0" i="0">
+                <a:solidFill>
+                  <a:srgbClr val="1C1B19"/>
+                </a:solidFill>
+                <a:latin typeface="Source Serif 4"/>
+              </a:rPr>
+              <a:t/>
+            </a:r>
+          </a:p>
+          <a:p>
+            <a:pPr algn="l">
+              <a:spcAft>
+                <a:spcPts val="585"/>
+              </a:spcAft>
+            </a:pPr>
+            <a:r>
+              <a:rPr sz="1500" b="1" i="0">
+                <a:solidFill>
+                  <a:srgbClr val="1C1B19"/>
+                </a:solidFill>
+                <a:latin typeface="Source Serif 4"/>
+              </a:rPr>
+              <a:t>If a student panics during class.</a:t>
+            </a:r>
+          </a:p>
+          <a:p>
+            <a:pPr algn="l">
+              <a:spcAft>
+                <a:spcPts val="585"/>
+              </a:spcAft>
+            </a:pPr>
+            <a:r>
+              <a:rPr sz="1300" b="0" i="0">
+                <a:solidFill>
+                  <a:srgbClr val="1C1B19"/>
+                </a:solidFill>
+                <a:latin typeface="Source Serif 4"/>
+              </a:rPr>
+              <a:t>Stay calm and quiet, and keep the room's attention off them. Offer a choice: step into the hall with you or another adult, or stay put. Speak slowly. Breathe with them, in for 4, out for 6. Say it will peak and pass in a few minutes. Don't crowd them, touch them without asking, or tell them to calm down. Afterward, let them rejoin without comment.</a:t>
+            </a:r>
+          </a:p>
+          <a:p>
+            <a:pPr algn="l">
+              <a:spcAft>
+                <a:spcPts val="585"/>
+              </a:spcAft>
+            </a:pPr>
+            <a:r>
+              <a:rPr sz="1300" b="0" i="0">
+                <a:solidFill>
+                  <a:srgbClr val="1C1B19"/>
+                </a:solidFill>
+                <a:latin typeface="Source Serif 4"/>
+              </a:rPr>
+              <a:t/>
+            </a:r>
+          </a:p>
+          <a:p>
+            <a:pPr algn="l">
+              <a:spcAft>
+                <a:spcPts val="585"/>
+              </a:spcAft>
+            </a:pPr>
+            <a:r>
+              <a:rPr sz="1500" b="1" i="0">
+                <a:solidFill>
+                  <a:srgbClr val="1C1B19"/>
+                </a:solidFill>
+                <a:latin typeface="Source Serif 4"/>
+              </a:rPr>
+              <a:t>When to bring in the nurse.</a:t>
+            </a:r>
+          </a:p>
+          <a:p>
+            <a:pPr algn="l">
+              <a:spcAft>
+                <a:spcPts val="585"/>
+              </a:spcAft>
+            </a:pPr>
+            <a:r>
+              <a:rPr sz="1300" b="0" i="0">
+                <a:solidFill>
+                  <a:srgbClr val="1C1B19"/>
+                </a:solidFill>
+                <a:latin typeface="Source Serif 4"/>
+              </a:rPr>
+              <a:t>Send them to the nurse, with an escort, if it's the first time you've seen it, if they mention chest pain, fainting, or a health condition like asthma or diabetes, or if you aren't sure it's panic. The nurse can rule out a medical cause. Call 911 if a student passes out, can't breathe, or seems confused.</a:t>
+            </a:r>
+          </a:p>
+          <a:p>
+            <a:pPr algn="l">
+              <a:spcAft>
+                <a:spcPts val="585"/>
+              </a:spcAft>
+            </a:pPr>
+            <a:r>
+              <a:rPr sz="1300" b="0" i="0">
+                <a:solidFill>
+                  <a:srgbClr val="1C1B19"/>
+                </a:solidFill>
+                <a:latin typeface="Source Serif 4"/>
+              </a:rPr>
+              <a:t/>
+            </a:r>
+          </a:p>
+        </p:txBody>
+      </p:sp>
+      <p:sp>
+        <p:nvSpPr>
+          <p:cNvPr id="6" name="TextBox 5"/>
+          <p:cNvSpPr txBox="1"/>
+          <p:nvPr/>
+        </p:nvSpPr>
+        <p:spPr>
+          <a:xfrm>
+            <a:off x="6217920" y="1463040"/>
+            <a:ext cx="5394960" cy="4937760"/>
+          </a:xfrm>
+          <a:prstGeom prst="rect">
+            <a:avLst/>
+          </a:prstGeom>
+          <a:noFill/>
+        </p:spPr>
+        <p:txBody>
+          <a:bodyPr wrap="square" anchor="t" lIns="0" rIns="0" tIns="0" bIns="0">
+            <a:spAutoFit/>
+          </a:bodyPr>
+          <a:lstStyle/>
+          <a:p>
+            <a:pPr algn="l">
+              <a:spcAft>
+                <a:spcPts val="585"/>
+              </a:spcAft>
+            </a:pPr>
+            <a:r>
+              <a:rPr sz="1500" b="1" i="0">
+                <a:solidFill>
+                  <a:srgbClr val="1C1B19"/>
+                </a:solidFill>
+                <a:latin typeface="Source Serif 4"/>
+              </a:rPr>
+              <a:t>When to bring in a counselor.</a:t>
+            </a:r>
+          </a:p>
+          <a:p>
+            <a:pPr algn="l">
+              <a:spcAft>
+                <a:spcPts val="585"/>
+              </a:spcAft>
+            </a:pPr>
+            <a:r>
+              <a:rPr sz="1300" b="0" i="0">
+                <a:solidFill>
+                  <a:srgbClr val="1C1B19"/>
+                </a:solidFill>
+                <a:latin typeface="Source Serif 4"/>
+              </a:rPr>
+              <a:t>Tell a counselor the same day after any panic episode in class. Also refer if a student is missing classes, practices or friends because of anxiety, is using vapes, weed, alcohol or pills to cope, or says they feel hopeless. Disclosures go to a counselor. No screening questions in class.</a:t>
+            </a:r>
+          </a:p>
+          <a:p>
+            <a:pPr algn="l">
+              <a:spcAft>
+                <a:spcPts val="585"/>
+              </a:spcAft>
+            </a:pPr>
+            <a:r>
+              <a:rPr sz="1300" b="0" i="0">
+                <a:solidFill>
+                  <a:srgbClr val="1C1B19"/>
+                </a:solidFill>
+                <a:latin typeface="Source Serif 4"/>
+              </a:rPr>
+              <a:t/>
+            </a:r>
+          </a:p>
+          <a:p>
+            <a:pPr algn="l">
+              <a:spcAft>
+                <a:spcPts val="585"/>
+              </a:spcAft>
+            </a:pPr>
+            <a:r>
+              <a:rPr sz="1500" b="1" i="0">
+                <a:solidFill>
+                  <a:srgbClr val="1C1B19"/>
+                </a:solidFill>
+                <a:latin typeface="Source Serif 4"/>
+              </a:rPr>
+              <a:t>Exposure is the student's choice.</a:t>
+            </a:r>
+          </a:p>
+          <a:p>
+            <a:pPr algn="l">
+              <a:spcAft>
+                <a:spcPts val="585"/>
+              </a:spcAft>
+            </a:pPr>
+            <a:r>
+              <a:rPr sz="1300" b="0" i="0">
+                <a:solidFill>
+                  <a:srgbClr val="1C1B19"/>
+                </a:solidFill>
+                <a:latin typeface="Source Serif 4"/>
+              </a:rPr>
+              <a:t>This lesson teaches the idea. Don't push anyone into a feared situation to practice, and don't cold-call an anxious student to prove a point. Bigger fears belong with a counselor or therapist. Existing accommodations stay in place.</a:t>
+            </a:r>
+          </a:p>
+          <a:p>
+            <a:pPr algn="l">
+              <a:spcAft>
+                <a:spcPts val="585"/>
+              </a:spcAft>
+            </a:pPr>
+            <a:r>
+              <a:rPr sz="1300" b="0" i="0">
+                <a:solidFill>
+                  <a:srgbClr val="1C1B19"/>
+                </a:solidFill>
+                <a:latin typeface="Source Serif 4"/>
+              </a:rPr>
+              <a:t/>
+            </a:r>
+          </a:p>
+          <a:p>
+            <a:pPr algn="l">
+              <a:spcAft>
+                <a:spcPts val="585"/>
+              </a:spcAft>
+            </a:pPr>
+            <a:r>
+              <a:rPr sz="1500" b="1" i="0">
+                <a:solidFill>
+                  <a:srgbClr val="1C1B19"/>
+                </a:solidFill>
+                <a:latin typeface="Source Serif 4"/>
+              </a:rPr>
+              <a:t>Burnt toast is the target. Real danger still counts.</a:t>
+            </a:r>
+          </a:p>
+          <a:p>
+            <a:pPr algn="l">
+              <a:spcAft>
+                <a:spcPts val="585"/>
+              </a:spcAft>
+            </a:pPr>
+            <a:r>
+              <a:rPr sz="1300" b="0" i="0">
+                <a:solidFill>
+                  <a:srgbClr val="1C1B19"/>
+                </a:solidFill>
+                <a:latin typeface="Source Serif 4"/>
+              </a:rPr>
+              <a:t>Some fears are accurate. Bullying, an unsafe home, or a friend in medical trouble needs a real response. If the voting surfaces something like that, take it seriously and follow up with a counselor.</a:t>
+            </a:r>
+          </a:p>
+          <a:p>
+            <a:pPr algn="l">
+              <a:spcAft>
+                <a:spcPts val="585"/>
+              </a:spcAft>
+            </a:pPr>
+            <a:r>
+              <a:rPr sz="1300" b="0" i="0">
+                <a:solidFill>
+                  <a:srgbClr val="1C1B19"/>
+                </a:solidFill>
+                <a:latin typeface="Source Serif 4"/>
+              </a:rPr>
+              <a:t/>
+            </a:r>
+          </a:p>
+        </p:txBody>
+      </p:sp>
+    </p:spTree>
+  </p:cSld>
+  <p:clrMapOvr>
+    <a:masterClrMapping/>
+  </p:clrMapOvr>
+</p:sld>
+</file>
+
+<file path=ppt/slides/slide13.xml><?xml version="1.0" encoding="utf-8"?>
+<p:sld xmlns:a="http://schemas.openxmlformats.org/drawingml/2006/main" xmlns:p="http://schemas.openxmlformats.org/presentationml/2006/main" xmlns:r="http://schemas.openxmlformats.org/officeDocument/2006/relationships" show="0">
+  <p:cSld>
+    <p:bg>
+      <p:bgPr>
+        <a:solidFill>
+          <a:srgbClr val="EEEBE4"/>
+        </a:solidFill>
+        <a:effectLst/>
+      </p:bgPr>
+    </p:bg>
+    <p:spTree>
+      <p:nvGrpSpPr>
+        <p:cNvPr id="1" name=""/>
+        <p:cNvGrpSpPr/>
+        <p:nvPr/>
+      </p:nvGrpSpPr>
+      <p:grpSpPr/>
+      <p:sp>
+        <p:nvSpPr>
+          <p:cNvPr id="2" name="Rectangle 1"/>
+          <p:cNvSpPr/>
+          <p:nvPr/>
+        </p:nvSpPr>
+        <p:spPr>
+          <a:xfrm>
+            <a:off x="0" y="0"/>
+            <a:ext cx="12191695" cy="384048"/>
+          </a:xfrm>
+          <a:prstGeom prst="rect">
+            <a:avLst/>
+          </a:prstGeom>
+          <a:solidFill>
+            <a:srgbClr val="0B2D5B"/>
+          </a:solidFill>
+          <a:ln>
+            <a:noFill/>
+          </a:ln>
+          <a:effectLst/>
+        </p:spPr>
+        <p:style>
+          <a:lnRef idx="1">
+            <a:schemeClr val="accent1"/>
+          </a:lnRef>
+          <a:fillRef idx="3">
+            <a:schemeClr val="accent1"/>
+          </a:fillRef>
+          <a:effectRef idx="2">
+            <a:schemeClr val="accent1"/>
+          </a:effectRef>
+          <a:fontRef idx="minor">
+            <a:schemeClr val="lt1"/>
+          </a:fontRef>
+        </p:style>
+        <p:txBody>
+          <a:bodyPr rtlCol="0" anchor="ctr"/>
+          <a:lstStyle/>
+          <a:p>
+            <a:pPr algn="ctr"/>
+          </a:p>
+        </p:txBody>
+      </p:sp>
+      <p:sp>
+        <p:nvSpPr>
+          <p:cNvPr id="3" name="TextBox 2"/>
+          <p:cNvSpPr txBox="1"/>
+          <p:nvPr/>
+        </p:nvSpPr>
+        <p:spPr>
+          <a:xfrm>
+            <a:off x="548640" y="100584"/>
+            <a:ext cx="10972800" cy="274320"/>
+          </a:xfrm>
+          <a:prstGeom prst="rect">
+            <a:avLst/>
+          </a:prstGeom>
+          <a:noFill/>
+        </p:spPr>
+        <p:txBody>
+          <a:bodyPr wrap="square" anchor="t" lIns="0" rIns="0" tIns="0" bIns="0">
+            <a:spAutoFit/>
+          </a:bodyPr>
+          <a:lstStyle/>
+          <a:p>
+            <a:pPr algn="l">
+              <a:spcAft>
+                <a:spcPts val="495"/>
+              </a:spcAft>
+            </a:pPr>
+            <a:r>
+              <a:rPr sz="1100" b="1" i="0">
+                <a:solidFill>
+                  <a:srgbClr val="FFFFFF"/>
+                </a:solidFill>
+                <a:latin typeface="Inter Tight"/>
+              </a:rPr>
+              <a:t>TEACHER PAGE  ·  skipped when you present  ·  Every student in the room</a:t>
+            </a:r>
+          </a:p>
+        </p:txBody>
+      </p:sp>
+      <p:sp>
+        <p:nvSpPr>
+          <p:cNvPr id="4" name="TextBox 3"/>
+          <p:cNvSpPr txBox="1"/>
+          <p:nvPr/>
+        </p:nvSpPr>
+        <p:spPr>
+          <a:xfrm>
+            <a:off x="548640" y="685800"/>
+            <a:ext cx="10972800" cy="640080"/>
+          </a:xfrm>
+          <a:prstGeom prst="rect">
+            <a:avLst/>
+          </a:prstGeom>
+          <a:noFill/>
+        </p:spPr>
+        <p:txBody>
+          <a:bodyPr wrap="square" anchor="t" lIns="0" rIns="0" tIns="0" bIns="0">
+            <a:spAutoFit/>
+          </a:bodyPr>
+          <a:lstStyle/>
+          <a:p>
+            <a:pPr algn="l">
+              <a:spcAft>
+                <a:spcPts val="1350"/>
+              </a:spcAft>
+            </a:pPr>
+            <a:r>
+              <a:rPr sz="3000" b="1" i="0">
+                <a:solidFill>
+                  <a:srgbClr val="1C1B19"/>
+                </a:solidFill>
+                <a:latin typeface="Source Serif 4"/>
+              </a:rPr>
+              <a:t>Every student in the room</a:t>
+            </a:r>
+          </a:p>
+        </p:txBody>
+      </p:sp>
+      <p:sp>
+        <p:nvSpPr>
+          <p:cNvPr id="5" name="TextBox 4"/>
+          <p:cNvSpPr txBox="1"/>
+          <p:nvPr/>
+        </p:nvSpPr>
+        <p:spPr>
+          <a:xfrm>
+            <a:off x="548640" y="1325880"/>
+            <a:ext cx="10972800" cy="365760"/>
+          </a:xfrm>
+          <a:prstGeom prst="rect">
+            <a:avLst/>
+          </a:prstGeom>
+          <a:noFill/>
+        </p:spPr>
+        <p:txBody>
+          <a:bodyPr wrap="square" anchor="t" lIns="0" rIns="0" tIns="0" bIns="0">
+            <a:spAutoFit/>
+          </a:bodyPr>
+          <a:lstStyle/>
+          <a:p>
+            <a:pPr algn="l">
+              <a:spcAft>
+                <a:spcPts val="630"/>
+              </a:spcAft>
+            </a:pPr>
+            <a:r>
+              <a:rPr sz="1400" b="0" i="0">
+                <a:solidFill>
+                  <a:srgbClr val="5D5A54"/>
+                </a:solidFill>
+                <a:latin typeface="Inter Tight"/>
+              </a:rPr>
+              <a:t>Culture, family, identity, ability and money: what to keep in mind for this topic.</a:t>
+            </a:r>
+          </a:p>
+        </p:txBody>
+      </p:sp>
+      <p:sp>
+        <p:nvSpPr>
+          <p:cNvPr id="6" name="TextBox 5"/>
+          <p:cNvSpPr txBox="1"/>
+          <p:nvPr/>
+        </p:nvSpPr>
+        <p:spPr>
+          <a:xfrm>
+            <a:off x="548640" y="1828800"/>
+            <a:ext cx="5394960" cy="4572000"/>
+          </a:xfrm>
+          <a:prstGeom prst="rect">
+            <a:avLst/>
+          </a:prstGeom>
+          <a:noFill/>
+        </p:spPr>
+        <p:txBody>
+          <a:bodyPr wrap="square" anchor="t" lIns="0" rIns="0" tIns="0" bIns="0">
+            <a:spAutoFit/>
+          </a:bodyPr>
+          <a:lstStyle/>
+          <a:p>
+            <a:pPr algn="l">
+              <a:spcAft>
+                <a:spcPts val="585"/>
+              </a:spcAft>
+            </a:pPr>
+            <a:r>
+              <a:rPr sz="1500" b="1" i="0">
+                <a:solidFill>
+                  <a:srgbClr val="1C1B19"/>
+                </a:solidFill>
+                <a:latin typeface="Source Serif 4"/>
+              </a:rPr>
+              <a:t>Not every family calls it anxiety.</a:t>
+            </a:r>
+          </a:p>
+          <a:p>
+            <a:pPr algn="l">
+              <a:spcAft>
+                <a:spcPts val="585"/>
+              </a:spcAft>
+            </a:pPr>
+            <a:r>
+              <a:rPr sz="1300" b="0" i="0">
+                <a:solidFill>
+                  <a:srgbClr val="1C1B19"/>
+                </a:solidFill>
+                <a:latin typeface="Source Serif 4"/>
+              </a:rPr>
+              <a:t>Some say stress, nerves, or overthinking. In some homes it shows up as stomachaches or headaches and gets treated as a body problem. Some lean on faith, family or community. Any of those can sit alongside these tools. Ask what words students' own families use, privately.</a:t>
+            </a:r>
+          </a:p>
+          <a:p>
+            <a:pPr algn="l">
+              <a:spcAft>
+                <a:spcPts val="585"/>
+              </a:spcAft>
+            </a:pPr>
+            <a:r>
+              <a:rPr sz="1300" b="0" i="0">
+                <a:solidFill>
+                  <a:srgbClr val="1C1B19"/>
+                </a:solidFill>
+                <a:latin typeface="Source Serif 4"/>
+              </a:rPr>
+              <a:t/>
+            </a:r>
+          </a:p>
+          <a:p>
+            <a:pPr algn="l">
+              <a:spcAft>
+                <a:spcPts val="585"/>
+              </a:spcAft>
+            </a:pPr>
+            <a:r>
+              <a:rPr sz="1500" b="1" i="0">
+                <a:solidFill>
+                  <a:srgbClr val="1C1B19"/>
+                </a:solidFill>
+                <a:latin typeface="Source Serif 4"/>
+              </a:rPr>
+              <a:t>Some fears are realistic.</a:t>
+            </a:r>
+          </a:p>
+          <a:p>
+            <a:pPr algn="l">
+              <a:spcAft>
+                <a:spcPts val="585"/>
+              </a:spcAft>
+            </a:pPr>
+            <a:r>
+              <a:rPr sz="1300" b="0" i="0">
+                <a:solidFill>
+                  <a:srgbClr val="1C1B19"/>
+                </a:solidFill>
+                <a:latin typeface="Source Serif 4"/>
+              </a:rPr>
+              <a:t>Students who face racism, worry about a family member's immigration status, or have been targeted for who they are may carry fears that match real risk. Don't label those false alarms. Keep the burnt-toast examples to everyday things like calls, tryouts and group chats.</a:t>
+            </a:r>
+          </a:p>
+          <a:p>
+            <a:pPr algn="l">
+              <a:spcAft>
+                <a:spcPts val="585"/>
+              </a:spcAft>
+            </a:pPr>
+            <a:r>
+              <a:rPr sz="1300" b="0" i="0">
+                <a:solidFill>
+                  <a:srgbClr val="1C1B19"/>
+                </a:solidFill>
+                <a:latin typeface="Source Serif 4"/>
+              </a:rPr>
+              <a:t/>
+            </a:r>
+          </a:p>
+          <a:p>
+            <a:pPr algn="l">
+              <a:spcAft>
+                <a:spcPts val="585"/>
+              </a:spcAft>
+            </a:pPr>
+            <a:r>
+              <a:rPr sz="1500" b="1" i="0">
+                <a:solidFill>
+                  <a:srgbClr val="1C1B19"/>
+                </a:solidFill>
+                <a:latin typeface="Source Serif 4"/>
+              </a:rPr>
+              <a:t>LGBTQ+ students and being seen.</a:t>
+            </a:r>
+          </a:p>
+          <a:p>
+            <a:pPr algn="l">
+              <a:spcAft>
+                <a:spcPts val="585"/>
+              </a:spcAft>
+            </a:pPr>
+            <a:r>
+              <a:rPr sz="1300" b="0" i="0">
+                <a:solidFill>
+                  <a:srgbClr val="1C1B19"/>
+                </a:solidFill>
+                <a:latin typeface="Source Serif 4"/>
+              </a:rPr>
+              <a:t>Social anxiety can be tied to whether a student is out, and to whom. Never use coming out as an exposure example. For any student who needs support beyond school hours, The Trevor Project (1-866-488-7386 or text START to 678-678) sits alongside 988.</a:t>
+            </a:r>
+          </a:p>
+          <a:p>
+            <a:pPr algn="l">
+              <a:spcAft>
+                <a:spcPts val="585"/>
+              </a:spcAft>
+            </a:pPr>
+            <a:r>
+              <a:rPr sz="1300" b="0" i="0">
+                <a:solidFill>
+                  <a:srgbClr val="1C1B19"/>
+                </a:solidFill>
+                <a:latin typeface="Source Serif 4"/>
+              </a:rPr>
+              <a:t/>
+            </a:r>
+          </a:p>
+        </p:txBody>
+      </p:sp>
+      <p:sp>
+        <p:nvSpPr>
+          <p:cNvPr id="7" name="TextBox 6"/>
+          <p:cNvSpPr txBox="1"/>
+          <p:nvPr/>
+        </p:nvSpPr>
+        <p:spPr>
+          <a:xfrm>
+            <a:off x="6217920" y="1828800"/>
+            <a:ext cx="5394960" cy="4572000"/>
+          </a:xfrm>
+          <a:prstGeom prst="rect">
+            <a:avLst/>
+          </a:prstGeom>
+          <a:noFill/>
+        </p:spPr>
+        <p:txBody>
+          <a:bodyPr wrap="square" anchor="t" lIns="0" rIns="0" tIns="0" bIns="0">
+            <a:spAutoFit/>
+          </a:bodyPr>
+          <a:lstStyle/>
+          <a:p>
+            <a:pPr algn="l">
+              <a:spcAft>
+                <a:spcPts val="585"/>
+              </a:spcAft>
+            </a:pPr>
+            <a:r>
+              <a:rPr sz="1500" b="1" i="0">
+                <a:solidFill>
+                  <a:srgbClr val="1C1B19"/>
+                </a:solidFill>
+                <a:latin typeface="Source Serif 4"/>
+              </a:rPr>
+              <a:t>Neurodivergent and disabled students.</a:t>
+            </a:r>
+          </a:p>
+          <a:p>
+            <a:pPr algn="l">
+              <a:spcAft>
+                <a:spcPts val="585"/>
+              </a:spcAft>
+            </a:pPr>
+            <a:r>
+              <a:rPr sz="1300" b="0" i="0">
+                <a:solidFill>
+                  <a:srgbClr val="1C1B19"/>
+                </a:solidFill>
+                <a:latin typeface="Source Serif 4"/>
+              </a:rPr>
+              <a:t>Autistic students and students with sensory or processing differences may avoid noise, crowds or eye contact for reasons that aren't anxiety. Don't treat eye contact, speaking up, or sitting still as signs of being okay. Accommodations aren't avoidance.</a:t>
+            </a:r>
+          </a:p>
+          <a:p>
+            <a:pPr algn="l">
+              <a:spcAft>
+                <a:spcPts val="585"/>
+              </a:spcAft>
+            </a:pPr>
+            <a:r>
+              <a:rPr sz="1300" b="0" i="0">
+                <a:solidFill>
+                  <a:srgbClr val="1C1B19"/>
+                </a:solidFill>
+                <a:latin typeface="Source Serif 4"/>
+              </a:rPr>
+              <a:t/>
+            </a:r>
+          </a:p>
+          <a:p>
+            <a:pPr algn="l">
+              <a:spcAft>
+                <a:spcPts val="585"/>
+              </a:spcAft>
+            </a:pPr>
+            <a:r>
+              <a:rPr sz="1500" b="1" i="0">
+                <a:solidFill>
+                  <a:srgbClr val="1C1B19"/>
+                </a:solidFill>
+                <a:latin typeface="Source Serif 4"/>
+              </a:rPr>
+              <a:t>"Coaching, not rescue" works with any adult.</a:t>
+            </a:r>
+          </a:p>
+          <a:p>
+            <a:pPr algn="l">
+              <a:spcAft>
+                <a:spcPts val="585"/>
+              </a:spcAft>
+            </a:pPr>
+            <a:r>
+              <a:rPr sz="1300" b="0" i="0">
+                <a:solidFill>
+                  <a:srgbClr val="1C1B19"/>
+                </a:solidFill>
+                <a:latin typeface="Source Serif 4"/>
+              </a:rPr>
+              <a:t>The parent research applies to whoever raises the student: one parent, two, a grandparent, foster or kinship caregivers, an older sibling. Say "the adults in your life." Some students have no adult at home to coach them; a counselor or coach can fill that role.</a:t>
+            </a:r>
+          </a:p>
+          <a:p>
+            <a:pPr algn="l">
+              <a:spcAft>
+                <a:spcPts val="585"/>
+              </a:spcAft>
+            </a:pPr>
+            <a:r>
+              <a:rPr sz="1300" b="0" i="0">
+                <a:solidFill>
+                  <a:srgbClr val="1C1B19"/>
+                </a:solidFill>
+                <a:latin typeface="Source Serif 4"/>
+              </a:rPr>
+              <a:t/>
+            </a:r>
+          </a:p>
+          <a:p>
+            <a:pPr algn="l">
+              <a:spcAft>
+                <a:spcPts val="585"/>
+              </a:spcAft>
+            </a:pPr>
+            <a:r>
+              <a:rPr sz="1500" b="1" i="0">
+                <a:solidFill>
+                  <a:srgbClr val="1C1B19"/>
+                </a:solidFill>
+                <a:latin typeface="Source Serif 4"/>
+              </a:rPr>
+              <a:t>Language, money and phone calls.</a:t>
+            </a:r>
+          </a:p>
+          <a:p>
+            <a:pPr algn="l">
+              <a:spcAft>
+                <a:spcPts val="585"/>
+              </a:spcAft>
+            </a:pPr>
+            <a:r>
+              <a:rPr sz="1300" b="0" i="0">
+                <a:solidFill>
+                  <a:srgbClr val="1C1B19"/>
+                </a:solidFill>
+                <a:latin typeface="Source Serif 4"/>
+              </a:rPr>
+              <a:t>Some students already make calls for their family, sometimes in a second language. That counts as hard work they've done. Help is free at school: a counselor and the nurse. Outside school, community clinics offer sliding-scale care and interpreters.</a:t>
+            </a:r>
+          </a:p>
+          <a:p>
+            <a:pPr algn="l">
+              <a:spcAft>
+                <a:spcPts val="585"/>
+              </a:spcAft>
+            </a:pPr>
+            <a:r>
+              <a:rPr sz="1300" b="0" i="0">
+                <a:solidFill>
+                  <a:srgbClr val="1C1B19"/>
+                </a:solidFill>
+                <a:latin typeface="Source Serif 4"/>
+              </a:rPr>
+              <a:t/>
+            </a:r>
+          </a:p>
+        </p:txBody>
+      </p:sp>
+    </p:spTree>
+  </p:cSld>
+  <p:clrMapOvr>
+    <a:masterClrMapping/>
+  </p:clrMapOvr>
+</p:sld>
+</file>
+
+<file path=ppt/slides/slide14.xml><?xml version="1.0" encoding="utf-8"?>
+<p:sld xmlns:a="http://schemas.openxmlformats.org/drawingml/2006/main" xmlns:p="http://schemas.openxmlformats.org/presentationml/2006/main" xmlns:r="http://schemas.openxmlformats.org/officeDocument/2006/relationships" show="0">
+  <p:cSld>
+    <p:bg>
+      <p:bgPr>
+        <a:solidFill>
+          <a:srgbClr val="EEEBE4"/>
+        </a:solidFill>
+        <a:effectLst/>
+      </p:bgPr>
+    </p:bg>
+    <p:spTree>
+      <p:nvGrpSpPr>
+        <p:cNvPr id="1" name=""/>
+        <p:cNvGrpSpPr/>
+        <p:nvPr/>
+      </p:nvGrpSpPr>
+      <p:grpSpPr/>
+      <p:sp>
+        <p:nvSpPr>
+          <p:cNvPr id="2" name="Rectangle 1"/>
+          <p:cNvSpPr/>
+          <p:nvPr/>
+        </p:nvSpPr>
+        <p:spPr>
+          <a:xfrm>
+            <a:off x="0" y="0"/>
+            <a:ext cx="12191695" cy="384048"/>
+          </a:xfrm>
+          <a:prstGeom prst="rect">
+            <a:avLst/>
+          </a:prstGeom>
+          <a:solidFill>
+            <a:srgbClr val="0B2D5B"/>
+          </a:solidFill>
+          <a:ln>
+            <a:noFill/>
+          </a:ln>
+          <a:effectLst/>
+        </p:spPr>
+        <p:style>
+          <a:lnRef idx="1">
+            <a:schemeClr val="accent1"/>
+          </a:lnRef>
+          <a:fillRef idx="3">
+            <a:schemeClr val="accent1"/>
+          </a:fillRef>
+          <a:effectRef idx="2">
+            <a:schemeClr val="accent1"/>
+          </a:effectRef>
+          <a:fontRef idx="minor">
+            <a:schemeClr val="lt1"/>
+          </a:fontRef>
+        </p:style>
+        <p:txBody>
+          <a:bodyPr rtlCol="0" anchor="ctr"/>
+          <a:lstStyle/>
+          <a:p>
+            <a:pPr algn="ctr"/>
+          </a:p>
+        </p:txBody>
+      </p:sp>
+      <p:sp>
+        <p:nvSpPr>
+          <p:cNvPr id="3" name="TextBox 2"/>
+          <p:cNvSpPr txBox="1"/>
+          <p:nvPr/>
+        </p:nvSpPr>
+        <p:spPr>
+          <a:xfrm>
+            <a:off x="548640" y="100584"/>
+            <a:ext cx="10972800" cy="274320"/>
+          </a:xfrm>
+          <a:prstGeom prst="rect">
+            <a:avLst/>
+          </a:prstGeom>
+          <a:noFill/>
+        </p:spPr>
+        <p:txBody>
+          <a:bodyPr wrap="square" anchor="t" lIns="0" rIns="0" tIns="0" bIns="0">
+            <a:spAutoFit/>
+          </a:bodyPr>
+          <a:lstStyle/>
+          <a:p>
+            <a:pPr algn="l">
+              <a:spcAft>
+                <a:spcPts val="495"/>
+              </a:spcAft>
+            </a:pPr>
+            <a:r>
+              <a:rPr sz="1100" b="1" i="0">
+                <a:solidFill>
+                  <a:srgbClr val="FFFFFF"/>
+                </a:solidFill>
+                <a:latin typeface="Inter Tight"/>
+              </a:rPr>
+              <a:t>TEACHER PAGE  ·  skipped when you present  ·  Background</a:t>
+            </a:r>
+          </a:p>
+        </p:txBody>
+      </p:sp>
+      <p:sp>
+        <p:nvSpPr>
+          <p:cNvPr id="4" name="TextBox 3"/>
+          <p:cNvSpPr txBox="1"/>
+          <p:nvPr/>
+        </p:nvSpPr>
+        <p:spPr>
+          <a:xfrm>
+            <a:off x="548640" y="685800"/>
+            <a:ext cx="10972800" cy="640080"/>
+          </a:xfrm>
+          <a:prstGeom prst="rect">
+            <a:avLst/>
+          </a:prstGeom>
+          <a:noFill/>
+        </p:spPr>
+        <p:txBody>
+          <a:bodyPr wrap="square" anchor="t" lIns="0" rIns="0" tIns="0" bIns="0">
+            <a:spAutoFit/>
+          </a:bodyPr>
+          <a:lstStyle/>
+          <a:p>
+            <a:pPr algn="l">
+              <a:spcAft>
+                <a:spcPts val="1350"/>
+              </a:spcAft>
+            </a:pPr>
+            <a:r>
+              <a:rPr sz="3000" b="1" i="0">
+                <a:solidFill>
+                  <a:srgbClr val="1C1B19"/>
+                </a:solidFill>
+                <a:latin typeface="Source Serif 4"/>
+              </a:rPr>
+              <a:t>What the research says</a:t>
+            </a:r>
+          </a:p>
+        </p:txBody>
+      </p:sp>
+      <p:sp>
+        <p:nvSpPr>
+          <p:cNvPr id="5" name="TextBox 4"/>
+          <p:cNvSpPr txBox="1"/>
+          <p:nvPr/>
+        </p:nvSpPr>
+        <p:spPr>
+          <a:xfrm>
+            <a:off x="548640" y="1463040"/>
+            <a:ext cx="5394960" cy="4937760"/>
+          </a:xfrm>
+          <a:prstGeom prst="rect">
+            <a:avLst/>
+          </a:prstGeom>
+          <a:noFill/>
+        </p:spPr>
+        <p:txBody>
+          <a:bodyPr wrap="square" anchor="t" lIns="0" rIns="0" tIns="0" bIns="0">
+            <a:spAutoFit/>
+          </a:bodyPr>
+          <a:lstStyle/>
+          <a:p>
+            <a:pPr algn="l">
+              <a:spcAft>
+                <a:spcPts val="585"/>
+              </a:spcAft>
+            </a:pPr>
+            <a:r>
+              <a:rPr sz="1300" b="0" i="0">
+                <a:solidFill>
+                  <a:srgbClr val="1C1B19"/>
+                </a:solidFill>
+                <a:latin typeface="Source Serif 4"/>
+              </a:rPr>
+              <a:t>In a national survey of more than 10,000 U.S. teens, about 1 in 3 met criteria for an anxiety disorder at some point by age 18.</a:t>
+            </a:r>
+          </a:p>
+          <a:p>
+            <a:pPr algn="l">
+              <a:spcAft>
+                <a:spcPts val="585"/>
+              </a:spcAft>
+            </a:pPr>
+            <a:r>
+              <a:rPr sz="1050" b="0" i="0">
+                <a:solidFill>
+                  <a:srgbClr val="5D5A54"/>
+                </a:solidFill>
+                <a:latin typeface="Inter Tight"/>
+              </a:rPr>
+              <a:t>Merikangas et al., Journal of the American Academy of Child &amp; Adolescent Psychiatry, 2010</a:t>
+            </a:r>
+          </a:p>
+          <a:p>
+            <a:pPr algn="l">
+              <a:spcAft>
+                <a:spcPts val="585"/>
+              </a:spcAft>
+            </a:pPr>
+            <a:r>
+              <a:rPr sz="1300" b="0" i="0">
+                <a:solidFill>
+                  <a:srgbClr val="1C1B19"/>
+                </a:solidFill>
+                <a:latin typeface="Source Serif 4"/>
+              </a:rPr>
+              <a:t>Exposure works mainly through expectation violation: you predict something bad, it doesn't happen, and the brain stores a new memory that competes with the fear. Feeling calm isn't required.</a:t>
+            </a:r>
+          </a:p>
+          <a:p>
+            <a:pPr algn="l">
+              <a:spcAft>
+                <a:spcPts val="585"/>
+              </a:spcAft>
+            </a:pPr>
+            <a:r>
+              <a:rPr sz="1050" b="0" i="0">
+                <a:solidFill>
+                  <a:srgbClr val="5D5A54"/>
+                </a:solidFill>
+                <a:latin typeface="Inter Tight"/>
+              </a:rPr>
+              <a:t>Craske et al., Behaviour Research and Therapy, 2014 (UCLA)</a:t>
+            </a:r>
+          </a:p>
+          <a:p>
+            <a:pPr algn="l">
+              <a:spcAft>
+                <a:spcPts val="585"/>
+              </a:spcAft>
+            </a:pPr>
+            <a:r>
+              <a:rPr sz="1300" b="0" i="0">
+                <a:solidFill>
+                  <a:srgbClr val="1C1B19"/>
+                </a:solidFill>
+                <a:latin typeface="Source Serif 4"/>
+              </a:rPr>
+              <a:t>In a trial with kids ages 7 to 14, coaching parents to stop accommodating anxiety, while staying warm and supportive, worked as well as therapy with the child directly.</a:t>
+            </a:r>
+          </a:p>
+          <a:p>
+            <a:pPr algn="l">
+              <a:spcAft>
+                <a:spcPts val="585"/>
+              </a:spcAft>
+            </a:pPr>
+            <a:r>
+              <a:rPr sz="1050" b="0" i="0">
+                <a:solidFill>
+                  <a:srgbClr val="5D5A54"/>
+                </a:solidFill>
+                <a:latin typeface="Inter Tight"/>
+              </a:rPr>
+              <a:t>Lebowitz et al., 2020</a:t>
+            </a:r>
+          </a:p>
+        </p:txBody>
+      </p:sp>
+      <p:sp>
+        <p:nvSpPr>
+          <p:cNvPr id="6" name="TextBox 5"/>
+          <p:cNvSpPr txBox="1"/>
+          <p:nvPr/>
+        </p:nvSpPr>
+        <p:spPr>
+          <a:xfrm>
+            <a:off x="6217920" y="1463040"/>
+            <a:ext cx="5394960" cy="4937760"/>
+          </a:xfrm>
+          <a:prstGeom prst="rect">
+            <a:avLst/>
+          </a:prstGeom>
+          <a:noFill/>
+        </p:spPr>
+        <p:txBody>
+          <a:bodyPr wrap="square" anchor="t" lIns="0" rIns="0" tIns="0" bIns="0">
+            <a:spAutoFit/>
+          </a:bodyPr>
+          <a:lstStyle/>
+          <a:p>
+            <a:pPr algn="l">
+              <a:spcAft>
+                <a:spcPts val="585"/>
+              </a:spcAft>
+            </a:pPr>
+            <a:r>
+              <a:rPr sz="1300" b="0" i="0">
+                <a:solidFill>
+                  <a:srgbClr val="1C1B19"/>
+                </a:solidFill>
+                <a:latin typeface="Source Serif 4"/>
+              </a:rPr>
+              <a:t>In a major U.S. trial with ages 7 to 17, about 60% improved with 12 weeks of CBT, 55% with sertraline, and 81% with both, compared with 24% on placebo.</a:t>
+            </a:r>
+          </a:p>
+          <a:p>
+            <a:pPr algn="l">
+              <a:spcAft>
+                <a:spcPts val="585"/>
+              </a:spcAft>
+            </a:pPr>
+            <a:r>
+              <a:rPr sz="1050" b="0" i="0">
+                <a:solidFill>
+                  <a:srgbClr val="5D5A54"/>
+                </a:solidFill>
+                <a:latin typeface="Inter Tight"/>
+              </a:rPr>
+              <a:t>Walkup et al., New England Journal of Medicine, 2008</a:t>
+            </a:r>
+          </a:p>
+          <a:p>
+            <a:pPr algn="l">
+              <a:spcAft>
+                <a:spcPts val="585"/>
+              </a:spcAft>
+            </a:pPr>
+            <a:r>
+              <a:rPr sz="1300" b="0" i="0">
+                <a:solidFill>
+                  <a:srgbClr val="1C1B19"/>
+                </a:solidFill>
+                <a:latin typeface="Source Serif 4"/>
+              </a:rPr>
+              <a:t>People who said "I am excited" before karaoke, public speaking, or a math test did better than people who tried to calm down.</a:t>
+            </a:r>
+          </a:p>
+          <a:p>
+            <a:pPr algn="l">
+              <a:spcAft>
+                <a:spcPts val="585"/>
+              </a:spcAft>
+            </a:pPr>
+            <a:r>
+              <a:rPr sz="1050" b="0" i="0">
+                <a:solidFill>
+                  <a:srgbClr val="5D5A54"/>
+                </a:solidFill>
+                <a:latin typeface="Inter Tight"/>
+              </a:rPr>
+              <a:t>Brooks, Journal of Experimental Psychology: General, 2014</a:t>
+            </a:r>
+          </a:p>
+          <a:p>
+            <a:pPr algn="l">
+              <a:spcAft>
+                <a:spcPts val="585"/>
+              </a:spcAft>
+            </a:pPr>
+            <a:r>
+              <a:rPr sz="1300" b="0" i="0">
+                <a:solidFill>
+                  <a:srgbClr val="1C1B19"/>
+                </a:solidFill>
+                <a:latin typeface="Source Serif 4"/>
+              </a:rPr>
+              <a:t>A panic attack is a surge of intense fear that peaks within minutes: pounding heart, short breath, dizziness, shaking, a sense of doom. Anyone who has never had symptoms like chest pain checked should see a doctor once.</a:t>
+            </a:r>
+          </a:p>
+          <a:p>
+            <a:pPr algn="l">
+              <a:spcAft>
+                <a:spcPts val="585"/>
+              </a:spcAft>
+            </a:pPr>
+            <a:r>
+              <a:rPr sz="1050" b="0" i="0">
+                <a:solidFill>
+                  <a:srgbClr val="5D5A54"/>
+                </a:solidFill>
+                <a:latin typeface="Inter Tight"/>
+              </a:rPr>
+              <a:t>Clinical description from the student lesson (no single study)</a:t>
+            </a:r>
+          </a:p>
+        </p:txBody>
+      </p:sp>
+    </p:spTree>
+  </p:cSld>
+  <p:clrMapOvr>
+    <a:masterClrMapping/>
+  </p:clrMapOvr>
+</p:sld>
+</file>
+
+<file path=ppt/slides/slide2.xml><?xml version="1.0" encoding="utf-8"?>
+<p:sld xmlns:a="http://schemas.openxmlformats.org/drawingml/2006/main" xmlns:p="http://schemas.openxmlformats.org/presentationml/2006/main" xmlns:r="http://schemas.openxmlformats.org/officeDocument/2006/relationships">
+  <p:cSld>
+    <p:bg>
+      <p:bgPr>
+        <a:solidFill>
+          <a:srgbClr val="0B2D5B"/>
+        </a:solidFill>
+        <a:effectLst/>
+      </p:bgPr>
+    </p:bg>
+    <p:spTree>
+      <p:nvGrpSpPr>
+        <p:cNvPr id="1" name=""/>
+        <p:cNvGrpSpPr/>
+        <p:nvPr/>
+      </p:nvGrpSpPr>
+      <p:grpSpPr/>
+      <p:sp>
+        <p:nvSpPr>
+          <p:cNvPr id="2" name="Rectangle 1"/>
+          <p:cNvSpPr/>
+          <p:nvPr/>
+        </p:nvSpPr>
+        <p:spPr>
+          <a:xfrm>
+            <a:off x="548640" y="502920"/>
+            <a:ext cx="457200" cy="54864"/>
+          </a:xfrm>
+          <a:prstGeom prst="rect">
+            <a:avLst/>
+          </a:prstGeom>
+          <a:solidFill>
+            <a:srgbClr val="F47B20"/>
+          </a:solidFill>
+          <a:ln>
+            <a:noFill/>
+          </a:ln>
+          <a:effectLst/>
+        </p:spPr>
+        <p:style>
+          <a:lnRef idx="1">
+            <a:schemeClr val="accent1"/>
+          </a:lnRef>
+          <a:fillRef idx="3">
+            <a:schemeClr val="accent1"/>
+          </a:fillRef>
+          <a:effectRef idx="2">
+            <a:schemeClr val="accent1"/>
+          </a:effectRef>
+          <a:fontRef idx="minor">
+            <a:schemeClr val="lt1"/>
+          </a:fontRef>
+        </p:style>
+        <p:txBody>
+          <a:bodyPr rtlCol="0" anchor="ctr"/>
+          <a:lstStyle/>
+          <a:p>
+            <a:pPr algn="ctr"/>
+          </a:p>
+        </p:txBody>
+      </p:sp>
+      <p:sp>
+        <p:nvSpPr>
+          <p:cNvPr id="3" name="TextBox 2"/>
+          <p:cNvSpPr txBox="1"/>
+          <p:nvPr/>
+        </p:nvSpPr>
+        <p:spPr>
+          <a:xfrm>
+            <a:off x="1143000" y="393192"/>
+            <a:ext cx="8229600" cy="274320"/>
+          </a:xfrm>
+          <a:prstGeom prst="rect">
+            <a:avLst/>
+          </a:prstGeom>
+          <a:noFill/>
+        </p:spPr>
+        <p:txBody>
+          <a:bodyPr wrap="square" anchor="t" lIns="0" rIns="0" tIns="0" bIns="0">
+            <a:spAutoFit/>
+          </a:bodyPr>
+          <a:lstStyle/>
+          <a:p>
+            <a:pPr algn="l">
+              <a:spcAft>
+                <a:spcPts val="540"/>
+              </a:spcAft>
+            </a:pPr>
+            <a:r>
+              <a:rPr sz="1200" b="1" i="0">
+                <a:solidFill>
+                  <a:srgbClr val="5D5A54"/>
+                </a:solidFill>
+                <a:latin typeface="Inter Tight"/>
+              </a:rPr>
+              <a:t>THE FALSE ALARM</a:t>
+            </a:r>
+          </a:p>
+        </p:txBody>
+      </p:sp>
+      <p:sp>
+        <p:nvSpPr>
+          <p:cNvPr id="4" name="TextBox 3"/>
+          <p:cNvSpPr txBox="1"/>
+          <p:nvPr/>
+        </p:nvSpPr>
+        <p:spPr>
+          <a:xfrm>
+            <a:off x="8229600" y="6400800"/>
+            <a:ext cx="3410712" cy="274320"/>
+          </a:xfrm>
+          <a:prstGeom prst="rect">
+            <a:avLst/>
+          </a:prstGeom>
+          <a:noFill/>
+        </p:spPr>
+        <p:txBody>
+          <a:bodyPr wrap="square" anchor="t" lIns="0" rIns="0" tIns="0" bIns="0">
+            <a:spAutoFit/>
+          </a:bodyPr>
+          <a:lstStyle/>
+          <a:p>
+            <a:pPr algn="r">
+              <a:spcAft>
+                <a:spcPts val="450"/>
+              </a:spcAft>
+            </a:pPr>
+            <a:r>
+              <a:rPr sz="1000" b="0" i="0">
+                <a:solidFill>
+                  <a:srgbClr val="5D5A54"/>
+                </a:solidFill>
+                <a:latin typeface="Inter Tight"/>
+              </a:rPr>
+              <a:t>Beaver Counseling</a:t>
+            </a:r>
+          </a:p>
+        </p:txBody>
+      </p:sp>
+      <p:sp>
+        <p:nvSpPr>
+          <p:cNvPr id="5" name="TextBox 4"/>
+          <p:cNvSpPr txBox="1"/>
+          <p:nvPr/>
+        </p:nvSpPr>
+        <p:spPr>
+          <a:xfrm>
+            <a:off x="822960" y="2011680"/>
+            <a:ext cx="10515600" cy="1463040"/>
+          </a:xfrm>
+          <a:prstGeom prst="rect">
+            <a:avLst/>
+          </a:prstGeom>
+          <a:noFill/>
+        </p:spPr>
+        <p:txBody>
+          <a:bodyPr wrap="square" anchor="b" lIns="0" rIns="0" tIns="0" bIns="0">
+            <a:spAutoFit/>
+          </a:bodyPr>
+          <a:lstStyle/>
+          <a:p>
+            <a:pPr algn="l">
+              <a:spcAft>
+                <a:spcPts val="2700"/>
+              </a:spcAft>
+            </a:pPr>
+            <a:r>
+              <a:rPr sz="6000" b="1" i="0">
+                <a:solidFill>
+                  <a:srgbClr val="FFFFFF"/>
+                </a:solidFill>
+                <a:latin typeface="Source Serif 4"/>
+              </a:rPr>
+              <a:t>The False Alarm</a:t>
+            </a:r>
+          </a:p>
+        </p:txBody>
+      </p:sp>
+      <p:sp>
+        <p:nvSpPr>
+          <p:cNvPr id="6" name="TextBox 5"/>
+          <p:cNvSpPr txBox="1"/>
+          <p:nvPr/>
+        </p:nvSpPr>
+        <p:spPr>
+          <a:xfrm>
+            <a:off x="822960" y="3611880"/>
+            <a:ext cx="10515600" cy="914400"/>
+          </a:xfrm>
+          <a:prstGeom prst="rect">
+            <a:avLst/>
+          </a:prstGeom>
+          <a:noFill/>
+        </p:spPr>
+        <p:txBody>
+          <a:bodyPr wrap="square" anchor="t" lIns="0" rIns="0" tIns="0" bIns="0">
+            <a:spAutoFit/>
+          </a:bodyPr>
+          <a:lstStyle/>
+          <a:p>
+            <a:pPr algn="l">
+              <a:spcAft>
+                <a:spcPts val="1080"/>
+              </a:spcAft>
+            </a:pPr>
+            <a:r>
+              <a:rPr sz="2400" b="0" i="1">
+                <a:solidFill>
+                  <a:srgbClr val="E8E4DA"/>
+                </a:solidFill>
+                <a:latin typeface="Source Serif 4"/>
+              </a:rPr>
+              <a:t>Burnt toast, full fire alarm.</a:t>
+            </a:r>
+          </a:p>
+        </p:txBody>
+      </p:sp>
+      <p:sp>
+        <p:nvSpPr>
+          <p:cNvPr id="7" name="TextBox 6"/>
+          <p:cNvSpPr txBox="1"/>
+          <p:nvPr/>
+        </p:nvSpPr>
+        <p:spPr>
+          <a:xfrm>
+            <a:off x="822960" y="6035040"/>
+            <a:ext cx="7315200" cy="365760"/>
+          </a:xfrm>
+          <a:prstGeom prst="rect">
+            <a:avLst/>
+          </a:prstGeom>
+          <a:noFill/>
+        </p:spPr>
+        <p:txBody>
+          <a:bodyPr wrap="square" anchor="t" lIns="0" rIns="0" tIns="0" bIns="0">
+            <a:spAutoFit/>
+          </a:bodyPr>
+          <a:lstStyle/>
+          <a:p>
+            <a:pPr algn="l">
+              <a:spcAft>
+                <a:spcPts val="585"/>
+              </a:spcAft>
+            </a:pPr>
+            <a:r>
+              <a:rPr sz="1300" b="0" i="0">
+                <a:solidFill>
+                  <a:srgbClr val="E8E4DA"/>
+                </a:solidFill>
+                <a:latin typeface="Inter Tight"/>
+              </a:rPr>
+              <a:t>Beaver Upper School · Counseling</a:t>
+            </a:r>
+          </a:p>
+        </p:txBody>
+      </p:sp>
+    </p:spTree>
+  </p:cSld>
+  <p:clrMapOvr>
+    <a:masterClrMapping/>
+  </p:clrMapOvr>
+</p:sld>
+</file>
+
+<file path=ppt/slides/slide3.xml><?xml version="1.0" encoding="utf-8"?>
 <p:sld xmlns:a="http://schemas.openxmlformats.org/drawingml/2006/main" xmlns:p="http://schemas.openxmlformats.org/presentationml/2006/main" xmlns:r="http://schemas.openxmlformats.org/officeDocument/2006/relationships">
   <p:cSld>
     <p:bg>
@@ -5383,7 +7233,7 @@
                 </a:solidFill>
                 <a:latin typeface="Inter Tight"/>
               </a:rPr>
-              <a:t>TOAST OR FIRE?</a:t>
+              <a:t>MYTH OR FACT?</a:t>
             </a:r>
           </a:p>
         </p:txBody>
@@ -5436,7 +7286,7 @@
         <p:spPr>
           <a:xfrm>
             <a:off x="822960" y="1005840"/>
-            <a:ext cx="10515600" cy="914400"/>
+            <a:ext cx="10515600" cy="1097280"/>
           </a:xfrm>
           <a:prstGeom prst="rect">
             <a:avLst/>
@@ -5451,77 +7301,31 @@
           <a:p>
             <a:pPr algn="l">
               <a:spcAft>
-                <a:spcPts val="1530"/>
-              </a:spcAft>
-            </a:pPr>
-            <a:r>
-              <a:rPr sz="3400" b="1" i="0">
+                <a:spcPts val="1620"/>
+              </a:spcAft>
+            </a:pPr>
+            <a:r>
+              <a:rPr sz="3600" b="1" i="0">
                 <a:solidFill>
                   <a:srgbClr val="1C1B19"/>
                 </a:solidFill>
                 <a:latin typeface="Source Serif 4"/>
               </a:rPr>
-              <a:t>Real danger, false alarm, or somewhere in between?</a:t>
-            </a:r>
-          </a:p>
-        </p:txBody>
-      </p:sp>
-      <p:sp>
-        <p:nvSpPr>
-          <p:cNvPr id="6" name="Rectangle 5"/>
-          <p:cNvSpPr/>
-          <p:nvPr/>
-        </p:nvSpPr>
-        <p:spPr>
-          <a:xfrm>
-            <a:off x="822960" y="2103120"/>
-            <a:ext cx="3322320" cy="3840480"/>
-          </a:xfrm>
-          <a:prstGeom prst="rect">
-            <a:avLst/>
-          </a:prstGeom>
-          <a:solidFill>
-            <a:srgbClr val="FFFFFF"/>
-          </a:solidFill>
-          <a:ln w="15875">
-            <a:solidFill>
-              <a:srgbClr val="D8D2C6"/>
-            </a:solidFill>
-          </a:ln>
-          <a:effectLst/>
-        </p:spPr>
-        <p:style>
-          <a:lnRef idx="1">
-            <a:schemeClr val="accent1"/>
-          </a:lnRef>
-          <a:fillRef idx="3">
-            <a:schemeClr val="accent1"/>
-          </a:fillRef>
-          <a:effectRef idx="2">
-            <a:schemeClr val="accent1"/>
-          </a:effectRef>
-          <a:fontRef idx="minor">
-            <a:schemeClr val="lt1"/>
-          </a:fontRef>
-        </p:style>
-        <p:txBody>
-          <a:bodyPr rtlCol="0" anchor="ctr"/>
-          <a:lstStyle/>
-          <a:p>
-            <a:pPr algn="ctr"/>
-          </a:p>
-        </p:txBody>
-      </p:sp>
-      <p:sp>
-        <p:nvSpPr>
-          <p:cNvPr id="7" name="TextBox 6"/>
+              <a:t>Stand up if you think it's a fact.</a:t>
+            </a:r>
+          </a:p>
+        </p:txBody>
+      </p:sp>
+      <p:sp>
+        <p:nvSpPr>
+          <p:cNvPr id="6" name="TextBox 5"/>
           <p:cNvSpPr txBox="1"/>
           <p:nvPr/>
         </p:nvSpPr>
         <p:spPr>
           <a:xfrm>
-            <a:off x="1051560" y="2286000"/>
-            <a:ext cx="2865120" cy="365760"/>
+            <a:off x="822960" y="2057400"/>
+            <a:ext cx="548640" cy="804672"/>
           </a:xfrm>
           <a:prstGeom prst="rect">
             <a:avLst/>
@@ -5536,31 +7340,31 @@
           <a:p>
             <a:pPr algn="l">
               <a:spcAft>
-                <a:spcPts val="585"/>
-              </a:spcAft>
-            </a:pPr>
-            <a:r>
-              <a:rPr sz="1300" b="1" i="0">
-                <a:solidFill>
-                  <a:srgbClr val="0B2D5B"/>
-                </a:solidFill>
-                <a:latin typeface="Inter Tight"/>
-              </a:rPr>
-              <a:t>JALEN</a:t>
-            </a:r>
-          </a:p>
-        </p:txBody>
-      </p:sp>
-      <p:sp>
-        <p:nvSpPr>
-          <p:cNvPr id="8" name="TextBox 7"/>
+                <a:spcPts val="1170"/>
+              </a:spcAft>
+            </a:pPr>
+            <a:r>
+              <a:rPr sz="2600" b="1" i="0">
+                <a:solidFill>
+                  <a:srgbClr val="F47B20"/>
+                </a:solidFill>
+                <a:latin typeface="Source Serif 4"/>
+              </a:rPr>
+              <a:t>1</a:t>
+            </a:r>
+          </a:p>
+        </p:txBody>
+      </p:sp>
+      <p:sp>
+        <p:nvSpPr>
+          <p:cNvPr id="7" name="TextBox 6"/>
           <p:cNvSpPr txBox="1"/>
           <p:nvPr/>
         </p:nvSpPr>
         <p:spPr>
           <a:xfrm>
-            <a:off x="1051560" y="2743200"/>
-            <a:ext cx="2865120" cy="3017520"/>
+            <a:off x="1463040" y="2093976"/>
+            <a:ext cx="9875520" cy="804672"/>
           </a:xfrm>
           <a:prstGeom prst="rect">
             <a:avLst/>
@@ -5575,77 +7379,31 @@
           <a:p>
             <a:pPr algn="l">
               <a:spcAft>
-                <a:spcPts val="810"/>
-              </a:spcAft>
-            </a:pPr>
-            <a:r>
-              <a:rPr sz="1800" b="0" i="0">
+                <a:spcPts val="945"/>
+              </a:spcAft>
+            </a:pPr>
+            <a:r>
+              <a:rPr sz="2100" b="1" i="0">
                 <a:solidFill>
                   <a:srgbClr val="1C1B19"/>
                 </a:solidFill>
                 <a:latin typeface="Source Serif 4"/>
               </a:rPr>
-              <a:t>Tryouts for the school play are Saturday. His hands shake every time he thinks about it, and he's drafting a text to drop out.</a:t>
-            </a:r>
-          </a:p>
-        </p:txBody>
-      </p:sp>
-      <p:sp>
-        <p:nvSpPr>
-          <p:cNvPr id="9" name="Rectangle 8"/>
-          <p:cNvSpPr/>
-          <p:nvPr/>
-        </p:nvSpPr>
-        <p:spPr>
-          <a:xfrm>
-            <a:off x="4419600" y="2103120"/>
-            <a:ext cx="3322320" cy="3840480"/>
-          </a:xfrm>
-          <a:prstGeom prst="rect">
-            <a:avLst/>
-          </a:prstGeom>
-          <a:solidFill>
-            <a:srgbClr val="FFFFFF"/>
-          </a:solidFill>
-          <a:ln w="15875">
-            <a:solidFill>
-              <a:srgbClr val="D8D2C6"/>
-            </a:solidFill>
-          </a:ln>
-          <a:effectLst/>
-        </p:spPr>
-        <p:style>
-          <a:lnRef idx="1">
-            <a:schemeClr val="accent1"/>
-          </a:lnRef>
-          <a:fillRef idx="3">
-            <a:schemeClr val="accent1"/>
-          </a:fillRef>
-          <a:effectRef idx="2">
-            <a:schemeClr val="accent1"/>
-          </a:effectRef>
-          <a:fontRef idx="minor">
-            <a:schemeClr val="lt1"/>
-          </a:fontRef>
-        </p:style>
-        <p:txBody>
-          <a:bodyPr rtlCol="0" anchor="ctr"/>
-          <a:lstStyle/>
-          <a:p>
-            <a:pPr algn="ctr"/>
-          </a:p>
-        </p:txBody>
-      </p:sp>
-      <p:sp>
-        <p:nvSpPr>
-          <p:cNvPr id="10" name="TextBox 9"/>
+              <a:t>Avoiding what makes you anxious is self-care.</a:t>
+            </a:r>
+          </a:p>
+        </p:txBody>
+      </p:sp>
+      <p:sp>
+        <p:nvSpPr>
+          <p:cNvPr id="8" name="TextBox 7"/>
           <p:cNvSpPr txBox="1"/>
           <p:nvPr/>
         </p:nvSpPr>
         <p:spPr>
           <a:xfrm>
-            <a:off x="4648200" y="2286000"/>
-            <a:ext cx="2865120" cy="365760"/>
+            <a:off x="822960" y="2862072"/>
+            <a:ext cx="548640" cy="804672"/>
           </a:xfrm>
           <a:prstGeom prst="rect">
             <a:avLst/>
@@ -5660,31 +7418,31 @@
           <a:p>
             <a:pPr algn="l">
               <a:spcAft>
-                <a:spcPts val="585"/>
-              </a:spcAft>
-            </a:pPr>
-            <a:r>
-              <a:rPr sz="1300" b="1" i="0">
-                <a:solidFill>
-                  <a:srgbClr val="0B2D5B"/>
-                </a:solidFill>
-                <a:latin typeface="Inter Tight"/>
-              </a:rPr>
-              <a:t>SOFIA</a:t>
-            </a:r>
-          </a:p>
-        </p:txBody>
-      </p:sp>
-      <p:sp>
-        <p:nvSpPr>
-          <p:cNvPr id="11" name="TextBox 10"/>
+                <a:spcPts val="1170"/>
+              </a:spcAft>
+            </a:pPr>
+            <a:r>
+              <a:rPr sz="2600" b="1" i="0">
+                <a:solidFill>
+                  <a:srgbClr val="F47B20"/>
+                </a:solidFill>
+                <a:latin typeface="Source Serif 4"/>
+              </a:rPr>
+              <a:t>2</a:t>
+            </a:r>
+          </a:p>
+        </p:txBody>
+      </p:sp>
+      <p:sp>
+        <p:nvSpPr>
+          <p:cNvPr id="9" name="TextBox 8"/>
           <p:cNvSpPr txBox="1"/>
           <p:nvPr/>
         </p:nvSpPr>
         <p:spPr>
           <a:xfrm>
-            <a:off x="4648200" y="2743200"/>
-            <a:ext cx="2865120" cy="3017520"/>
+            <a:off x="1463040" y="2898648"/>
+            <a:ext cx="9875520" cy="804672"/>
           </a:xfrm>
           <a:prstGeom prst="rect">
             <a:avLst/>
@@ -5699,77 +7457,31 @@
           <a:p>
             <a:pPr algn="l">
               <a:spcAft>
-                <a:spcPts val="810"/>
-              </a:spcAft>
-            </a:pPr>
-            <a:r>
-              <a:rPr sz="1800" b="0" i="0">
+                <a:spcPts val="945"/>
+              </a:spcAft>
+            </a:pPr>
+            <a:r>
+              <a:rPr sz="2100" b="1" i="0">
                 <a:solidFill>
                   <a:srgbClr val="1C1B19"/>
                 </a:solidFill>
                 <a:latin typeface="Source Serif 4"/>
               </a:rPr>
-              <a:t>At a sleepover, a friend is passed out and her breathing sounds strange. Someone says, "Let her sleep it off."</a:t>
-            </a:r>
-          </a:p>
-        </p:txBody>
-      </p:sp>
-      <p:sp>
-        <p:nvSpPr>
-          <p:cNvPr id="12" name="Rectangle 11"/>
-          <p:cNvSpPr/>
-          <p:nvPr/>
-        </p:nvSpPr>
-        <p:spPr>
-          <a:xfrm>
-            <a:off x="8016239" y="2103120"/>
-            <a:ext cx="3322320" cy="3840480"/>
-          </a:xfrm>
-          <a:prstGeom prst="rect">
-            <a:avLst/>
-          </a:prstGeom>
-          <a:solidFill>
-            <a:srgbClr val="FFFFFF"/>
-          </a:solidFill>
-          <a:ln w="15875">
-            <a:solidFill>
-              <a:srgbClr val="D8D2C6"/>
-            </a:solidFill>
-          </a:ln>
-          <a:effectLst/>
-        </p:spPr>
-        <p:style>
-          <a:lnRef idx="1">
-            <a:schemeClr val="accent1"/>
-          </a:lnRef>
-          <a:fillRef idx="3">
-            <a:schemeClr val="accent1"/>
-          </a:fillRef>
-          <a:effectRef idx="2">
-            <a:schemeClr val="accent1"/>
-          </a:effectRef>
-          <a:fontRef idx="minor">
-            <a:schemeClr val="lt1"/>
-          </a:fontRef>
-        </p:style>
-        <p:txBody>
-          <a:bodyPr rtlCol="0" anchor="ctr"/>
-          <a:lstStyle/>
-          <a:p>
-            <a:pPr algn="ctr"/>
-          </a:p>
-        </p:txBody>
-      </p:sp>
-      <p:sp>
-        <p:nvSpPr>
-          <p:cNvPr id="13" name="TextBox 12"/>
+              <a:t>You have to feel calm before you can do a hard thing.</a:t>
+            </a:r>
+          </a:p>
+        </p:txBody>
+      </p:sp>
+      <p:sp>
+        <p:nvSpPr>
+          <p:cNvPr id="10" name="TextBox 9"/>
           <p:cNvSpPr txBox="1"/>
           <p:nvPr/>
         </p:nvSpPr>
         <p:spPr>
           <a:xfrm>
-            <a:off x="8244839" y="2286000"/>
-            <a:ext cx="2865120" cy="365760"/>
+            <a:off x="822960" y="3666744"/>
+            <a:ext cx="548640" cy="804672"/>
           </a:xfrm>
           <a:prstGeom prst="rect">
             <a:avLst/>
@@ -5784,31 +7496,31 @@
           <a:p>
             <a:pPr algn="l">
               <a:spcAft>
-                <a:spcPts val="585"/>
-              </a:spcAft>
-            </a:pPr>
-            <a:r>
-              <a:rPr sz="1300" b="1" i="0">
-                <a:solidFill>
-                  <a:srgbClr val="0B2D5B"/>
-                </a:solidFill>
-                <a:latin typeface="Inter Tight"/>
-              </a:rPr>
-              <a:t>DEV</a:t>
-            </a:r>
-          </a:p>
-        </p:txBody>
-      </p:sp>
-      <p:sp>
-        <p:nvSpPr>
-          <p:cNvPr id="14" name="TextBox 13"/>
+                <a:spcPts val="1170"/>
+              </a:spcAft>
+            </a:pPr>
+            <a:r>
+              <a:rPr sz="2600" b="1" i="0">
+                <a:solidFill>
+                  <a:srgbClr val="F47B20"/>
+                </a:solidFill>
+                <a:latin typeface="Source Serif 4"/>
+              </a:rPr>
+              <a:t>3</a:t>
+            </a:r>
+          </a:p>
+        </p:txBody>
+      </p:sp>
+      <p:sp>
+        <p:nvSpPr>
+          <p:cNvPr id="11" name="TextBox 10"/>
           <p:cNvSpPr txBox="1"/>
           <p:nvPr/>
         </p:nvSpPr>
         <p:spPr>
           <a:xfrm>
-            <a:off x="8244839" y="2743200"/>
-            <a:ext cx="2865120" cy="3017520"/>
+            <a:off x="1463040" y="3703320"/>
+            <a:ext cx="9875520" cy="804672"/>
           </a:xfrm>
           <a:prstGeom prst="rect">
             <a:avLst/>
@@ -5823,17 +7535,173 @@
           <a:p>
             <a:pPr algn="l">
               <a:spcAft>
-                <a:spcPts val="810"/>
-              </a:spcAft>
-            </a:pPr>
-            <a:r>
-              <a:rPr sz="1800" b="0" i="0">
+                <a:spcPts val="945"/>
+              </a:spcAft>
+            </a:pPr>
+            <a:r>
+              <a:rPr sz="2100" b="1" i="0">
                 <a:solidFill>
                   <a:srgbClr val="1C1B19"/>
                 </a:solidFill>
                 <a:latin typeface="Source Serif 4"/>
               </a:rPr>
-              <a:t>His new friends haven't answered his message in three hours. He's reread it twenty times and is writing an apology.</a:t>
+              <a:t>About 1 in 3 teens has an anxiety disorder by 18.</a:t>
+            </a:r>
+          </a:p>
+        </p:txBody>
+      </p:sp>
+      <p:sp>
+        <p:nvSpPr>
+          <p:cNvPr id="12" name="TextBox 11"/>
+          <p:cNvSpPr txBox="1"/>
+          <p:nvPr/>
+        </p:nvSpPr>
+        <p:spPr>
+          <a:xfrm>
+            <a:off x="822960" y="4471416"/>
+            <a:ext cx="548640" cy="804672"/>
+          </a:xfrm>
+          <a:prstGeom prst="rect">
+            <a:avLst/>
+          </a:prstGeom>
+          <a:noFill/>
+        </p:spPr>
+        <p:txBody>
+          <a:bodyPr wrap="square" anchor="t" lIns="0" rIns="0" tIns="0" bIns="0">
+            <a:spAutoFit/>
+          </a:bodyPr>
+          <a:lstStyle/>
+          <a:p>
+            <a:pPr algn="l">
+              <a:spcAft>
+                <a:spcPts val="1170"/>
+              </a:spcAft>
+            </a:pPr>
+            <a:r>
+              <a:rPr sz="2600" b="1" i="0">
+                <a:solidFill>
+                  <a:srgbClr val="F47B20"/>
+                </a:solidFill>
+                <a:latin typeface="Source Serif 4"/>
+              </a:rPr>
+              <a:t>4</a:t>
+            </a:r>
+          </a:p>
+        </p:txBody>
+      </p:sp>
+      <p:sp>
+        <p:nvSpPr>
+          <p:cNvPr id="13" name="TextBox 12"/>
+          <p:cNvSpPr txBox="1"/>
+          <p:nvPr/>
+        </p:nvSpPr>
+        <p:spPr>
+          <a:xfrm>
+            <a:off x="1463040" y="4507992"/>
+            <a:ext cx="9875520" cy="804672"/>
+          </a:xfrm>
+          <a:prstGeom prst="rect">
+            <a:avLst/>
+          </a:prstGeom>
+          <a:noFill/>
+        </p:spPr>
+        <p:txBody>
+          <a:bodyPr wrap="square" anchor="t" lIns="0" rIns="0" tIns="0" bIns="0">
+            <a:spAutoFit/>
+          </a:bodyPr>
+          <a:lstStyle/>
+          <a:p>
+            <a:pPr algn="l">
+              <a:spcAft>
+                <a:spcPts val="945"/>
+              </a:spcAft>
+            </a:pPr>
+            <a:r>
+              <a:rPr sz="2100" b="1" i="0">
+                <a:solidFill>
+                  <a:srgbClr val="1C1B19"/>
+                </a:solidFill>
+                <a:latin typeface="Source Serif 4"/>
+              </a:rPr>
+              <a:t>A panic attack means something is physically wrong.</a:t>
+            </a:r>
+          </a:p>
+        </p:txBody>
+      </p:sp>
+      <p:sp>
+        <p:nvSpPr>
+          <p:cNvPr id="14" name="TextBox 13"/>
+          <p:cNvSpPr txBox="1"/>
+          <p:nvPr/>
+        </p:nvSpPr>
+        <p:spPr>
+          <a:xfrm>
+            <a:off x="822960" y="5276088"/>
+            <a:ext cx="548640" cy="804672"/>
+          </a:xfrm>
+          <a:prstGeom prst="rect">
+            <a:avLst/>
+          </a:prstGeom>
+          <a:noFill/>
+        </p:spPr>
+        <p:txBody>
+          <a:bodyPr wrap="square" anchor="t" lIns="0" rIns="0" tIns="0" bIns="0">
+            <a:spAutoFit/>
+          </a:bodyPr>
+          <a:lstStyle/>
+          <a:p>
+            <a:pPr algn="l">
+              <a:spcAft>
+                <a:spcPts val="1170"/>
+              </a:spcAft>
+            </a:pPr>
+            <a:r>
+              <a:rPr sz="2600" b="1" i="0">
+                <a:solidFill>
+                  <a:srgbClr val="F47B20"/>
+                </a:solidFill>
+                <a:latin typeface="Source Serif 4"/>
+              </a:rPr>
+              <a:t>5</a:t>
+            </a:r>
+          </a:p>
+        </p:txBody>
+      </p:sp>
+      <p:sp>
+        <p:nvSpPr>
+          <p:cNvPr id="15" name="TextBox 14"/>
+          <p:cNvSpPr txBox="1"/>
+          <p:nvPr/>
+        </p:nvSpPr>
+        <p:spPr>
+          <a:xfrm>
+            <a:off x="1463040" y="5312664"/>
+            <a:ext cx="9875520" cy="804672"/>
+          </a:xfrm>
+          <a:prstGeom prst="rect">
+            <a:avLst/>
+          </a:prstGeom>
+          <a:noFill/>
+        </p:spPr>
+        <p:txBody>
+          <a:bodyPr wrap="square" anchor="t" lIns="0" rIns="0" tIns="0" bIns="0">
+            <a:spAutoFit/>
+          </a:bodyPr>
+          <a:lstStyle/>
+          <a:p>
+            <a:pPr algn="l">
+              <a:spcAft>
+                <a:spcPts val="945"/>
+              </a:spcAft>
+            </a:pPr>
+            <a:r>
+              <a:rPr sz="2100" b="1" i="0">
+                <a:solidFill>
+                  <a:srgbClr val="1C1B19"/>
+                </a:solidFill>
+                <a:latin typeface="Source Serif 4"/>
+              </a:rPr>
+              <a:t>Anxiety is one of the most treatable conditions in teens.</a:t>
             </a:r>
           </a:p>
         </p:txBody>
@@ -5846,7 +7714,7 @@
 </p:sld>
 </file>
 
-<file path=ppt/slides/slide12.xml><?xml version="1.0" encoding="utf-8"?>
+<file path=ppt/slides/slide4.xml><?xml version="1.0" encoding="utf-8"?>
 <p:sld xmlns:a="http://schemas.openxmlformats.org/drawingml/2006/main" xmlns:p="http://schemas.openxmlformats.org/presentationml/2006/main" xmlns:r="http://schemas.openxmlformats.org/officeDocument/2006/relationships">
   <p:cSld>
     <p:bg>
@@ -5942,7 +7810,7 @@
                 </a:solidFill>
                 <a:latin typeface="Inter Tight"/>
               </a:rPr>
-              <a:t>BUILD A LADDER</a:t>
+              <a:t>MYTH OR FACT?</a:t>
             </a:r>
           </a:p>
         </p:txBody>
@@ -5988,97 +7856,14 @@
       </p:sp>
       <p:sp>
         <p:nvSpPr>
-          <p:cNvPr id="5" name="Rectangle 4"/>
-          <p:cNvSpPr/>
-          <p:nvPr/>
-        </p:nvSpPr>
-        <p:spPr>
-          <a:xfrm>
-            <a:off x="822960" y="1371600"/>
-            <a:ext cx="73152" cy="3566160"/>
-          </a:xfrm>
-          <a:prstGeom prst="rect">
-            <a:avLst/>
-          </a:prstGeom>
-          <a:solidFill>
-            <a:srgbClr val="F47B20"/>
-          </a:solidFill>
-          <a:ln>
-            <a:noFill/>
-          </a:ln>
-          <a:effectLst/>
-        </p:spPr>
-        <p:style>
-          <a:lnRef idx="1">
-            <a:schemeClr val="accent1"/>
-          </a:lnRef>
-          <a:fillRef idx="3">
-            <a:schemeClr val="accent1"/>
-          </a:fillRef>
-          <a:effectRef idx="2">
-            <a:schemeClr val="accent1"/>
-          </a:effectRef>
-          <a:fontRef idx="minor">
-            <a:schemeClr val="lt1"/>
-          </a:fontRef>
-        </p:style>
-        <p:txBody>
-          <a:bodyPr rtlCol="0" anchor="ctr"/>
-          <a:lstStyle/>
-          <a:p>
-            <a:pPr algn="ctr"/>
-          </a:p>
-        </p:txBody>
-      </p:sp>
-      <p:sp>
-        <p:nvSpPr>
-          <p:cNvPr id="6" name="TextBox 5"/>
+          <p:cNvPr id="5" name="TextBox 4"/>
           <p:cNvSpPr txBox="1"/>
           <p:nvPr/>
         </p:nvSpPr>
         <p:spPr>
           <a:xfrm>
-            <a:off x="1188720" y="1371600"/>
-            <a:ext cx="10058400" cy="3566160"/>
-          </a:xfrm>
-          <a:prstGeom prst="rect">
-            <a:avLst/>
-          </a:prstGeom>
-          <a:noFill/>
-        </p:spPr>
-        <p:txBody>
-          <a:bodyPr wrap="square" anchor="ctr" lIns="0" rIns="0" tIns="0" bIns="0">
-            <a:spAutoFit/>
-          </a:bodyPr>
-          <a:lstStyle/>
-          <a:p>
-            <a:pPr algn="l">
-              <a:spcAft>
-                <a:spcPts val="1800"/>
-              </a:spcAft>
-            </a:pPr>
-            <a:r>
-              <a:rPr sz="4000" b="0" i="1">
-                <a:solidFill>
-                  <a:srgbClr val="1C1B19"/>
-                </a:solidFill>
-                <a:latin typeface="Source Serif 4"/>
-              </a:rPr>
-              <a:t>One thing you avoid. Four steps, easy to hard.</a:t>
-            </a:r>
-          </a:p>
-        </p:txBody>
-      </p:sp>
-      <p:sp>
-        <p:nvSpPr>
-          <p:cNvPr id="7" name="TextBox 6"/>
-          <p:cNvSpPr txBox="1"/>
-          <p:nvPr/>
-        </p:nvSpPr>
-        <p:spPr>
-          <a:xfrm>
-            <a:off x="1188720" y="5120640"/>
-            <a:ext cx="10058400" cy="914400"/>
+            <a:off x="822960" y="1005840"/>
+            <a:ext cx="10515600" cy="1097280"/>
           </a:xfrm>
           <a:prstGeom prst="rect">
             <a:avLst/>
@@ -6093,17 +7878,487 @@
           <a:p>
             <a:pPr algn="l">
               <a:spcAft>
-                <a:spcPts val="810"/>
-              </a:spcAft>
-            </a:pPr>
-            <a:r>
-              <a:rPr sz="1800" b="0" i="0">
+                <a:spcPts val="1620"/>
+              </a:spcAft>
+            </a:pPr>
+            <a:r>
+              <a:rPr sz="3600" b="1" i="0">
+                <a:solidFill>
+                  <a:srgbClr val="1C1B19"/>
+                </a:solidFill>
+                <a:latin typeface="Source Serif 4"/>
+              </a:rPr>
+              <a:t>The answers</a:t>
+            </a:r>
+          </a:p>
+        </p:txBody>
+      </p:sp>
+      <p:sp>
+        <p:nvSpPr>
+          <p:cNvPr id="6" name="TextBox 5"/>
+          <p:cNvSpPr txBox="1"/>
+          <p:nvPr/>
+        </p:nvSpPr>
+        <p:spPr>
+          <a:xfrm>
+            <a:off x="822960" y="2057400"/>
+            <a:ext cx="548640" cy="804672"/>
+          </a:xfrm>
+          <a:prstGeom prst="rect">
+            <a:avLst/>
+          </a:prstGeom>
+          <a:noFill/>
+        </p:spPr>
+        <p:txBody>
+          <a:bodyPr wrap="square" anchor="t" lIns="0" rIns="0" tIns="0" bIns="0">
+            <a:spAutoFit/>
+          </a:bodyPr>
+          <a:lstStyle/>
+          <a:p>
+            <a:pPr algn="l">
+              <a:spcAft>
+                <a:spcPts val="1170"/>
+              </a:spcAft>
+            </a:pPr>
+            <a:r>
+              <a:rPr sz="2600" b="1" i="0">
+                <a:solidFill>
+                  <a:srgbClr val="F47B20"/>
+                </a:solidFill>
+                <a:latin typeface="Source Serif 4"/>
+              </a:rPr>
+              <a:t>1</a:t>
+            </a:r>
+          </a:p>
+        </p:txBody>
+      </p:sp>
+      <p:sp>
+        <p:nvSpPr>
+          <p:cNvPr id="7" name="TextBox 6"/>
+          <p:cNvSpPr txBox="1"/>
+          <p:nvPr/>
+        </p:nvSpPr>
+        <p:spPr>
+          <a:xfrm>
+            <a:off x="1463040" y="2093976"/>
+            <a:ext cx="9875520" cy="804672"/>
+          </a:xfrm>
+          <a:prstGeom prst="rect">
+            <a:avLst/>
+          </a:prstGeom>
+          <a:noFill/>
+        </p:spPr>
+        <p:txBody>
+          <a:bodyPr wrap="square" anchor="t" lIns="0" rIns="0" tIns="0" bIns="0">
+            <a:spAutoFit/>
+          </a:bodyPr>
+          <a:lstStyle/>
+          <a:p>
+            <a:pPr algn="l">
+              <a:spcAft>
+                <a:spcPts val="945"/>
+              </a:spcAft>
+            </a:pPr>
+            <a:r>
+              <a:rPr sz="2100" b="1" i="0">
+                <a:solidFill>
+                  <a:srgbClr val="1C1B19"/>
+                </a:solidFill>
+                <a:latin typeface="Source Serif 4"/>
+              </a:rPr>
+              <a:t>Myth.</a:t>
+            </a:r>
+          </a:p>
+          <a:p>
+            <a:pPr algn="l">
+              <a:spcAft>
+                <a:spcPts val="945"/>
+              </a:spcAft>
+            </a:pPr>
+            <a:r>
+              <a:rPr sz="1600" b="0" i="0">
                 <a:solidFill>
                   <a:srgbClr val="5D5A54"/>
                 </a:solidFill>
-                <a:latin typeface="Inter Tight"/>
-              </a:rPr>
-              <a:t>Private. Write a prediction next to step 1. Nobody shares.</a:t>
+                <a:latin typeface="Source Serif 4"/>
+              </a:rPr>
+              <a:t>Rest is self-care. Skipping what anxiety predicts makes it grow.</a:t>
+            </a:r>
+          </a:p>
+        </p:txBody>
+      </p:sp>
+      <p:sp>
+        <p:nvSpPr>
+          <p:cNvPr id="8" name="TextBox 7"/>
+          <p:cNvSpPr txBox="1"/>
+          <p:nvPr/>
+        </p:nvSpPr>
+        <p:spPr>
+          <a:xfrm>
+            <a:off x="822960" y="2862072"/>
+            <a:ext cx="548640" cy="804672"/>
+          </a:xfrm>
+          <a:prstGeom prst="rect">
+            <a:avLst/>
+          </a:prstGeom>
+          <a:noFill/>
+        </p:spPr>
+        <p:txBody>
+          <a:bodyPr wrap="square" anchor="t" lIns="0" rIns="0" tIns="0" bIns="0">
+            <a:spAutoFit/>
+          </a:bodyPr>
+          <a:lstStyle/>
+          <a:p>
+            <a:pPr algn="l">
+              <a:spcAft>
+                <a:spcPts val="1170"/>
+              </a:spcAft>
+            </a:pPr>
+            <a:r>
+              <a:rPr sz="2600" b="1" i="0">
+                <a:solidFill>
+                  <a:srgbClr val="F47B20"/>
+                </a:solidFill>
+                <a:latin typeface="Source Serif 4"/>
+              </a:rPr>
+              <a:t>2</a:t>
+            </a:r>
+          </a:p>
+        </p:txBody>
+      </p:sp>
+      <p:sp>
+        <p:nvSpPr>
+          <p:cNvPr id="9" name="TextBox 8"/>
+          <p:cNvSpPr txBox="1"/>
+          <p:nvPr/>
+        </p:nvSpPr>
+        <p:spPr>
+          <a:xfrm>
+            <a:off x="1463040" y="2898648"/>
+            <a:ext cx="9875520" cy="804672"/>
+          </a:xfrm>
+          <a:prstGeom prst="rect">
+            <a:avLst/>
+          </a:prstGeom>
+          <a:noFill/>
+        </p:spPr>
+        <p:txBody>
+          <a:bodyPr wrap="square" anchor="t" lIns="0" rIns="0" tIns="0" bIns="0">
+            <a:spAutoFit/>
+          </a:bodyPr>
+          <a:lstStyle/>
+          <a:p>
+            <a:pPr algn="l">
+              <a:spcAft>
+                <a:spcPts val="945"/>
+              </a:spcAft>
+            </a:pPr>
+            <a:r>
+              <a:rPr sz="2100" b="1" i="0">
+                <a:solidFill>
+                  <a:srgbClr val="1C1B19"/>
+                </a:solidFill>
+                <a:latin typeface="Source Serif 4"/>
+              </a:rPr>
+              <a:t>Myth.</a:t>
+            </a:r>
+          </a:p>
+          <a:p>
+            <a:pPr algn="l">
+              <a:spcAft>
+                <a:spcPts val="945"/>
+              </a:spcAft>
+            </a:pPr>
+            <a:r>
+              <a:rPr sz="1600" b="0" i="0">
+                <a:solidFill>
+                  <a:srgbClr val="5D5A54"/>
+                </a:solidFill>
+                <a:latin typeface="Source Serif 4"/>
+              </a:rPr>
+              <a:t>You can do hard things nervous. That's often how the alarm learns.</a:t>
+            </a:r>
+          </a:p>
+        </p:txBody>
+      </p:sp>
+      <p:sp>
+        <p:nvSpPr>
+          <p:cNvPr id="10" name="TextBox 9"/>
+          <p:cNvSpPr txBox="1"/>
+          <p:nvPr/>
+        </p:nvSpPr>
+        <p:spPr>
+          <a:xfrm>
+            <a:off x="822960" y="3666744"/>
+            <a:ext cx="548640" cy="804672"/>
+          </a:xfrm>
+          <a:prstGeom prst="rect">
+            <a:avLst/>
+          </a:prstGeom>
+          <a:noFill/>
+        </p:spPr>
+        <p:txBody>
+          <a:bodyPr wrap="square" anchor="t" lIns="0" rIns="0" tIns="0" bIns="0">
+            <a:spAutoFit/>
+          </a:bodyPr>
+          <a:lstStyle/>
+          <a:p>
+            <a:pPr algn="l">
+              <a:spcAft>
+                <a:spcPts val="1170"/>
+              </a:spcAft>
+            </a:pPr>
+            <a:r>
+              <a:rPr sz="2600" b="1" i="0">
+                <a:solidFill>
+                  <a:srgbClr val="F47B20"/>
+                </a:solidFill>
+                <a:latin typeface="Source Serif 4"/>
+              </a:rPr>
+              <a:t>3</a:t>
+            </a:r>
+          </a:p>
+        </p:txBody>
+      </p:sp>
+      <p:sp>
+        <p:nvSpPr>
+          <p:cNvPr id="11" name="TextBox 10"/>
+          <p:cNvSpPr txBox="1"/>
+          <p:nvPr/>
+        </p:nvSpPr>
+        <p:spPr>
+          <a:xfrm>
+            <a:off x="1463040" y="3703320"/>
+            <a:ext cx="9875520" cy="804672"/>
+          </a:xfrm>
+          <a:prstGeom prst="rect">
+            <a:avLst/>
+          </a:prstGeom>
+          <a:noFill/>
+        </p:spPr>
+        <p:txBody>
+          <a:bodyPr wrap="square" anchor="t" lIns="0" rIns="0" tIns="0" bIns="0">
+            <a:spAutoFit/>
+          </a:bodyPr>
+          <a:lstStyle/>
+          <a:p>
+            <a:pPr algn="l">
+              <a:spcAft>
+                <a:spcPts val="945"/>
+              </a:spcAft>
+            </a:pPr>
+            <a:r>
+              <a:rPr sz="2100" b="1" i="0">
+                <a:solidFill>
+                  <a:srgbClr val="1C1B19"/>
+                </a:solidFill>
+                <a:latin typeface="Source Serif 4"/>
+              </a:rPr>
+              <a:t>Fact.</a:t>
+            </a:r>
+          </a:p>
+          <a:p>
+            <a:pPr algn="l">
+              <a:spcAft>
+                <a:spcPts val="945"/>
+              </a:spcAft>
+            </a:pPr>
+            <a:r>
+              <a:rPr sz="1600" b="0" i="0">
+                <a:solidFill>
+                  <a:srgbClr val="5D5A54"/>
+                </a:solidFill>
+                <a:latin typeface="Source Serif 4"/>
+              </a:rPr>
+              <a:t>In a national survey of over 10,000 teens.</a:t>
+            </a:r>
+          </a:p>
+        </p:txBody>
+      </p:sp>
+      <p:sp>
+        <p:nvSpPr>
+          <p:cNvPr id="12" name="TextBox 11"/>
+          <p:cNvSpPr txBox="1"/>
+          <p:nvPr/>
+        </p:nvSpPr>
+        <p:spPr>
+          <a:xfrm>
+            <a:off x="822960" y="4471416"/>
+            <a:ext cx="548640" cy="804672"/>
+          </a:xfrm>
+          <a:prstGeom prst="rect">
+            <a:avLst/>
+          </a:prstGeom>
+          <a:noFill/>
+        </p:spPr>
+        <p:txBody>
+          <a:bodyPr wrap="square" anchor="t" lIns="0" rIns="0" tIns="0" bIns="0">
+            <a:spAutoFit/>
+          </a:bodyPr>
+          <a:lstStyle/>
+          <a:p>
+            <a:pPr algn="l">
+              <a:spcAft>
+                <a:spcPts val="1170"/>
+              </a:spcAft>
+            </a:pPr>
+            <a:r>
+              <a:rPr sz="2600" b="1" i="0">
+                <a:solidFill>
+                  <a:srgbClr val="F47B20"/>
+                </a:solidFill>
+                <a:latin typeface="Source Serif 4"/>
+              </a:rPr>
+              <a:t>4</a:t>
+            </a:r>
+          </a:p>
+        </p:txBody>
+      </p:sp>
+      <p:sp>
+        <p:nvSpPr>
+          <p:cNvPr id="13" name="TextBox 12"/>
+          <p:cNvSpPr txBox="1"/>
+          <p:nvPr/>
+        </p:nvSpPr>
+        <p:spPr>
+          <a:xfrm>
+            <a:off x="1463040" y="4507992"/>
+            <a:ext cx="9875520" cy="804672"/>
+          </a:xfrm>
+          <a:prstGeom prst="rect">
+            <a:avLst/>
+          </a:prstGeom>
+          <a:noFill/>
+        </p:spPr>
+        <p:txBody>
+          <a:bodyPr wrap="square" anchor="t" lIns="0" rIns="0" tIns="0" bIns="0">
+            <a:spAutoFit/>
+          </a:bodyPr>
+          <a:lstStyle/>
+          <a:p>
+            <a:pPr algn="l">
+              <a:spcAft>
+                <a:spcPts val="945"/>
+              </a:spcAft>
+            </a:pPr>
+            <a:r>
+              <a:rPr sz="2100" b="1" i="0">
+                <a:solidFill>
+                  <a:srgbClr val="1C1B19"/>
+                </a:solidFill>
+                <a:latin typeface="Source Serif 4"/>
+              </a:rPr>
+              <a:t>Mostly myth.</a:t>
+            </a:r>
+          </a:p>
+          <a:p>
+            <a:pPr algn="l">
+              <a:spcAft>
+                <a:spcPts val="945"/>
+              </a:spcAft>
+            </a:pPr>
+            <a:r>
+              <a:rPr sz="1600" b="0" i="0">
+                <a:solidFill>
+                  <a:srgbClr val="5D5A54"/>
+                </a:solidFill>
+                <a:latin typeface="Source Serif 4"/>
+              </a:rPr>
+              <a:t>It's the alarm at full volume with no fire. Get checked once.</a:t>
+            </a:r>
+          </a:p>
+        </p:txBody>
+      </p:sp>
+      <p:sp>
+        <p:nvSpPr>
+          <p:cNvPr id="14" name="TextBox 13"/>
+          <p:cNvSpPr txBox="1"/>
+          <p:nvPr/>
+        </p:nvSpPr>
+        <p:spPr>
+          <a:xfrm>
+            <a:off x="822960" y="5276088"/>
+            <a:ext cx="548640" cy="804672"/>
+          </a:xfrm>
+          <a:prstGeom prst="rect">
+            <a:avLst/>
+          </a:prstGeom>
+          <a:noFill/>
+        </p:spPr>
+        <p:txBody>
+          <a:bodyPr wrap="square" anchor="t" lIns="0" rIns="0" tIns="0" bIns="0">
+            <a:spAutoFit/>
+          </a:bodyPr>
+          <a:lstStyle/>
+          <a:p>
+            <a:pPr algn="l">
+              <a:spcAft>
+                <a:spcPts val="1170"/>
+              </a:spcAft>
+            </a:pPr>
+            <a:r>
+              <a:rPr sz="2600" b="1" i="0">
+                <a:solidFill>
+                  <a:srgbClr val="F47B20"/>
+                </a:solidFill>
+                <a:latin typeface="Source Serif 4"/>
+              </a:rPr>
+              <a:t>5</a:t>
+            </a:r>
+          </a:p>
+        </p:txBody>
+      </p:sp>
+      <p:sp>
+        <p:nvSpPr>
+          <p:cNvPr id="15" name="TextBox 14"/>
+          <p:cNvSpPr txBox="1"/>
+          <p:nvPr/>
+        </p:nvSpPr>
+        <p:spPr>
+          <a:xfrm>
+            <a:off x="1463040" y="5312664"/>
+            <a:ext cx="9875520" cy="804672"/>
+          </a:xfrm>
+          <a:prstGeom prst="rect">
+            <a:avLst/>
+          </a:prstGeom>
+          <a:noFill/>
+        </p:spPr>
+        <p:txBody>
+          <a:bodyPr wrap="square" anchor="t" lIns="0" rIns="0" tIns="0" bIns="0">
+            <a:spAutoFit/>
+          </a:bodyPr>
+          <a:lstStyle/>
+          <a:p>
+            <a:pPr algn="l">
+              <a:spcAft>
+                <a:spcPts val="945"/>
+              </a:spcAft>
+            </a:pPr>
+            <a:r>
+              <a:rPr sz="2100" b="1" i="0">
+                <a:solidFill>
+                  <a:srgbClr val="1C1B19"/>
+                </a:solidFill>
+                <a:latin typeface="Source Serif 4"/>
+              </a:rPr>
+              <a:t>Fact.</a:t>
+            </a:r>
+          </a:p>
+          <a:p>
+            <a:pPr algn="l">
+              <a:spcAft>
+                <a:spcPts val="945"/>
+              </a:spcAft>
+            </a:pPr>
+            <a:r>
+              <a:rPr sz="1600" b="0" i="0">
+                <a:solidFill>
+                  <a:srgbClr val="5D5A54"/>
+                </a:solidFill>
+                <a:latin typeface="Source Serif 4"/>
+              </a:rPr>
+              <a:t>Most teens in a big trial improved with treatment.</a:t>
             </a:r>
           </a:p>
         </p:txBody>
@@ -6116,7 +8371,7 @@
 </p:sld>
 </file>
 
-<file path=ppt/slides/slide13.xml><?xml version="1.0" encoding="utf-8"?>
+<file path=ppt/slides/slide5.xml><?xml version="1.0" encoding="utf-8"?>
 <p:sld xmlns:a="http://schemas.openxmlformats.org/drawingml/2006/main" xmlns:p="http://schemas.openxmlformats.org/presentationml/2006/main" xmlns:r="http://schemas.openxmlformats.org/officeDocument/2006/relationships">
   <p:cSld>
     <p:bg>
@@ -6212,7 +8467,7 @@
                 </a:solidFill>
                 <a:latin typeface="Inter Tight"/>
               </a:rPr>
-              <a:t>BEFORE YOU GO</a:t>
+              <a:t>HOW ANXIETY LEARNS</a:t>
             </a:r>
           </a:p>
         </p:txBody>
@@ -6264,7 +8519,7 @@
         </p:nvSpPr>
         <p:spPr>
           <a:xfrm>
-            <a:off x="822960" y="1188720"/>
+            <a:off x="822960" y="1005840"/>
             <a:ext cx="10515600" cy="914400"/>
           </a:xfrm>
           <a:prstGeom prst="rect">
@@ -6280,70 +8535,31 @@
           <a:p>
             <a:pPr algn="l">
               <a:spcAft>
-                <a:spcPts val="1620"/>
-              </a:spcAft>
-            </a:pPr>
-            <a:r>
-              <a:rPr sz="3600" b="1" i="0">
+                <a:spcPts val="1530"/>
+              </a:spcAft>
+            </a:pPr>
+            <a:r>
+              <a:rPr sz="3400" b="1" i="0">
                 <a:solidFill>
                   <a:srgbClr val="1C1B19"/>
                 </a:solidFill>
                 <a:latin typeface="Source Serif 4"/>
               </a:rPr>
-              <a:t>Exit card</a:t>
-            </a:r>
-          </a:p>
-        </p:txBody>
-      </p:sp>
-      <p:sp>
-        <p:nvSpPr>
-          <p:cNvPr id="6" name="TextBox 5"/>
-          <p:cNvSpPr txBox="1"/>
-          <p:nvPr/>
-        </p:nvSpPr>
-        <p:spPr>
-          <a:xfrm>
-            <a:off x="822960" y="2286000"/>
-            <a:ext cx="10515600" cy="1463040"/>
-          </a:xfrm>
-          <a:prstGeom prst="rect">
-            <a:avLst/>
-          </a:prstGeom>
-          <a:noFill/>
-        </p:spPr>
-        <p:txBody>
-          <a:bodyPr wrap="square" anchor="t" lIns="0" rIns="0" tIns="0" bIns="0">
-            <a:spAutoFit/>
-          </a:bodyPr>
-          <a:lstStyle/>
-          <a:p>
-            <a:pPr algn="l">
-              <a:spcAft>
-                <a:spcPts val="1080"/>
-              </a:spcAft>
-            </a:pPr>
-            <a:r>
-              <a:rPr sz="2400" b="0" i="0">
-                <a:solidFill>
-                  <a:srgbClr val="1C1B19"/>
-                </a:solidFill>
-                <a:latin typeface="Source Serif 4"/>
-              </a:rPr>
-              <a:t>What could you say to a friend whose alarm is going off for burnt toast?</a:t>
-            </a:r>
-          </a:p>
-        </p:txBody>
-      </p:sp>
-      <p:sp>
-        <p:nvSpPr>
-          <p:cNvPr id="7" name="Rectangle 6"/>
+              <a:t>The avoidance loop</a:t>
+            </a:r>
+          </a:p>
+        </p:txBody>
+      </p:sp>
+      <p:sp>
+        <p:nvSpPr>
+          <p:cNvPr id="6" name="Rectangle 5"/>
           <p:cNvSpPr/>
           <p:nvPr/>
         </p:nvSpPr>
         <p:spPr>
           <a:xfrm>
-            <a:off x="822960" y="4023360"/>
-            <a:ext cx="10515600" cy="1371600"/>
+            <a:off x="822960" y="2743200"/>
+            <a:ext cx="1874519" cy="1005840"/>
           </a:xfrm>
           <a:prstGeom prst="rect">
             <a:avLst/>
@@ -6353,7 +8569,7 @@
           </a:solidFill>
           <a:ln w="15875">
             <a:solidFill>
-              <a:srgbClr val="1C1B19"/>
+              <a:srgbClr val="0B2D5B"/>
             </a:solidFill>
           </a:ln>
           <a:effectLst/>
@@ -6382,14 +8598,14 @@
       </p:sp>
       <p:sp>
         <p:nvSpPr>
-          <p:cNvPr id="8" name="TextBox 7"/>
+          <p:cNvPr id="7" name="TextBox 6"/>
           <p:cNvSpPr txBox="1"/>
           <p:nvPr/>
         </p:nvSpPr>
         <p:spPr>
           <a:xfrm>
-            <a:off x="1097280" y="4206240"/>
-            <a:ext cx="10058400" cy="365760"/>
+            <a:off x="822960" y="2743200"/>
+            <a:ext cx="1874519" cy="1005840"/>
           </a:xfrm>
           <a:prstGeom prst="rect">
             <a:avLst/>
@@ -6397,112 +8613,85 @@
           <a:noFill/>
         </p:spPr>
         <p:txBody>
-          <a:bodyPr wrap="square" anchor="t" lIns="0" rIns="0" tIns="0" bIns="0">
+          <a:bodyPr wrap="square" anchor="ctr" lIns="0" rIns="0" tIns="0" bIns="0">
             <a:spAutoFit/>
           </a:bodyPr>
           <a:lstStyle/>
           <a:p>
-            <a:pPr algn="l">
-              <a:spcAft>
-                <a:spcPts val="540"/>
-              </a:spcAft>
-            </a:pPr>
-            <a:r>
-              <a:rPr sz="1200" b="1" i="0">
-                <a:solidFill>
-                  <a:srgbClr val="0B2D5B"/>
-                </a:solidFill>
-                <a:latin typeface="Inter Tight"/>
-              </a:rPr>
-              <a:t>ON THE BVR DINER MENU</a:t>
-            </a:r>
-          </a:p>
-        </p:txBody>
-      </p:sp>
-      <p:sp>
-        <p:nvSpPr>
-          <p:cNvPr id="9" name="TextBox 8"/>
-          <p:cNvSpPr txBox="1"/>
-          <p:nvPr/>
-        </p:nvSpPr>
-        <p:spPr>
-          <a:xfrm>
-            <a:off x="1097280" y="4617720"/>
-            <a:ext cx="10058400" cy="640080"/>
-          </a:xfrm>
-          <a:prstGeom prst="rect">
-            <a:avLst/>
-          </a:prstGeom>
-          <a:noFill/>
-        </p:spPr>
-        <p:txBody>
-          <a:bodyPr wrap="square" anchor="t" lIns="0" rIns="0" tIns="0" bIns="0">
-            <a:spAutoFit/>
-          </a:bodyPr>
-          <a:lstStyle/>
-          <a:p>
-            <a:pPr algn="l">
+            <a:pPr algn="ctr">
               <a:spcAft>
                 <a:spcPts val="900"/>
               </a:spcAft>
             </a:pPr>
             <a:r>
-              <a:rPr sz="2000" b="0" i="0">
+              <a:rPr sz="2000" b="1" i="0">
                 <a:solidFill>
                   <a:srgbClr val="1C1B19"/>
                 </a:solidFill>
-                <a:latin typeface="Inter Tight"/>
-              </a:rPr>
-              <a:t>https://rmwtoolkit.github.io/bcds-toolkit/the-false-alarm-high-school.html</a:t>
-            </a:r>
-          </a:p>
-        </p:txBody>
-      </p:sp>
-    </p:spTree>
-  </p:cSld>
-  <p:clrMapOvr>
-    <a:masterClrMapping/>
-  </p:clrMapOvr>
-</p:sld>
-</file>
-
-<file path=ppt/slides/slide2.xml><?xml version="1.0" encoding="utf-8"?>
-<p:sld xmlns:a="http://schemas.openxmlformats.org/drawingml/2006/main" xmlns:p="http://schemas.openxmlformats.org/presentationml/2006/main" xmlns:r="http://schemas.openxmlformats.org/officeDocument/2006/relationships" show="0">
-  <p:cSld>
-    <p:bg>
-      <p:bgPr>
-        <a:solidFill>
-          <a:srgbClr val="EEEBE4"/>
-        </a:solidFill>
-        <a:effectLst/>
-      </p:bgPr>
-    </p:bg>
-    <p:spTree>
-      <p:nvGrpSpPr>
-        <p:cNvPr id="1" name=""/>
-        <p:cNvGrpSpPr/>
-        <p:nvPr/>
-      </p:nvGrpSpPr>
-      <p:grpSpPr/>
-      <p:sp>
-        <p:nvSpPr>
-          <p:cNvPr id="2" name="Rectangle 1"/>
+                <a:latin typeface="Source Serif 4"/>
+              </a:rPr>
+              <a:t>Alarm fires</a:t>
+            </a:r>
+          </a:p>
+        </p:txBody>
+      </p:sp>
+      <p:cxnSp>
+        <p:nvCxnSpPr>
+          <p:cNvPr id="8" name="Connector 7"/>
+          <p:cNvCxnSpPr/>
+          <p:nvPr/>
+        </p:nvCxnSpPr>
+        <p:spPr>
+          <a:xfrm>
+            <a:off x="2752344" y="3246120"/>
+            <a:ext cx="176021" cy="0"/>
+          </a:xfrm>
+          <a:prstGeom prst="line">
+            <a:avLst/>
+          </a:prstGeom>
+          <a:ln w="31750">
+            <a:solidFill>
+              <a:srgbClr val="F47B20"/>
+            </a:solidFill>
+            <a:tailEnd type="triangle"/>
+          </a:ln>
+        </p:spPr>
+        <p:style>
+          <a:lnRef idx="2">
+            <a:schemeClr val="accent1"/>
+          </a:lnRef>
+          <a:fillRef idx="0">
+            <a:schemeClr val="accent1"/>
+          </a:fillRef>
+          <a:effectRef idx="1">
+            <a:schemeClr val="accent1"/>
+          </a:effectRef>
+          <a:fontRef idx="minor">
+            <a:schemeClr val="tx1"/>
+          </a:fontRef>
+        </p:style>
+      </p:cxnSp>
+      <p:sp>
+        <p:nvSpPr>
+          <p:cNvPr id="9" name="Rectangle 8"/>
           <p:cNvSpPr/>
           <p:nvPr/>
         </p:nvSpPr>
         <p:spPr>
           <a:xfrm>
-            <a:off x="0" y="0"/>
-            <a:ext cx="12191695" cy="384048"/>
+            <a:off x="2983229" y="2743200"/>
+            <a:ext cx="1874519" cy="1005840"/>
           </a:xfrm>
           <a:prstGeom prst="rect">
             <a:avLst/>
           </a:prstGeom>
           <a:solidFill>
-            <a:srgbClr val="0B2D5B"/>
+            <a:srgbClr val="FFFFFF"/>
           </a:solidFill>
-          <a:ln>
-            <a:noFill/>
+          <a:ln w="15875">
+            <a:solidFill>
+              <a:srgbClr val="0B2D5B"/>
+            </a:solidFill>
           </a:ln>
           <a:effectLst/>
         </p:spPr>
@@ -6530,14 +8719,14 @@
       </p:sp>
       <p:sp>
         <p:nvSpPr>
-          <p:cNvPr id="3" name="TextBox 2"/>
+          <p:cNvPr id="10" name="TextBox 9"/>
           <p:cNvSpPr txBox="1"/>
           <p:nvPr/>
         </p:nvSpPr>
         <p:spPr>
           <a:xfrm>
-            <a:off x="548640" y="100584"/>
-            <a:ext cx="10972800" cy="274320"/>
+            <a:off x="2983229" y="2743200"/>
+            <a:ext cx="1874519" cy="1005840"/>
           </a:xfrm>
           <a:prstGeom prst="rect">
             <a:avLst/>
@@ -6545,446 +8734,85 @@
           <a:noFill/>
         </p:spPr>
         <p:txBody>
-          <a:bodyPr wrap="square" anchor="t" lIns="0" rIns="0" tIns="0" bIns="0">
+          <a:bodyPr wrap="square" anchor="ctr" lIns="0" rIns="0" tIns="0" bIns="0">
             <a:spAutoFit/>
           </a:bodyPr>
           <a:lstStyle/>
           <a:p>
-            <a:pPr algn="l">
-              <a:spcAft>
-                <a:spcPts val="495"/>
-              </a:spcAft>
-            </a:pPr>
-            <a:r>
-              <a:rPr sz="1100" b="1" i="0">
-                <a:solidFill>
-                  <a:srgbClr val="FFFFFF"/>
-                </a:solidFill>
-                <a:latin typeface="Inter Tight"/>
-              </a:rPr>
-              <a:t>TEACHER PAGE  ·  skipped when you present  ·  Before you teach</a:t>
-            </a:r>
-          </a:p>
-        </p:txBody>
-      </p:sp>
-      <p:sp>
-        <p:nvSpPr>
-          <p:cNvPr id="4" name="TextBox 3"/>
-          <p:cNvSpPr txBox="1"/>
-          <p:nvPr/>
-        </p:nvSpPr>
-        <p:spPr>
-          <a:xfrm>
-            <a:off x="548640" y="685800"/>
-            <a:ext cx="10972800" cy="640080"/>
-          </a:xfrm>
-          <a:prstGeom prst="rect">
-            <a:avLst/>
-          </a:prstGeom>
-          <a:noFill/>
-        </p:spPr>
-        <p:txBody>
-          <a:bodyPr wrap="square" anchor="t" lIns="0" rIns="0" tIns="0" bIns="0">
-            <a:spAutoFit/>
-          </a:bodyPr>
-          <a:lstStyle/>
-          <a:p>
-            <a:pPr algn="l">
-              <a:spcAft>
-                <a:spcPts val="1350"/>
-              </a:spcAft>
-            </a:pPr>
-            <a:r>
-              <a:rPr sz="3000" b="1" i="0">
+            <a:pPr algn="ctr">
+              <a:spcAft>
+                <a:spcPts val="900"/>
+              </a:spcAft>
+            </a:pPr>
+            <a:r>
+              <a:rPr sz="2000" b="1" i="0">
                 <a:solidFill>
                   <a:srgbClr val="1C1B19"/>
                 </a:solidFill>
                 <a:latin typeface="Source Serif 4"/>
               </a:rPr>
-              <a:t>Before you teach</a:t>
-            </a:r>
-          </a:p>
-        </p:txBody>
-      </p:sp>
-      <p:sp>
-        <p:nvSpPr>
-          <p:cNvPr id="5" name="TextBox 4"/>
-          <p:cNvSpPr txBox="1"/>
-          <p:nvPr/>
-        </p:nvSpPr>
-        <p:spPr>
-          <a:xfrm>
-            <a:off x="548640" y="1463040"/>
-            <a:ext cx="5394960" cy="4937760"/>
-          </a:xfrm>
-          <a:prstGeom prst="rect">
-            <a:avLst/>
-          </a:prstGeom>
-          <a:noFill/>
-        </p:spPr>
-        <p:txBody>
-          <a:bodyPr wrap="square" anchor="t" lIns="0" rIns="0" tIns="0" bIns="0">
-            <a:spAutoFit/>
-          </a:bodyPr>
-          <a:lstStyle/>
-          <a:p>
-            <a:pPr algn="l">
-              <a:spcAft>
-                <a:spcPts val="585"/>
-              </a:spcAft>
-            </a:pPr>
-            <a:r>
-              <a:rPr sz="1500" b="1" i="0">
-                <a:solidFill>
-                  <a:srgbClr val="1C1B19"/>
-                </a:solidFill>
-                <a:latin typeface="Source Serif 4"/>
-              </a:rPr>
-              <a:t>Assume someone in the room has panic attacks.</a:t>
-            </a:r>
-          </a:p>
-          <a:p>
-            <a:pPr algn="l">
-              <a:spcAft>
-                <a:spcPts val="585"/>
-              </a:spcAft>
-            </a:pPr>
-            <a:r>
-              <a:rPr sz="1300" b="0" i="0">
-                <a:solidFill>
-                  <a:srgbClr val="1C1B19"/>
-                </a:solidFill>
-                <a:latin typeface="Source Serif 4"/>
-              </a:rPr>
-              <a:t>About 1 in 3 teens meets criteria for an anxiety disorder by 18. Never ask students to name their own fears or share a ladder. If someone volunteers, keep it brief and thank them. Say at the start and the end that a counselor is available afterward.</a:t>
-            </a:r>
-          </a:p>
-          <a:p>
-            <a:pPr algn="l">
-              <a:spcAft>
-                <a:spcPts val="585"/>
-              </a:spcAft>
-            </a:pPr>
-            <a:r>
-              <a:rPr sz="1300" b="0" i="0">
-                <a:solidFill>
-                  <a:srgbClr val="1C1B19"/>
-                </a:solidFill>
-                <a:latin typeface="Source Serif 4"/>
-              </a:rPr>
-              <a:t/>
-            </a:r>
-          </a:p>
-          <a:p>
-            <a:pPr algn="l">
-              <a:spcAft>
-                <a:spcPts val="585"/>
-              </a:spcAft>
-            </a:pPr>
-            <a:r>
-              <a:rPr sz="1500" b="1" i="0">
-                <a:solidFill>
-                  <a:srgbClr val="1C1B19"/>
-                </a:solidFill>
-                <a:latin typeface="Source Serif 4"/>
-              </a:rPr>
-              <a:t>If a student panics during class.</a:t>
-            </a:r>
-          </a:p>
-          <a:p>
-            <a:pPr algn="l">
-              <a:spcAft>
-                <a:spcPts val="585"/>
-              </a:spcAft>
-            </a:pPr>
-            <a:r>
-              <a:rPr sz="1300" b="0" i="0">
-                <a:solidFill>
-                  <a:srgbClr val="1C1B19"/>
-                </a:solidFill>
-                <a:latin typeface="Source Serif 4"/>
-              </a:rPr>
-              <a:t>Stay calm and quiet, and keep the room's attention off them. Offer a choice: step into the hall with you or another adult, or stay put. Speak slowly. Breathe with them, in for 4, out for 6. Say it will peak and pass in a few minutes. Don't crowd them, touch them without asking, or tell them to calm down. Afterward, let them rejoin without comment.</a:t>
-            </a:r>
-          </a:p>
-          <a:p>
-            <a:pPr algn="l">
-              <a:spcAft>
-                <a:spcPts val="585"/>
-              </a:spcAft>
-            </a:pPr>
-            <a:r>
-              <a:rPr sz="1300" b="0" i="0">
-                <a:solidFill>
-                  <a:srgbClr val="1C1B19"/>
-                </a:solidFill>
-                <a:latin typeface="Source Serif 4"/>
-              </a:rPr>
-              <a:t/>
-            </a:r>
-          </a:p>
-          <a:p>
-            <a:pPr algn="l">
-              <a:spcAft>
-                <a:spcPts val="585"/>
-              </a:spcAft>
-            </a:pPr>
-            <a:r>
-              <a:rPr sz="1500" b="1" i="0">
-                <a:solidFill>
-                  <a:srgbClr val="1C1B19"/>
-                </a:solidFill>
-                <a:latin typeface="Source Serif 4"/>
-              </a:rPr>
-              <a:t>When to bring in the nurse.</a:t>
-            </a:r>
-          </a:p>
-          <a:p>
-            <a:pPr algn="l">
-              <a:spcAft>
-                <a:spcPts val="585"/>
-              </a:spcAft>
-            </a:pPr>
-            <a:r>
-              <a:rPr sz="1300" b="0" i="0">
-                <a:solidFill>
-                  <a:srgbClr val="1C1B19"/>
-                </a:solidFill>
-                <a:latin typeface="Source Serif 4"/>
-              </a:rPr>
-              <a:t>Send them to the nurse, with an escort, if it's the first time you've seen it, if they mention chest pain, fainting, or a health condition like asthma or diabetes, or if you aren't sure it's panic. The nurse can rule out a medical cause. Call 911 if a student passes out, can't breathe, or seems confused.</a:t>
-            </a:r>
-          </a:p>
-          <a:p>
-            <a:pPr algn="l">
-              <a:spcAft>
-                <a:spcPts val="585"/>
-              </a:spcAft>
-            </a:pPr>
-            <a:r>
-              <a:rPr sz="1300" b="0" i="0">
-                <a:solidFill>
-                  <a:srgbClr val="1C1B19"/>
-                </a:solidFill>
-                <a:latin typeface="Source Serif 4"/>
-              </a:rPr>
-              <a:t/>
-            </a:r>
-          </a:p>
-        </p:txBody>
-      </p:sp>
-      <p:sp>
-        <p:nvSpPr>
-          <p:cNvPr id="6" name="TextBox 5"/>
-          <p:cNvSpPr txBox="1"/>
-          <p:nvPr/>
-        </p:nvSpPr>
-        <p:spPr>
-          <a:xfrm>
-            <a:off x="6217920" y="1463040"/>
-            <a:ext cx="5394960" cy="4937760"/>
-          </a:xfrm>
-          <a:prstGeom prst="rect">
-            <a:avLst/>
-          </a:prstGeom>
-          <a:noFill/>
-        </p:spPr>
-        <p:txBody>
-          <a:bodyPr wrap="square" anchor="t" lIns="0" rIns="0" tIns="0" bIns="0">
-            <a:spAutoFit/>
-          </a:bodyPr>
-          <a:lstStyle/>
-          <a:p>
-            <a:pPr algn="l">
-              <a:spcAft>
-                <a:spcPts val="585"/>
-              </a:spcAft>
-            </a:pPr>
-            <a:r>
-              <a:rPr sz="1500" b="1" i="0">
-                <a:solidFill>
-                  <a:srgbClr val="1C1B19"/>
-                </a:solidFill>
-                <a:latin typeface="Source Serif 4"/>
-              </a:rPr>
-              <a:t>When to bring in a counselor.</a:t>
-            </a:r>
-          </a:p>
-          <a:p>
-            <a:pPr algn="l">
-              <a:spcAft>
-                <a:spcPts val="585"/>
-              </a:spcAft>
-            </a:pPr>
-            <a:r>
-              <a:rPr sz="1300" b="0" i="0">
-                <a:solidFill>
-                  <a:srgbClr val="1C1B19"/>
-                </a:solidFill>
-                <a:latin typeface="Source Serif 4"/>
-              </a:rPr>
-              <a:t>Tell a counselor the same day after any panic episode in class. Also refer if a student is missing classes, practices or friends because of anxiety, is using vapes, weed, alcohol or pills to cope, or says they feel hopeless. Disclosures go to a counselor. No screening questions in class.</a:t>
-            </a:r>
-          </a:p>
-          <a:p>
-            <a:pPr algn="l">
-              <a:spcAft>
-                <a:spcPts val="585"/>
-              </a:spcAft>
-            </a:pPr>
-            <a:r>
-              <a:rPr sz="1300" b="0" i="0">
-                <a:solidFill>
-                  <a:srgbClr val="1C1B19"/>
-                </a:solidFill>
-                <a:latin typeface="Source Serif 4"/>
-              </a:rPr>
-              <a:t/>
-            </a:r>
-          </a:p>
-          <a:p>
-            <a:pPr algn="l">
-              <a:spcAft>
-                <a:spcPts val="585"/>
-              </a:spcAft>
-            </a:pPr>
-            <a:r>
-              <a:rPr sz="1500" b="1" i="0">
-                <a:solidFill>
-                  <a:srgbClr val="1C1B19"/>
-                </a:solidFill>
-                <a:latin typeface="Source Serif 4"/>
-              </a:rPr>
-              <a:t>Exposure is the student's choice.</a:t>
-            </a:r>
-          </a:p>
-          <a:p>
-            <a:pPr algn="l">
-              <a:spcAft>
-                <a:spcPts val="585"/>
-              </a:spcAft>
-            </a:pPr>
-            <a:r>
-              <a:rPr sz="1300" b="0" i="0">
-                <a:solidFill>
-                  <a:srgbClr val="1C1B19"/>
-                </a:solidFill>
-                <a:latin typeface="Source Serif 4"/>
-              </a:rPr>
-              <a:t>This lesson teaches the idea. Don't push anyone into a feared situation to practice, and don't cold-call an anxious student to prove a point. Bigger fears belong with a counselor or therapist. Existing accommodations stay in place.</a:t>
-            </a:r>
-          </a:p>
-          <a:p>
-            <a:pPr algn="l">
-              <a:spcAft>
-                <a:spcPts val="585"/>
-              </a:spcAft>
-            </a:pPr>
-            <a:r>
-              <a:rPr sz="1300" b="0" i="0">
-                <a:solidFill>
-                  <a:srgbClr val="1C1B19"/>
-                </a:solidFill>
-                <a:latin typeface="Source Serif 4"/>
-              </a:rPr>
-              <a:t/>
-            </a:r>
-          </a:p>
-          <a:p>
-            <a:pPr algn="l">
-              <a:spcAft>
-                <a:spcPts val="585"/>
-              </a:spcAft>
-            </a:pPr>
-            <a:r>
-              <a:rPr sz="1500" b="1" i="0">
-                <a:solidFill>
-                  <a:srgbClr val="1C1B19"/>
-                </a:solidFill>
-                <a:latin typeface="Source Serif 4"/>
-              </a:rPr>
-              <a:t>Burnt toast is the target. Real danger still counts.</a:t>
-            </a:r>
-          </a:p>
-          <a:p>
-            <a:pPr algn="l">
-              <a:spcAft>
-                <a:spcPts val="585"/>
-              </a:spcAft>
-            </a:pPr>
-            <a:r>
-              <a:rPr sz="1300" b="0" i="0">
-                <a:solidFill>
-                  <a:srgbClr val="1C1B19"/>
-                </a:solidFill>
-                <a:latin typeface="Source Serif 4"/>
-              </a:rPr>
-              <a:t>Some fears are accurate. Bullying, an unsafe home, or a friend in medical trouble needs a real response. If the voting surfaces something like that, take it seriously and follow up with a counselor.</a:t>
-            </a:r>
-          </a:p>
-          <a:p>
-            <a:pPr algn="l">
-              <a:spcAft>
-                <a:spcPts val="585"/>
-              </a:spcAft>
-            </a:pPr>
-            <a:r>
-              <a:rPr sz="1300" b="0" i="0">
-                <a:solidFill>
-                  <a:srgbClr val="1C1B19"/>
-                </a:solidFill>
-                <a:latin typeface="Source Serif 4"/>
-              </a:rPr>
-              <a:t/>
-            </a:r>
-          </a:p>
-        </p:txBody>
-      </p:sp>
-    </p:spTree>
-  </p:cSld>
-  <p:clrMapOvr>
-    <a:masterClrMapping/>
-  </p:clrMapOvr>
-</p:sld>
-</file>
-
-<file path=ppt/slides/slide3.xml><?xml version="1.0" encoding="utf-8"?>
-<p:sld xmlns:a="http://schemas.openxmlformats.org/drawingml/2006/main" xmlns:p="http://schemas.openxmlformats.org/presentationml/2006/main" xmlns:r="http://schemas.openxmlformats.org/officeDocument/2006/relationships" show="0">
-  <p:cSld>
-    <p:bg>
-      <p:bgPr>
-        <a:solidFill>
-          <a:srgbClr val="EEEBE4"/>
-        </a:solidFill>
-        <a:effectLst/>
-      </p:bgPr>
-    </p:bg>
-    <p:spTree>
-      <p:nvGrpSpPr>
-        <p:cNvPr id="1" name=""/>
-        <p:cNvGrpSpPr/>
-        <p:nvPr/>
-      </p:nvGrpSpPr>
-      <p:grpSpPr/>
-      <p:sp>
-        <p:nvSpPr>
-          <p:cNvPr id="2" name="Rectangle 1"/>
+              <a:t>You leave</a:t>
+            </a:r>
+          </a:p>
+        </p:txBody>
+      </p:sp>
+      <p:cxnSp>
+        <p:nvCxnSpPr>
+          <p:cNvPr id="11" name="Connector 10"/>
+          <p:cNvCxnSpPr/>
+          <p:nvPr/>
+        </p:nvCxnSpPr>
+        <p:spPr>
+          <a:xfrm>
+            <a:off x="4912614" y="3246120"/>
+            <a:ext cx="176022" cy="0"/>
+          </a:xfrm>
+          <a:prstGeom prst="line">
+            <a:avLst/>
+          </a:prstGeom>
+          <a:ln w="31750">
+            <a:solidFill>
+              <a:srgbClr val="F47B20"/>
+            </a:solidFill>
+            <a:tailEnd type="triangle"/>
+          </a:ln>
+        </p:spPr>
+        <p:style>
+          <a:lnRef idx="2">
+            <a:schemeClr val="accent1"/>
+          </a:lnRef>
+          <a:fillRef idx="0">
+            <a:schemeClr val="accent1"/>
+          </a:fillRef>
+          <a:effectRef idx="1">
+            <a:schemeClr val="accent1"/>
+          </a:effectRef>
+          <a:fontRef idx="minor">
+            <a:schemeClr val="tx1"/>
+          </a:fontRef>
+        </p:style>
+      </p:cxnSp>
+      <p:sp>
+        <p:nvSpPr>
+          <p:cNvPr id="12" name="Rectangle 11"/>
           <p:cNvSpPr/>
           <p:nvPr/>
         </p:nvSpPr>
         <p:spPr>
           <a:xfrm>
-            <a:off x="0" y="0"/>
-            <a:ext cx="12191695" cy="384048"/>
+            <a:off x="5143500" y="2743200"/>
+            <a:ext cx="1874519" cy="1005840"/>
           </a:xfrm>
           <a:prstGeom prst="rect">
             <a:avLst/>
           </a:prstGeom>
           <a:solidFill>
-            <a:srgbClr val="0B2D5B"/>
+            <a:srgbClr val="FFFFFF"/>
           </a:solidFill>
-          <a:ln>
-            <a:noFill/>
+          <a:ln w="15875">
+            <a:solidFill>
+              <a:srgbClr val="0B2D5B"/>
+            </a:solidFill>
           </a:ln>
           <a:effectLst/>
         </p:spPr>
@@ -7012,14 +8840,14 @@
       </p:sp>
       <p:sp>
         <p:nvSpPr>
-          <p:cNvPr id="3" name="TextBox 2"/>
+          <p:cNvPr id="13" name="TextBox 12"/>
           <p:cNvSpPr txBox="1"/>
           <p:nvPr/>
         </p:nvSpPr>
         <p:spPr>
           <a:xfrm>
-            <a:off x="548640" y="100584"/>
-            <a:ext cx="10972800" cy="274320"/>
+            <a:off x="5143500" y="2743200"/>
+            <a:ext cx="1874519" cy="1005840"/>
           </a:xfrm>
           <a:prstGeom prst="rect">
             <a:avLst/>
@@ -7027,485 +8855,85 @@
           <a:noFill/>
         </p:spPr>
         <p:txBody>
-          <a:bodyPr wrap="square" anchor="t" lIns="0" rIns="0" tIns="0" bIns="0">
+          <a:bodyPr wrap="square" anchor="ctr" lIns="0" rIns="0" tIns="0" bIns="0">
             <a:spAutoFit/>
           </a:bodyPr>
           <a:lstStyle/>
           <a:p>
-            <a:pPr algn="l">
-              <a:spcAft>
-                <a:spcPts val="495"/>
-              </a:spcAft>
-            </a:pPr>
-            <a:r>
-              <a:rPr sz="1100" b="1" i="0">
-                <a:solidFill>
-                  <a:srgbClr val="FFFFFF"/>
-                </a:solidFill>
-                <a:latin typeface="Inter Tight"/>
-              </a:rPr>
-              <a:t>TEACHER PAGE  ·  skipped when you present  ·  Every student in the room</a:t>
-            </a:r>
-          </a:p>
-        </p:txBody>
-      </p:sp>
-      <p:sp>
-        <p:nvSpPr>
-          <p:cNvPr id="4" name="TextBox 3"/>
-          <p:cNvSpPr txBox="1"/>
-          <p:nvPr/>
-        </p:nvSpPr>
-        <p:spPr>
-          <a:xfrm>
-            <a:off x="548640" y="685800"/>
-            <a:ext cx="10972800" cy="640080"/>
-          </a:xfrm>
-          <a:prstGeom prst="rect">
-            <a:avLst/>
-          </a:prstGeom>
-          <a:noFill/>
-        </p:spPr>
-        <p:txBody>
-          <a:bodyPr wrap="square" anchor="t" lIns="0" rIns="0" tIns="0" bIns="0">
-            <a:spAutoFit/>
-          </a:bodyPr>
-          <a:lstStyle/>
-          <a:p>
-            <a:pPr algn="l">
-              <a:spcAft>
-                <a:spcPts val="1350"/>
-              </a:spcAft>
-            </a:pPr>
-            <a:r>
-              <a:rPr sz="3000" b="1" i="0">
+            <a:pPr algn="ctr">
+              <a:spcAft>
+                <a:spcPts val="900"/>
+              </a:spcAft>
+            </a:pPr>
+            <a:r>
+              <a:rPr sz="2000" b="1" i="0">
                 <a:solidFill>
                   <a:srgbClr val="1C1B19"/>
                 </a:solidFill>
                 <a:latin typeface="Source Serif 4"/>
               </a:rPr>
-              <a:t>Every student in the room</a:t>
-            </a:r>
-          </a:p>
-        </p:txBody>
-      </p:sp>
-      <p:sp>
-        <p:nvSpPr>
-          <p:cNvPr id="5" name="TextBox 4"/>
-          <p:cNvSpPr txBox="1"/>
-          <p:nvPr/>
-        </p:nvSpPr>
-        <p:spPr>
-          <a:xfrm>
-            <a:off x="548640" y="1325880"/>
-            <a:ext cx="10972800" cy="365760"/>
-          </a:xfrm>
-          <a:prstGeom prst="rect">
-            <a:avLst/>
-          </a:prstGeom>
-          <a:noFill/>
-        </p:spPr>
-        <p:txBody>
-          <a:bodyPr wrap="square" anchor="t" lIns="0" rIns="0" tIns="0" bIns="0">
-            <a:spAutoFit/>
-          </a:bodyPr>
-          <a:lstStyle/>
-          <a:p>
-            <a:pPr algn="l">
-              <a:spcAft>
-                <a:spcPts val="630"/>
-              </a:spcAft>
-            </a:pPr>
-            <a:r>
-              <a:rPr sz="1400" b="0" i="0">
-                <a:solidFill>
-                  <a:srgbClr val="5D5A54"/>
-                </a:solidFill>
-                <a:latin typeface="Inter Tight"/>
-              </a:rPr>
-              <a:t>Culture, family, identity, ability and money: what to keep in mind for this topic.</a:t>
-            </a:r>
-          </a:p>
-        </p:txBody>
-      </p:sp>
-      <p:sp>
-        <p:nvSpPr>
-          <p:cNvPr id="6" name="TextBox 5"/>
-          <p:cNvSpPr txBox="1"/>
-          <p:nvPr/>
-        </p:nvSpPr>
-        <p:spPr>
-          <a:xfrm>
-            <a:off x="548640" y="1828800"/>
-            <a:ext cx="5394960" cy="4572000"/>
-          </a:xfrm>
-          <a:prstGeom prst="rect">
-            <a:avLst/>
-          </a:prstGeom>
-          <a:noFill/>
-        </p:spPr>
-        <p:txBody>
-          <a:bodyPr wrap="square" anchor="t" lIns="0" rIns="0" tIns="0" bIns="0">
-            <a:spAutoFit/>
-          </a:bodyPr>
-          <a:lstStyle/>
-          <a:p>
-            <a:pPr algn="l">
-              <a:spcAft>
-                <a:spcPts val="585"/>
-              </a:spcAft>
-            </a:pPr>
-            <a:r>
-              <a:rPr sz="1500" b="1" i="0">
-                <a:solidFill>
-                  <a:srgbClr val="1C1B19"/>
-                </a:solidFill>
-                <a:latin typeface="Source Serif 4"/>
-              </a:rPr>
-              <a:t>Not every family calls it anxiety.</a:t>
-            </a:r>
-          </a:p>
-          <a:p>
-            <a:pPr algn="l">
-              <a:spcAft>
-                <a:spcPts val="585"/>
-              </a:spcAft>
-            </a:pPr>
-            <a:r>
-              <a:rPr sz="1300" b="0" i="0">
-                <a:solidFill>
-                  <a:srgbClr val="1C1B19"/>
-                </a:solidFill>
-                <a:latin typeface="Source Serif 4"/>
-              </a:rPr>
-              <a:t>Some say stress, nerves, or overthinking. In some homes it shows up as stomachaches or headaches and gets treated as a body problem. Some lean on faith, family or community. Any of those can sit alongside these tools. Ask what words students' own families use, privately.</a:t>
-            </a:r>
-          </a:p>
-          <a:p>
-            <a:pPr algn="l">
-              <a:spcAft>
-                <a:spcPts val="585"/>
-              </a:spcAft>
-            </a:pPr>
-            <a:r>
-              <a:rPr sz="1300" b="0" i="0">
-                <a:solidFill>
-                  <a:srgbClr val="1C1B19"/>
-                </a:solidFill>
-                <a:latin typeface="Source Serif 4"/>
-              </a:rPr>
-              <a:t/>
-            </a:r>
-          </a:p>
-          <a:p>
-            <a:pPr algn="l">
-              <a:spcAft>
-                <a:spcPts val="585"/>
-              </a:spcAft>
-            </a:pPr>
-            <a:r>
-              <a:rPr sz="1500" b="1" i="0">
-                <a:solidFill>
-                  <a:srgbClr val="1C1B19"/>
-                </a:solidFill>
-                <a:latin typeface="Source Serif 4"/>
-              </a:rPr>
-              <a:t>Some fears are realistic.</a:t>
-            </a:r>
-          </a:p>
-          <a:p>
-            <a:pPr algn="l">
-              <a:spcAft>
-                <a:spcPts val="585"/>
-              </a:spcAft>
-            </a:pPr>
-            <a:r>
-              <a:rPr sz="1300" b="0" i="0">
-                <a:solidFill>
-                  <a:srgbClr val="1C1B19"/>
-                </a:solidFill>
-                <a:latin typeface="Source Serif 4"/>
-              </a:rPr>
-              <a:t>Students who face racism, worry about a family member's immigration status, or have been targeted for who they are may carry fears that match real risk. Don't label those false alarms. Keep the burnt-toast examples to everyday things like calls, tryouts and group chats.</a:t>
-            </a:r>
-          </a:p>
-          <a:p>
-            <a:pPr algn="l">
-              <a:spcAft>
-                <a:spcPts val="585"/>
-              </a:spcAft>
-            </a:pPr>
-            <a:r>
-              <a:rPr sz="1300" b="0" i="0">
-                <a:solidFill>
-                  <a:srgbClr val="1C1B19"/>
-                </a:solidFill>
-                <a:latin typeface="Source Serif 4"/>
-              </a:rPr>
-              <a:t/>
-            </a:r>
-          </a:p>
-          <a:p>
-            <a:pPr algn="l">
-              <a:spcAft>
-                <a:spcPts val="585"/>
-              </a:spcAft>
-            </a:pPr>
-            <a:r>
-              <a:rPr sz="1500" b="1" i="0">
-                <a:solidFill>
-                  <a:srgbClr val="1C1B19"/>
-                </a:solidFill>
-                <a:latin typeface="Source Serif 4"/>
-              </a:rPr>
-              <a:t>LGBTQ+ students and being seen.</a:t>
-            </a:r>
-          </a:p>
-          <a:p>
-            <a:pPr algn="l">
-              <a:spcAft>
-                <a:spcPts val="585"/>
-              </a:spcAft>
-            </a:pPr>
-            <a:r>
-              <a:rPr sz="1300" b="0" i="0">
-                <a:solidFill>
-                  <a:srgbClr val="1C1B19"/>
-                </a:solidFill>
-                <a:latin typeface="Source Serif 4"/>
-              </a:rPr>
-              <a:t>Social anxiety can be tied to whether a student is out, and to whom. Never use coming out as an exposure example. For any student who needs support beyond school hours, The Trevor Project (1-866-488-7386 or text START to 678-678) sits alongside 988.</a:t>
-            </a:r>
-          </a:p>
-          <a:p>
-            <a:pPr algn="l">
-              <a:spcAft>
-                <a:spcPts val="585"/>
-              </a:spcAft>
-            </a:pPr>
-            <a:r>
-              <a:rPr sz="1300" b="0" i="0">
-                <a:solidFill>
-                  <a:srgbClr val="1C1B19"/>
-                </a:solidFill>
-                <a:latin typeface="Source Serif 4"/>
-              </a:rPr>
-              <a:t/>
-            </a:r>
-          </a:p>
-        </p:txBody>
-      </p:sp>
-      <p:sp>
-        <p:nvSpPr>
-          <p:cNvPr id="7" name="TextBox 6"/>
-          <p:cNvSpPr txBox="1"/>
-          <p:nvPr/>
-        </p:nvSpPr>
-        <p:spPr>
-          <a:xfrm>
-            <a:off x="6217920" y="1828800"/>
-            <a:ext cx="5394960" cy="4572000"/>
-          </a:xfrm>
-          <a:prstGeom prst="rect">
-            <a:avLst/>
-          </a:prstGeom>
-          <a:noFill/>
-        </p:spPr>
-        <p:txBody>
-          <a:bodyPr wrap="square" anchor="t" lIns="0" rIns="0" tIns="0" bIns="0">
-            <a:spAutoFit/>
-          </a:bodyPr>
-          <a:lstStyle/>
-          <a:p>
-            <a:pPr algn="l">
-              <a:spcAft>
-                <a:spcPts val="585"/>
-              </a:spcAft>
-            </a:pPr>
-            <a:r>
-              <a:rPr sz="1500" b="1" i="0">
-                <a:solidFill>
-                  <a:srgbClr val="1C1B19"/>
-                </a:solidFill>
-                <a:latin typeface="Source Serif 4"/>
-              </a:rPr>
-              <a:t>Neurodivergent and disabled students.</a:t>
-            </a:r>
-          </a:p>
-          <a:p>
-            <a:pPr algn="l">
-              <a:spcAft>
-                <a:spcPts val="585"/>
-              </a:spcAft>
-            </a:pPr>
-            <a:r>
-              <a:rPr sz="1300" b="0" i="0">
-                <a:solidFill>
-                  <a:srgbClr val="1C1B19"/>
-                </a:solidFill>
-                <a:latin typeface="Source Serif 4"/>
-              </a:rPr>
-              <a:t>Autistic students and students with sensory or processing differences may avoid noise, crowds or eye contact for reasons that aren't anxiety. Don't treat eye contact, speaking up, or sitting still as signs of being okay. Accommodations aren't avoidance.</a:t>
-            </a:r>
-          </a:p>
-          <a:p>
-            <a:pPr algn="l">
-              <a:spcAft>
-                <a:spcPts val="585"/>
-              </a:spcAft>
-            </a:pPr>
-            <a:r>
-              <a:rPr sz="1300" b="0" i="0">
-                <a:solidFill>
-                  <a:srgbClr val="1C1B19"/>
-                </a:solidFill>
-                <a:latin typeface="Source Serif 4"/>
-              </a:rPr>
-              <a:t/>
-            </a:r>
-          </a:p>
-          <a:p>
-            <a:pPr algn="l">
-              <a:spcAft>
-                <a:spcPts val="585"/>
-              </a:spcAft>
-            </a:pPr>
-            <a:r>
-              <a:rPr sz="1500" b="1" i="0">
-                <a:solidFill>
-                  <a:srgbClr val="1C1B19"/>
-                </a:solidFill>
-                <a:latin typeface="Source Serif 4"/>
-              </a:rPr>
-              <a:t>"Coaching, not rescue" works with any adult.</a:t>
-            </a:r>
-          </a:p>
-          <a:p>
-            <a:pPr algn="l">
-              <a:spcAft>
-                <a:spcPts val="585"/>
-              </a:spcAft>
-            </a:pPr>
-            <a:r>
-              <a:rPr sz="1300" b="0" i="0">
-                <a:solidFill>
-                  <a:srgbClr val="1C1B19"/>
-                </a:solidFill>
-                <a:latin typeface="Source Serif 4"/>
-              </a:rPr>
-              <a:t>The parent research applies to whoever raises the student: one parent, two, a grandparent, foster or kinship caregivers, an older sibling. Say "the adults in your life." Some students have no adult at home to coach them; a counselor or coach can fill that role.</a:t>
-            </a:r>
-          </a:p>
-          <a:p>
-            <a:pPr algn="l">
-              <a:spcAft>
-                <a:spcPts val="585"/>
-              </a:spcAft>
-            </a:pPr>
-            <a:r>
-              <a:rPr sz="1300" b="0" i="0">
-                <a:solidFill>
-                  <a:srgbClr val="1C1B19"/>
-                </a:solidFill>
-                <a:latin typeface="Source Serif 4"/>
-              </a:rPr>
-              <a:t/>
-            </a:r>
-          </a:p>
-          <a:p>
-            <a:pPr algn="l">
-              <a:spcAft>
-                <a:spcPts val="585"/>
-              </a:spcAft>
-            </a:pPr>
-            <a:r>
-              <a:rPr sz="1500" b="1" i="0">
-                <a:solidFill>
-                  <a:srgbClr val="1C1B19"/>
-                </a:solidFill>
-                <a:latin typeface="Source Serif 4"/>
-              </a:rPr>
-              <a:t>Language, money and phone calls.</a:t>
-            </a:r>
-          </a:p>
-          <a:p>
-            <a:pPr algn="l">
-              <a:spcAft>
-                <a:spcPts val="585"/>
-              </a:spcAft>
-            </a:pPr>
-            <a:r>
-              <a:rPr sz="1300" b="0" i="0">
-                <a:solidFill>
-                  <a:srgbClr val="1C1B19"/>
-                </a:solidFill>
-                <a:latin typeface="Source Serif 4"/>
-              </a:rPr>
-              <a:t>Some students already make calls for their family, sometimes in a second language. That counts as hard work they've done. Help is free at school: a counselor and the nurse. Outside school, community clinics offer sliding-scale care and interpreters.</a:t>
-            </a:r>
-          </a:p>
-          <a:p>
-            <a:pPr algn="l">
-              <a:spcAft>
-                <a:spcPts val="585"/>
-              </a:spcAft>
-            </a:pPr>
-            <a:r>
-              <a:rPr sz="1300" b="0" i="0">
-                <a:solidFill>
-                  <a:srgbClr val="1C1B19"/>
-                </a:solidFill>
-                <a:latin typeface="Source Serif 4"/>
-              </a:rPr>
-              <a:t/>
-            </a:r>
-          </a:p>
-        </p:txBody>
-      </p:sp>
-    </p:spTree>
-  </p:cSld>
-  <p:clrMapOvr>
-    <a:masterClrMapping/>
-  </p:clrMapOvr>
-</p:sld>
-</file>
-
-<file path=ppt/slides/slide4.xml><?xml version="1.0" encoding="utf-8"?>
-<p:sld xmlns:a="http://schemas.openxmlformats.org/drawingml/2006/main" xmlns:p="http://schemas.openxmlformats.org/presentationml/2006/main" xmlns:r="http://schemas.openxmlformats.org/officeDocument/2006/relationships" show="0">
-  <p:cSld>
-    <p:bg>
-      <p:bgPr>
-        <a:solidFill>
-          <a:srgbClr val="EEEBE4"/>
-        </a:solidFill>
-        <a:effectLst/>
-      </p:bgPr>
-    </p:bg>
-    <p:spTree>
-      <p:nvGrpSpPr>
-        <p:cNvPr id="1" name=""/>
-        <p:cNvGrpSpPr/>
-        <p:nvPr/>
-      </p:nvGrpSpPr>
-      <p:grpSpPr/>
-      <p:sp>
-        <p:nvSpPr>
-          <p:cNvPr id="2" name="Rectangle 1"/>
+              <a:t>Quick relief</a:t>
+            </a:r>
+          </a:p>
+        </p:txBody>
+      </p:sp>
+      <p:cxnSp>
+        <p:nvCxnSpPr>
+          <p:cNvPr id="14" name="Connector 13"/>
+          <p:cNvCxnSpPr/>
+          <p:nvPr/>
+        </p:nvCxnSpPr>
+        <p:spPr>
+          <a:xfrm>
+            <a:off x="7072883" y="3246120"/>
+            <a:ext cx="176023" cy="0"/>
+          </a:xfrm>
+          <a:prstGeom prst="line">
+            <a:avLst/>
+          </a:prstGeom>
+          <a:ln w="31750">
+            <a:solidFill>
+              <a:srgbClr val="F47B20"/>
+            </a:solidFill>
+            <a:tailEnd type="triangle"/>
+          </a:ln>
+        </p:spPr>
+        <p:style>
+          <a:lnRef idx="2">
+            <a:schemeClr val="accent1"/>
+          </a:lnRef>
+          <a:fillRef idx="0">
+            <a:schemeClr val="accent1"/>
+          </a:fillRef>
+          <a:effectRef idx="1">
+            <a:schemeClr val="accent1"/>
+          </a:effectRef>
+          <a:fontRef idx="minor">
+            <a:schemeClr val="tx1"/>
+          </a:fontRef>
+        </p:style>
+      </p:cxnSp>
+      <p:sp>
+        <p:nvSpPr>
+          <p:cNvPr id="15" name="Rectangle 14"/>
           <p:cNvSpPr/>
           <p:nvPr/>
         </p:nvSpPr>
         <p:spPr>
           <a:xfrm>
-            <a:off x="0" y="0"/>
-            <a:ext cx="12191695" cy="384048"/>
+            <a:off x="7303770" y="2743200"/>
+            <a:ext cx="1874519" cy="1005840"/>
           </a:xfrm>
           <a:prstGeom prst="rect">
             <a:avLst/>
           </a:prstGeom>
           <a:solidFill>
-            <a:srgbClr val="0B2D5B"/>
+            <a:srgbClr val="FFFFFF"/>
           </a:solidFill>
-          <a:ln>
-            <a:noFill/>
+          <a:ln w="15875">
+            <a:solidFill>
+              <a:srgbClr val="0B2D5B"/>
+            </a:solidFill>
           </a:ln>
           <a:effectLst/>
         </p:spPr>
@@ -7533,14 +8961,14 @@
       </p:sp>
       <p:sp>
         <p:nvSpPr>
-          <p:cNvPr id="3" name="TextBox 2"/>
+          <p:cNvPr id="16" name="TextBox 15"/>
           <p:cNvSpPr txBox="1"/>
           <p:nvPr/>
         </p:nvSpPr>
         <p:spPr>
           <a:xfrm>
-            <a:off x="548640" y="100584"/>
-            <a:ext cx="10972800" cy="274320"/>
+            <a:off x="7303770" y="2743200"/>
+            <a:ext cx="1874519" cy="1005840"/>
           </a:xfrm>
           <a:prstGeom prst="rect">
             <a:avLst/>
@@ -7548,350 +8976,85 @@
           <a:noFill/>
         </p:spPr>
         <p:txBody>
-          <a:bodyPr wrap="square" anchor="t" lIns="0" rIns="0" tIns="0" bIns="0">
+          <a:bodyPr wrap="square" anchor="ctr" lIns="0" rIns="0" tIns="0" bIns="0">
             <a:spAutoFit/>
           </a:bodyPr>
           <a:lstStyle/>
           <a:p>
-            <a:pPr algn="l">
-              <a:spcAft>
-                <a:spcPts val="495"/>
-              </a:spcAft>
-            </a:pPr>
-            <a:r>
-              <a:rPr sz="1100" b="1" i="0">
-                <a:solidFill>
-                  <a:srgbClr val="FFFFFF"/>
-                </a:solidFill>
-                <a:latin typeface="Inter Tight"/>
-              </a:rPr>
-              <a:t>TEACHER PAGE  ·  skipped when you present  ·  Background</a:t>
-            </a:r>
-          </a:p>
-        </p:txBody>
-      </p:sp>
-      <p:sp>
-        <p:nvSpPr>
-          <p:cNvPr id="4" name="TextBox 3"/>
-          <p:cNvSpPr txBox="1"/>
-          <p:nvPr/>
-        </p:nvSpPr>
-        <p:spPr>
-          <a:xfrm>
-            <a:off x="548640" y="685800"/>
-            <a:ext cx="10972800" cy="640080"/>
-          </a:xfrm>
-          <a:prstGeom prst="rect">
-            <a:avLst/>
-          </a:prstGeom>
-          <a:noFill/>
-        </p:spPr>
-        <p:txBody>
-          <a:bodyPr wrap="square" anchor="t" lIns="0" rIns="0" tIns="0" bIns="0">
-            <a:spAutoFit/>
-          </a:bodyPr>
-          <a:lstStyle/>
-          <a:p>
-            <a:pPr algn="l">
-              <a:spcAft>
-                <a:spcPts val="1350"/>
-              </a:spcAft>
-            </a:pPr>
-            <a:r>
-              <a:rPr sz="3000" b="1" i="0">
+            <a:pPr algn="ctr">
+              <a:spcAft>
+                <a:spcPts val="900"/>
+              </a:spcAft>
+            </a:pPr>
+            <a:r>
+              <a:rPr sz="2000" b="1" i="0">
                 <a:solidFill>
                   <a:srgbClr val="1C1B19"/>
                 </a:solidFill>
                 <a:latin typeface="Source Serif 4"/>
               </a:rPr>
-              <a:t>What the research says</a:t>
-            </a:r>
-          </a:p>
-        </p:txBody>
-      </p:sp>
-      <p:sp>
-        <p:nvSpPr>
-          <p:cNvPr id="5" name="TextBox 4"/>
-          <p:cNvSpPr txBox="1"/>
-          <p:nvPr/>
-        </p:nvSpPr>
-        <p:spPr>
-          <a:xfrm>
-            <a:off x="548640" y="1463040"/>
-            <a:ext cx="5394960" cy="4937760"/>
-          </a:xfrm>
-          <a:prstGeom prst="rect">
-            <a:avLst/>
-          </a:prstGeom>
-          <a:noFill/>
-        </p:spPr>
-        <p:txBody>
-          <a:bodyPr wrap="square" anchor="t" lIns="0" rIns="0" tIns="0" bIns="0">
-            <a:spAutoFit/>
-          </a:bodyPr>
-          <a:lstStyle/>
-          <a:p>
-            <a:pPr algn="l">
-              <a:spcAft>
-                <a:spcPts val="585"/>
-              </a:spcAft>
-            </a:pPr>
-            <a:r>
-              <a:rPr sz="1300" b="0" i="0">
-                <a:solidFill>
-                  <a:srgbClr val="1C1B19"/>
-                </a:solidFill>
-                <a:latin typeface="Source Serif 4"/>
-              </a:rPr>
-              <a:t>In a national survey of more than 10,000 U.S. teens, about 1 in 3 met criteria for an anxiety disorder at some point by age 18.</a:t>
-            </a:r>
-          </a:p>
-          <a:p>
-            <a:pPr algn="l">
-              <a:spcAft>
-                <a:spcPts val="585"/>
-              </a:spcAft>
-            </a:pPr>
-            <a:r>
-              <a:rPr sz="1050" b="0" i="0">
-                <a:solidFill>
-                  <a:srgbClr val="5D5A54"/>
-                </a:solidFill>
-                <a:latin typeface="Inter Tight"/>
-              </a:rPr>
-              <a:t>Merikangas et al., Journal of the American Academy of Child &amp; Adolescent Psychiatry, 2010</a:t>
-            </a:r>
-          </a:p>
-          <a:p>
-            <a:pPr algn="l">
-              <a:spcAft>
-                <a:spcPts val="585"/>
-              </a:spcAft>
-            </a:pPr>
-            <a:r>
-              <a:rPr sz="1300" b="0" i="0">
-                <a:solidFill>
-                  <a:srgbClr val="1C1B19"/>
-                </a:solidFill>
-                <a:latin typeface="Source Serif 4"/>
-              </a:rPr>
-              <a:t>Exposure works mainly through expectation violation: you predict something bad, it doesn't happen, and the brain stores a new memory that competes with the fear. Feeling calm isn't required.</a:t>
-            </a:r>
-          </a:p>
-          <a:p>
-            <a:pPr algn="l">
-              <a:spcAft>
-                <a:spcPts val="585"/>
-              </a:spcAft>
-            </a:pPr>
-            <a:r>
-              <a:rPr sz="1050" b="0" i="0">
-                <a:solidFill>
-                  <a:srgbClr val="5D5A54"/>
-                </a:solidFill>
-                <a:latin typeface="Inter Tight"/>
-              </a:rPr>
-              <a:t>Craske et al., Behaviour Research and Therapy, 2014 (UCLA)</a:t>
-            </a:r>
-          </a:p>
-          <a:p>
-            <a:pPr algn="l">
-              <a:spcAft>
-                <a:spcPts val="585"/>
-              </a:spcAft>
-            </a:pPr>
-            <a:r>
-              <a:rPr sz="1300" b="0" i="0">
-                <a:solidFill>
-                  <a:srgbClr val="1C1B19"/>
-                </a:solidFill>
-                <a:latin typeface="Source Serif 4"/>
-              </a:rPr>
-              <a:t>In a trial with kids ages 7 to 14, coaching parents to stop accommodating anxiety, while staying warm and supportive, worked as well as therapy with the child directly.</a:t>
-            </a:r>
-          </a:p>
-          <a:p>
-            <a:pPr algn="l">
-              <a:spcAft>
-                <a:spcPts val="585"/>
-              </a:spcAft>
-            </a:pPr>
-            <a:r>
-              <a:rPr sz="1050" b="0" i="0">
-                <a:solidFill>
-                  <a:srgbClr val="5D5A54"/>
-                </a:solidFill>
-                <a:latin typeface="Inter Tight"/>
-              </a:rPr>
-              <a:t>Lebowitz et al., 2020</a:t>
-            </a:r>
-          </a:p>
-        </p:txBody>
-      </p:sp>
-      <p:sp>
-        <p:nvSpPr>
-          <p:cNvPr id="6" name="TextBox 5"/>
-          <p:cNvSpPr txBox="1"/>
-          <p:nvPr/>
-        </p:nvSpPr>
-        <p:spPr>
-          <a:xfrm>
-            <a:off x="6217920" y="1463040"/>
-            <a:ext cx="5394960" cy="4937760"/>
-          </a:xfrm>
-          <a:prstGeom prst="rect">
-            <a:avLst/>
-          </a:prstGeom>
-          <a:noFill/>
-        </p:spPr>
-        <p:txBody>
-          <a:bodyPr wrap="square" anchor="t" lIns="0" rIns="0" tIns="0" bIns="0">
-            <a:spAutoFit/>
-          </a:bodyPr>
-          <a:lstStyle/>
-          <a:p>
-            <a:pPr algn="l">
-              <a:spcAft>
-                <a:spcPts val="585"/>
-              </a:spcAft>
-            </a:pPr>
-            <a:r>
-              <a:rPr sz="1300" b="0" i="0">
-                <a:solidFill>
-                  <a:srgbClr val="1C1B19"/>
-                </a:solidFill>
-                <a:latin typeface="Source Serif 4"/>
-              </a:rPr>
-              <a:t>In a major U.S. trial with ages 7 to 17, about 60% improved with 12 weeks of CBT, 55% with sertraline, and 81% with both, compared with 24% on placebo.</a:t>
-            </a:r>
-          </a:p>
-          <a:p>
-            <a:pPr algn="l">
-              <a:spcAft>
-                <a:spcPts val="585"/>
-              </a:spcAft>
-            </a:pPr>
-            <a:r>
-              <a:rPr sz="1050" b="0" i="0">
-                <a:solidFill>
-                  <a:srgbClr val="5D5A54"/>
-                </a:solidFill>
-                <a:latin typeface="Inter Tight"/>
-              </a:rPr>
-              <a:t>Walkup et al., New England Journal of Medicine, 2008</a:t>
-            </a:r>
-          </a:p>
-          <a:p>
-            <a:pPr algn="l">
-              <a:spcAft>
-                <a:spcPts val="585"/>
-              </a:spcAft>
-            </a:pPr>
-            <a:r>
-              <a:rPr sz="1300" b="0" i="0">
-                <a:solidFill>
-                  <a:srgbClr val="1C1B19"/>
-                </a:solidFill>
-                <a:latin typeface="Source Serif 4"/>
-              </a:rPr>
-              <a:t>People who said "I am excited" before karaoke, public speaking, or a math test did better than people who tried to calm down.</a:t>
-            </a:r>
-          </a:p>
-          <a:p>
-            <a:pPr algn="l">
-              <a:spcAft>
-                <a:spcPts val="585"/>
-              </a:spcAft>
-            </a:pPr>
-            <a:r>
-              <a:rPr sz="1050" b="0" i="0">
-                <a:solidFill>
-                  <a:srgbClr val="5D5A54"/>
-                </a:solidFill>
-                <a:latin typeface="Inter Tight"/>
-              </a:rPr>
-              <a:t>Brooks, Journal of Experimental Psychology: General, 2014</a:t>
-            </a:r>
-          </a:p>
-          <a:p>
-            <a:pPr algn="l">
-              <a:spcAft>
-                <a:spcPts val="585"/>
-              </a:spcAft>
-            </a:pPr>
-            <a:r>
-              <a:rPr sz="1300" b="0" i="0">
-                <a:solidFill>
-                  <a:srgbClr val="1C1B19"/>
-                </a:solidFill>
-                <a:latin typeface="Source Serif 4"/>
-              </a:rPr>
-              <a:t>A panic attack is a surge of intense fear that peaks within minutes: pounding heart, short breath, dizziness, shaking, a sense of doom. Anyone who has never had symptoms like chest pain checked should see a doctor once.</a:t>
-            </a:r>
-          </a:p>
-          <a:p>
-            <a:pPr algn="l">
-              <a:spcAft>
-                <a:spcPts val="585"/>
-              </a:spcAft>
-            </a:pPr>
-            <a:r>
-              <a:rPr sz="1050" b="0" i="0">
-                <a:solidFill>
-                  <a:srgbClr val="5D5A54"/>
-                </a:solidFill>
-                <a:latin typeface="Inter Tight"/>
-              </a:rPr>
-              <a:t>Clinical description from the student lesson (no single study)</a:t>
-            </a:r>
-          </a:p>
-        </p:txBody>
-      </p:sp>
-    </p:spTree>
-  </p:cSld>
-  <p:clrMapOvr>
-    <a:masterClrMapping/>
-  </p:clrMapOvr>
-</p:sld>
-</file>
-
-<file path=ppt/slides/slide5.xml><?xml version="1.0" encoding="utf-8"?>
-<p:sld xmlns:a="http://schemas.openxmlformats.org/drawingml/2006/main" xmlns:p="http://schemas.openxmlformats.org/presentationml/2006/main" xmlns:r="http://schemas.openxmlformats.org/officeDocument/2006/relationships">
-  <p:cSld>
-    <p:bg>
-      <p:bgPr>
-        <a:solidFill>
-          <a:srgbClr val="0B2D5B"/>
-        </a:solidFill>
-        <a:effectLst/>
-      </p:bgPr>
-    </p:bg>
-    <p:spTree>
-      <p:nvGrpSpPr>
-        <p:cNvPr id="1" name=""/>
-        <p:cNvGrpSpPr/>
-        <p:nvPr/>
-      </p:nvGrpSpPr>
-      <p:grpSpPr/>
-      <p:sp>
-        <p:nvSpPr>
-          <p:cNvPr id="2" name="Rectangle 1"/>
+              <a:t>"That was dangerous"</a:t>
+            </a:r>
+          </a:p>
+        </p:txBody>
+      </p:sp>
+      <p:cxnSp>
+        <p:nvCxnSpPr>
+          <p:cNvPr id="17" name="Connector 16"/>
+          <p:cNvCxnSpPr/>
+          <p:nvPr/>
+        </p:nvCxnSpPr>
+        <p:spPr>
+          <a:xfrm>
+            <a:off x="9233154" y="3246120"/>
+            <a:ext cx="176022" cy="0"/>
+          </a:xfrm>
+          <a:prstGeom prst="line">
+            <a:avLst/>
+          </a:prstGeom>
+          <a:ln w="31750">
+            <a:solidFill>
+              <a:srgbClr val="F47B20"/>
+            </a:solidFill>
+            <a:tailEnd type="triangle"/>
+          </a:ln>
+        </p:spPr>
+        <p:style>
+          <a:lnRef idx="2">
+            <a:schemeClr val="accent1"/>
+          </a:lnRef>
+          <a:fillRef idx="0">
+            <a:schemeClr val="accent1"/>
+          </a:fillRef>
+          <a:effectRef idx="1">
+            <a:schemeClr val="accent1"/>
+          </a:effectRef>
+          <a:fontRef idx="minor">
+            <a:schemeClr val="tx1"/>
+          </a:fontRef>
+        </p:style>
+      </p:cxnSp>
+      <p:sp>
+        <p:nvSpPr>
+          <p:cNvPr id="18" name="Rectangle 17"/>
           <p:cNvSpPr/>
           <p:nvPr/>
         </p:nvSpPr>
         <p:spPr>
           <a:xfrm>
-            <a:off x="548640" y="502920"/>
-            <a:ext cx="457200" cy="54864"/>
+            <a:off x="9464040" y="2743200"/>
+            <a:ext cx="1874519" cy="1005840"/>
           </a:xfrm>
           <a:prstGeom prst="rect">
             <a:avLst/>
           </a:prstGeom>
           <a:solidFill>
-            <a:srgbClr val="F47B20"/>
+            <a:srgbClr val="FFFFFF"/>
           </a:solidFill>
-          <a:ln>
-            <a:noFill/>
+          <a:ln w="15875">
+            <a:solidFill>
+              <a:srgbClr val="0B2D5B"/>
+            </a:solidFill>
           </a:ln>
           <a:effectLst/>
         </p:spPr>
@@ -7919,14 +9082,53 @@
       </p:sp>
       <p:sp>
         <p:nvSpPr>
-          <p:cNvPr id="3" name="TextBox 2"/>
+          <p:cNvPr id="19" name="TextBox 18"/>
           <p:cNvSpPr txBox="1"/>
           <p:nvPr/>
         </p:nvSpPr>
         <p:spPr>
           <a:xfrm>
-            <a:off x="1143000" y="393192"/>
-            <a:ext cx="8229600" cy="274320"/>
+            <a:off x="9464040" y="2743200"/>
+            <a:ext cx="1874519" cy="1005840"/>
+          </a:xfrm>
+          <a:prstGeom prst="rect">
+            <a:avLst/>
+          </a:prstGeom>
+          <a:noFill/>
+        </p:spPr>
+        <p:txBody>
+          <a:bodyPr wrap="square" anchor="ctr" lIns="0" rIns="0" tIns="0" bIns="0">
+            <a:spAutoFit/>
+          </a:bodyPr>
+          <a:lstStyle/>
+          <a:p>
+            <a:pPr algn="ctr">
+              <a:spcAft>
+                <a:spcPts val="900"/>
+              </a:spcAft>
+            </a:pPr>
+            <a:r>
+              <a:rPr sz="2000" b="1" i="0">
+                <a:solidFill>
+                  <a:srgbClr val="1C1B19"/>
+                </a:solidFill>
+                <a:latin typeface="Source Serif 4"/>
+              </a:rPr>
+              <a:t>Louder next time</a:t>
+            </a:r>
+          </a:p>
+        </p:txBody>
+      </p:sp>
+      <p:sp>
+        <p:nvSpPr>
+          <p:cNvPr id="20" name="TextBox 19"/>
+          <p:cNvSpPr txBox="1"/>
+          <p:nvPr/>
+        </p:nvSpPr>
+        <p:spPr>
+          <a:xfrm>
+            <a:off x="822960" y="4160520"/>
+            <a:ext cx="10515600" cy="457200"/>
           </a:xfrm>
           <a:prstGeom prst="rect">
             <a:avLst/>
@@ -7939,33 +9141,33 @@
           </a:bodyPr>
           <a:lstStyle/>
           <a:p>
-            <a:pPr algn="l">
-              <a:spcAft>
-                <a:spcPts val="540"/>
-              </a:spcAft>
-            </a:pPr>
-            <a:r>
-              <a:rPr sz="1200" b="1" i="0">
-                <a:solidFill>
-                  <a:srgbClr val="5D5A54"/>
+            <a:pPr algn="ctr">
+              <a:spcAft>
+                <a:spcPts val="810"/>
+              </a:spcAft>
+            </a:pPr>
+            <a:r>
+              <a:rPr sz="1800" b="1" i="0">
+                <a:solidFill>
+                  <a:srgbClr val="F47B20"/>
                 </a:solidFill>
                 <a:latin typeface="Inter Tight"/>
               </a:rPr>
-              <a:t>THE FALSE ALARM</a:t>
-            </a:r>
-          </a:p>
-        </p:txBody>
-      </p:sp>
-      <p:sp>
-        <p:nvSpPr>
-          <p:cNvPr id="4" name="TextBox 3"/>
+              <a:t>↺  and around again</a:t>
+            </a:r>
+          </a:p>
+        </p:txBody>
+      </p:sp>
+      <p:sp>
+        <p:nvSpPr>
+          <p:cNvPr id="21" name="TextBox 20"/>
           <p:cNvSpPr txBox="1"/>
           <p:nvPr/>
         </p:nvSpPr>
         <p:spPr>
           <a:xfrm>
-            <a:off x="8229600" y="6400800"/>
-            <a:ext cx="3410712" cy="274320"/>
+            <a:off x="822960" y="4846320"/>
+            <a:ext cx="10515600" cy="1188720"/>
           </a:xfrm>
           <a:prstGeom prst="rect">
             <a:avLst/>
@@ -7978,136 +9180,19 @@
           </a:bodyPr>
           <a:lstStyle/>
           <a:p>
-            <a:pPr algn="r">
-              <a:spcAft>
-                <a:spcPts val="450"/>
-              </a:spcAft>
-            </a:pPr>
-            <a:r>
-              <a:rPr sz="1000" b="0" i="0">
+            <a:pPr algn="ctr">
+              <a:spcAft>
+                <a:spcPts val="900"/>
+              </a:spcAft>
+            </a:pPr>
+            <a:r>
+              <a:rPr sz="2000" b="0" i="1">
                 <a:solidFill>
                   <a:srgbClr val="5D5A54"/>
                 </a:solidFill>
-                <a:latin typeface="Inter Tight"/>
-              </a:rPr>
-              <a:t>Beaver Counseling</a:t>
-            </a:r>
-          </a:p>
-        </p:txBody>
-      </p:sp>
-      <p:sp>
-        <p:nvSpPr>
-          <p:cNvPr id="5" name="TextBox 4"/>
-          <p:cNvSpPr txBox="1"/>
-          <p:nvPr/>
-        </p:nvSpPr>
-        <p:spPr>
-          <a:xfrm>
-            <a:off x="822960" y="2011680"/>
-            <a:ext cx="10515600" cy="1463040"/>
-          </a:xfrm>
-          <a:prstGeom prst="rect">
-            <a:avLst/>
-          </a:prstGeom>
-          <a:noFill/>
-        </p:spPr>
-        <p:txBody>
-          <a:bodyPr wrap="square" anchor="b" lIns="0" rIns="0" tIns="0" bIns="0">
-            <a:spAutoFit/>
-          </a:bodyPr>
-          <a:lstStyle/>
-          <a:p>
-            <a:pPr algn="l">
-              <a:spcAft>
-                <a:spcPts val="2700"/>
-              </a:spcAft>
-            </a:pPr>
-            <a:r>
-              <a:rPr sz="6000" b="1" i="0">
-                <a:solidFill>
-                  <a:srgbClr val="FFFFFF"/>
-                </a:solidFill>
-                <a:latin typeface="Source Serif 4"/>
-              </a:rPr>
-              <a:t>The False Alarm</a:t>
-            </a:r>
-          </a:p>
-        </p:txBody>
-      </p:sp>
-      <p:sp>
-        <p:nvSpPr>
-          <p:cNvPr id="6" name="TextBox 5"/>
-          <p:cNvSpPr txBox="1"/>
-          <p:nvPr/>
-        </p:nvSpPr>
-        <p:spPr>
-          <a:xfrm>
-            <a:off x="822960" y="3611880"/>
-            <a:ext cx="10515600" cy="914400"/>
-          </a:xfrm>
-          <a:prstGeom prst="rect">
-            <a:avLst/>
-          </a:prstGeom>
-          <a:noFill/>
-        </p:spPr>
-        <p:txBody>
-          <a:bodyPr wrap="square" anchor="t" lIns="0" rIns="0" tIns="0" bIns="0">
-            <a:spAutoFit/>
-          </a:bodyPr>
-          <a:lstStyle/>
-          <a:p>
-            <a:pPr algn="l">
-              <a:spcAft>
-                <a:spcPts val="1080"/>
-              </a:spcAft>
-            </a:pPr>
-            <a:r>
-              <a:rPr sz="2400" b="0" i="1">
-                <a:solidFill>
-                  <a:srgbClr val="E8E4DA"/>
-                </a:solidFill>
-                <a:latin typeface="Source Serif 4"/>
-              </a:rPr>
-              <a:t>Burnt toast, full fire alarm.</a:t>
-            </a:r>
-          </a:p>
-        </p:txBody>
-      </p:sp>
-      <p:sp>
-        <p:nvSpPr>
-          <p:cNvPr id="7" name="TextBox 6"/>
-          <p:cNvSpPr txBox="1"/>
-          <p:nvPr/>
-        </p:nvSpPr>
-        <p:spPr>
-          <a:xfrm>
-            <a:off x="822960" y="6035040"/>
-            <a:ext cx="7315200" cy="365760"/>
-          </a:xfrm>
-          <a:prstGeom prst="rect">
-            <a:avLst/>
-          </a:prstGeom>
-          <a:noFill/>
-        </p:spPr>
-        <p:txBody>
-          <a:bodyPr wrap="square" anchor="t" lIns="0" rIns="0" tIns="0" bIns="0">
-            <a:spAutoFit/>
-          </a:bodyPr>
-          <a:lstStyle/>
-          <a:p>
-            <a:pPr algn="l">
-              <a:spcAft>
-                <a:spcPts val="585"/>
-              </a:spcAft>
-            </a:pPr>
-            <a:r>
-              <a:rPr sz="1300" b="0" i="0">
-                <a:solidFill>
-                  <a:srgbClr val="E8E4DA"/>
-                </a:solidFill>
-                <a:latin typeface="Inter Tight"/>
-              </a:rPr>
-              <a:t>Beaver Upper School · Counseling</a:t>
+                <a:latin typeface="Source Serif 4"/>
+              </a:rPr>
+              <a:t>Leaving feels great for a minute. Your brain files it as proof.</a:t>
             </a:r>
           </a:p>
         </p:txBody>
@@ -8216,7 +9301,7 @@
                 </a:solidFill>
                 <a:latin typeface="Inter Tight"/>
               </a:rPr>
-              <a:t>MYTH OR FACT?</a:t>
+              <a:t>PANIC</a:t>
             </a:r>
           </a:p>
         </p:txBody>
@@ -8268,7 +9353,46 @@
         </p:nvSpPr>
         <p:spPr>
           <a:xfrm>
-            <a:off x="822960" y="1005840"/>
+            <a:off x="822960" y="1463040"/>
+            <a:ext cx="10515600" cy="3291840"/>
+          </a:xfrm>
+          <a:prstGeom prst="rect">
+            <a:avLst/>
+          </a:prstGeom>
+          <a:noFill/>
+        </p:spPr>
+        <p:txBody>
+          <a:bodyPr wrap="square" anchor="ctr" lIns="0" rIns="0" tIns="0" bIns="0">
+            <a:spAutoFit/>
+          </a:bodyPr>
+          <a:lstStyle/>
+          <a:p>
+            <a:pPr algn="l">
+              <a:spcAft>
+                <a:spcPts val="2070"/>
+              </a:spcAft>
+            </a:pPr>
+            <a:r>
+              <a:rPr sz="4600" b="1" i="0">
+                <a:solidFill>
+                  <a:srgbClr val="1C1B19"/>
+                </a:solidFill>
+                <a:latin typeface="Source Serif 4"/>
+              </a:rPr>
+              <a:t>A panic attack is the alarm with no fire.</a:t>
+            </a:r>
+          </a:p>
+        </p:txBody>
+      </p:sp>
+      <p:sp>
+        <p:nvSpPr>
+          <p:cNvPr id="6" name="TextBox 5"/>
+          <p:cNvSpPr txBox="1"/>
+          <p:nvPr/>
+        </p:nvSpPr>
+        <p:spPr>
+          <a:xfrm>
+            <a:off x="822960" y="4846320"/>
             <a:ext cx="10515600" cy="1097280"/>
           </a:xfrm>
           <a:prstGeom prst="rect">
@@ -8284,407 +9408,17 @@
           <a:p>
             <a:pPr algn="l">
               <a:spcAft>
-                <a:spcPts val="1620"/>
-              </a:spcAft>
-            </a:pPr>
-            <a:r>
-              <a:rPr sz="3600" b="1" i="0">
-                <a:solidFill>
-                  <a:srgbClr val="1C1B19"/>
-                </a:solidFill>
-                <a:latin typeface="Source Serif 4"/>
-              </a:rPr>
-              <a:t>Stand up if you think it's a fact.</a:t>
-            </a:r>
-          </a:p>
-        </p:txBody>
-      </p:sp>
-      <p:sp>
-        <p:nvSpPr>
-          <p:cNvPr id="6" name="TextBox 5"/>
-          <p:cNvSpPr txBox="1"/>
-          <p:nvPr/>
-        </p:nvSpPr>
-        <p:spPr>
-          <a:xfrm>
-            <a:off x="822960" y="2057400"/>
-            <a:ext cx="548640" cy="804672"/>
-          </a:xfrm>
-          <a:prstGeom prst="rect">
-            <a:avLst/>
-          </a:prstGeom>
-          <a:noFill/>
-        </p:spPr>
-        <p:txBody>
-          <a:bodyPr wrap="square" anchor="t" lIns="0" rIns="0" tIns="0" bIns="0">
-            <a:spAutoFit/>
-          </a:bodyPr>
-          <a:lstStyle/>
-          <a:p>
-            <a:pPr algn="l">
-              <a:spcAft>
-                <a:spcPts val="1170"/>
-              </a:spcAft>
-            </a:pPr>
-            <a:r>
-              <a:rPr sz="2600" b="1" i="0">
-                <a:solidFill>
-                  <a:srgbClr val="F47B20"/>
-                </a:solidFill>
-                <a:latin typeface="Source Serif 4"/>
-              </a:rPr>
-              <a:t>1</a:t>
-            </a:r>
-          </a:p>
-        </p:txBody>
-      </p:sp>
-      <p:sp>
-        <p:nvSpPr>
-          <p:cNvPr id="7" name="TextBox 6"/>
-          <p:cNvSpPr txBox="1"/>
-          <p:nvPr/>
-        </p:nvSpPr>
-        <p:spPr>
-          <a:xfrm>
-            <a:off x="1463040" y="2093976"/>
-            <a:ext cx="9875520" cy="804672"/>
-          </a:xfrm>
-          <a:prstGeom prst="rect">
-            <a:avLst/>
-          </a:prstGeom>
-          <a:noFill/>
-        </p:spPr>
-        <p:txBody>
-          <a:bodyPr wrap="square" anchor="t" lIns="0" rIns="0" tIns="0" bIns="0">
-            <a:spAutoFit/>
-          </a:bodyPr>
-          <a:lstStyle/>
-          <a:p>
-            <a:pPr algn="l">
-              <a:spcAft>
-                <a:spcPts val="945"/>
-              </a:spcAft>
-            </a:pPr>
-            <a:r>
-              <a:rPr sz="2100" b="1" i="0">
-                <a:solidFill>
-                  <a:srgbClr val="1C1B19"/>
-                </a:solidFill>
-                <a:latin typeface="Source Serif 4"/>
-              </a:rPr>
-              <a:t>Avoiding what makes you anxious is self-care.</a:t>
-            </a:r>
-          </a:p>
-        </p:txBody>
-      </p:sp>
-      <p:sp>
-        <p:nvSpPr>
-          <p:cNvPr id="8" name="TextBox 7"/>
-          <p:cNvSpPr txBox="1"/>
-          <p:nvPr/>
-        </p:nvSpPr>
-        <p:spPr>
-          <a:xfrm>
-            <a:off x="822960" y="2862072"/>
-            <a:ext cx="548640" cy="804672"/>
-          </a:xfrm>
-          <a:prstGeom prst="rect">
-            <a:avLst/>
-          </a:prstGeom>
-          <a:noFill/>
-        </p:spPr>
-        <p:txBody>
-          <a:bodyPr wrap="square" anchor="t" lIns="0" rIns="0" tIns="0" bIns="0">
-            <a:spAutoFit/>
-          </a:bodyPr>
-          <a:lstStyle/>
-          <a:p>
-            <a:pPr algn="l">
-              <a:spcAft>
-                <a:spcPts val="1170"/>
-              </a:spcAft>
-            </a:pPr>
-            <a:r>
-              <a:rPr sz="2600" b="1" i="0">
-                <a:solidFill>
-                  <a:srgbClr val="F47B20"/>
-                </a:solidFill>
-                <a:latin typeface="Source Serif 4"/>
-              </a:rPr>
-              <a:t>2</a:t>
-            </a:r>
-          </a:p>
-        </p:txBody>
-      </p:sp>
-      <p:sp>
-        <p:nvSpPr>
-          <p:cNvPr id="9" name="TextBox 8"/>
-          <p:cNvSpPr txBox="1"/>
-          <p:nvPr/>
-        </p:nvSpPr>
-        <p:spPr>
-          <a:xfrm>
-            <a:off x="1463040" y="2898648"/>
-            <a:ext cx="9875520" cy="804672"/>
-          </a:xfrm>
-          <a:prstGeom prst="rect">
-            <a:avLst/>
-          </a:prstGeom>
-          <a:noFill/>
-        </p:spPr>
-        <p:txBody>
-          <a:bodyPr wrap="square" anchor="t" lIns="0" rIns="0" tIns="0" bIns="0">
-            <a:spAutoFit/>
-          </a:bodyPr>
-          <a:lstStyle/>
-          <a:p>
-            <a:pPr algn="l">
-              <a:spcAft>
-                <a:spcPts val="945"/>
-              </a:spcAft>
-            </a:pPr>
-            <a:r>
-              <a:rPr sz="2100" b="1" i="0">
-                <a:solidFill>
-                  <a:srgbClr val="1C1B19"/>
-                </a:solidFill>
-                <a:latin typeface="Source Serif 4"/>
-              </a:rPr>
-              <a:t>You have to feel calm before you can do a hard thing.</a:t>
-            </a:r>
-          </a:p>
-        </p:txBody>
-      </p:sp>
-      <p:sp>
-        <p:nvSpPr>
-          <p:cNvPr id="10" name="TextBox 9"/>
-          <p:cNvSpPr txBox="1"/>
-          <p:nvPr/>
-        </p:nvSpPr>
-        <p:spPr>
-          <a:xfrm>
-            <a:off x="822960" y="3666744"/>
-            <a:ext cx="548640" cy="804672"/>
-          </a:xfrm>
-          <a:prstGeom prst="rect">
-            <a:avLst/>
-          </a:prstGeom>
-          <a:noFill/>
-        </p:spPr>
-        <p:txBody>
-          <a:bodyPr wrap="square" anchor="t" lIns="0" rIns="0" tIns="0" bIns="0">
-            <a:spAutoFit/>
-          </a:bodyPr>
-          <a:lstStyle/>
-          <a:p>
-            <a:pPr algn="l">
-              <a:spcAft>
-                <a:spcPts val="1170"/>
-              </a:spcAft>
-            </a:pPr>
-            <a:r>
-              <a:rPr sz="2600" b="1" i="0">
-                <a:solidFill>
-                  <a:srgbClr val="F47B20"/>
-                </a:solidFill>
-                <a:latin typeface="Source Serif 4"/>
-              </a:rPr>
-              <a:t>3</a:t>
-            </a:r>
-          </a:p>
-        </p:txBody>
-      </p:sp>
-      <p:sp>
-        <p:nvSpPr>
-          <p:cNvPr id="11" name="TextBox 10"/>
-          <p:cNvSpPr txBox="1"/>
-          <p:nvPr/>
-        </p:nvSpPr>
-        <p:spPr>
-          <a:xfrm>
-            <a:off x="1463040" y="3703320"/>
-            <a:ext cx="9875520" cy="804672"/>
-          </a:xfrm>
-          <a:prstGeom prst="rect">
-            <a:avLst/>
-          </a:prstGeom>
-          <a:noFill/>
-        </p:spPr>
-        <p:txBody>
-          <a:bodyPr wrap="square" anchor="t" lIns="0" rIns="0" tIns="0" bIns="0">
-            <a:spAutoFit/>
-          </a:bodyPr>
-          <a:lstStyle/>
-          <a:p>
-            <a:pPr algn="l">
-              <a:spcAft>
-                <a:spcPts val="945"/>
-              </a:spcAft>
-            </a:pPr>
-            <a:r>
-              <a:rPr sz="2100" b="1" i="0">
-                <a:solidFill>
-                  <a:srgbClr val="1C1B19"/>
-                </a:solidFill>
-                <a:latin typeface="Source Serif 4"/>
-              </a:rPr>
-              <a:t>About 1 in 3 teens has an anxiety disorder by 18.</a:t>
-            </a:r>
-          </a:p>
-        </p:txBody>
-      </p:sp>
-      <p:sp>
-        <p:nvSpPr>
-          <p:cNvPr id="12" name="TextBox 11"/>
-          <p:cNvSpPr txBox="1"/>
-          <p:nvPr/>
-        </p:nvSpPr>
-        <p:spPr>
-          <a:xfrm>
-            <a:off x="822960" y="4471416"/>
-            <a:ext cx="548640" cy="804672"/>
-          </a:xfrm>
-          <a:prstGeom prst="rect">
-            <a:avLst/>
-          </a:prstGeom>
-          <a:noFill/>
-        </p:spPr>
-        <p:txBody>
-          <a:bodyPr wrap="square" anchor="t" lIns="0" rIns="0" tIns="0" bIns="0">
-            <a:spAutoFit/>
-          </a:bodyPr>
-          <a:lstStyle/>
-          <a:p>
-            <a:pPr algn="l">
-              <a:spcAft>
-                <a:spcPts val="1170"/>
-              </a:spcAft>
-            </a:pPr>
-            <a:r>
-              <a:rPr sz="2600" b="1" i="0">
-                <a:solidFill>
-                  <a:srgbClr val="F47B20"/>
-                </a:solidFill>
-                <a:latin typeface="Source Serif 4"/>
-              </a:rPr>
-              <a:t>4</a:t>
-            </a:r>
-          </a:p>
-        </p:txBody>
-      </p:sp>
-      <p:sp>
-        <p:nvSpPr>
-          <p:cNvPr id="13" name="TextBox 12"/>
-          <p:cNvSpPr txBox="1"/>
-          <p:nvPr/>
-        </p:nvSpPr>
-        <p:spPr>
-          <a:xfrm>
-            <a:off x="1463040" y="4507992"/>
-            <a:ext cx="9875520" cy="804672"/>
-          </a:xfrm>
-          <a:prstGeom prst="rect">
-            <a:avLst/>
-          </a:prstGeom>
-          <a:noFill/>
-        </p:spPr>
-        <p:txBody>
-          <a:bodyPr wrap="square" anchor="t" lIns="0" rIns="0" tIns="0" bIns="0">
-            <a:spAutoFit/>
-          </a:bodyPr>
-          <a:lstStyle/>
-          <a:p>
-            <a:pPr algn="l">
-              <a:spcAft>
-                <a:spcPts val="945"/>
-              </a:spcAft>
-            </a:pPr>
-            <a:r>
-              <a:rPr sz="2100" b="1" i="0">
-                <a:solidFill>
-                  <a:srgbClr val="1C1B19"/>
-                </a:solidFill>
-                <a:latin typeface="Source Serif 4"/>
-              </a:rPr>
-              <a:t>A panic attack means something is physically wrong.</a:t>
-            </a:r>
-          </a:p>
-        </p:txBody>
-      </p:sp>
-      <p:sp>
-        <p:nvSpPr>
-          <p:cNvPr id="14" name="TextBox 13"/>
-          <p:cNvSpPr txBox="1"/>
-          <p:nvPr/>
-        </p:nvSpPr>
-        <p:spPr>
-          <a:xfrm>
-            <a:off x="822960" y="5276088"/>
-            <a:ext cx="548640" cy="804672"/>
-          </a:xfrm>
-          <a:prstGeom prst="rect">
-            <a:avLst/>
-          </a:prstGeom>
-          <a:noFill/>
-        </p:spPr>
-        <p:txBody>
-          <a:bodyPr wrap="square" anchor="t" lIns="0" rIns="0" tIns="0" bIns="0">
-            <a:spAutoFit/>
-          </a:bodyPr>
-          <a:lstStyle/>
-          <a:p>
-            <a:pPr algn="l">
-              <a:spcAft>
-                <a:spcPts val="1170"/>
-              </a:spcAft>
-            </a:pPr>
-            <a:r>
-              <a:rPr sz="2600" b="1" i="0">
-                <a:solidFill>
-                  <a:srgbClr val="F47B20"/>
-                </a:solidFill>
-                <a:latin typeface="Source Serif 4"/>
-              </a:rPr>
-              <a:t>5</a:t>
-            </a:r>
-          </a:p>
-        </p:txBody>
-      </p:sp>
-      <p:sp>
-        <p:nvSpPr>
-          <p:cNvPr id="15" name="TextBox 14"/>
-          <p:cNvSpPr txBox="1"/>
-          <p:nvPr/>
-        </p:nvSpPr>
-        <p:spPr>
-          <a:xfrm>
-            <a:off x="1463040" y="5312664"/>
-            <a:ext cx="9875520" cy="804672"/>
-          </a:xfrm>
-          <a:prstGeom prst="rect">
-            <a:avLst/>
-          </a:prstGeom>
-          <a:noFill/>
-        </p:spPr>
-        <p:txBody>
-          <a:bodyPr wrap="square" anchor="t" lIns="0" rIns="0" tIns="0" bIns="0">
-            <a:spAutoFit/>
-          </a:bodyPr>
-          <a:lstStyle/>
-          <a:p>
-            <a:pPr algn="l">
-              <a:spcAft>
-                <a:spcPts val="945"/>
-              </a:spcAft>
-            </a:pPr>
-            <a:r>
-              <a:rPr sz="2100" b="1" i="0">
-                <a:solidFill>
-                  <a:srgbClr val="1C1B19"/>
-                </a:solidFill>
-                <a:latin typeface="Source Serif 4"/>
-              </a:rPr>
-              <a:t>Anxiety is one of the most treatable conditions in teens.</a:t>
+                <a:spcPts val="990"/>
+              </a:spcAft>
+            </a:pPr>
+            <a:r>
+              <a:rPr sz="2200" b="0" i="1">
+                <a:solidFill>
+                  <a:srgbClr val="5D5A54"/>
+                </a:solidFill>
+                <a:latin typeface="Source Serif 4"/>
+              </a:rPr>
+              <a:t>It peaks within minutes and passes. Breathe out longer: in for 4, out for 6.</a:t>
             </a:r>
           </a:p>
         </p:txBody>
@@ -8793,7 +9527,7 @@
                 </a:solidFill>
                 <a:latin typeface="Inter Tight"/>
               </a:rPr>
-              <a:t>MYTH OR FACT?</a:t>
+              <a:t>THE CORE SKILL</a:t>
             </a:r>
           </a:p>
         </p:txBody>
@@ -8871,7 +9605,7 @@
                 </a:solidFill>
                 <a:latin typeface="Source Serif 4"/>
               </a:rPr>
-              <a:t>The answers</a:t>
+              <a:t>Run the experiment</a:t>
             </a:r>
           </a:p>
         </p:txBody>
@@ -8884,8 +9618,8 @@
         </p:nvSpPr>
         <p:spPr>
           <a:xfrm>
-            <a:off x="822960" y="2057400"/>
-            <a:ext cx="548640" cy="804672"/>
+            <a:off x="822960" y="2194560"/>
+            <a:ext cx="548640" cy="1005840"/>
           </a:xfrm>
           <a:prstGeom prst="rect">
             <a:avLst/>
@@ -8923,8 +9657,8 @@
         </p:nvSpPr>
         <p:spPr>
           <a:xfrm>
-            <a:off x="1463040" y="2093976"/>
-            <a:ext cx="9875520" cy="804672"/>
+            <a:off x="1463040" y="2231136"/>
+            <a:ext cx="9875520" cy="1005840"/>
           </a:xfrm>
           <a:prstGeom prst="rect">
             <a:avLst/>
@@ -8949,7 +9683,7 @@
                 </a:solidFill>
                 <a:latin typeface="Source Serif 4"/>
               </a:rPr>
-              <a:t>Myth.</a:t>
+              <a:t>Name the prediction.</a:t>
             </a:r>
           </a:p>
           <a:p>
@@ -8965,7 +9699,7 @@
                 </a:solidFill>
                 <a:latin typeface="Source Serif 4"/>
               </a:rPr>
-              <a:t>Rest is self-care. Skipping what anxiety predicts makes it grow.</a:t>
+              <a:t>"If I call, I'll freeze and sound stupid."</a:t>
             </a:r>
           </a:p>
         </p:txBody>
@@ -8978,8 +9712,8 @@
         </p:nvSpPr>
         <p:spPr>
           <a:xfrm>
-            <a:off x="822960" y="2862072"/>
-            <a:ext cx="548640" cy="804672"/>
+            <a:off x="822960" y="3200400"/>
+            <a:ext cx="548640" cy="1005840"/>
           </a:xfrm>
           <a:prstGeom prst="rect">
             <a:avLst/>
@@ -9017,8 +9751,8 @@
         </p:nvSpPr>
         <p:spPr>
           <a:xfrm>
-            <a:off x="1463040" y="2898648"/>
-            <a:ext cx="9875520" cy="804672"/>
+            <a:off x="1463040" y="3236976"/>
+            <a:ext cx="9875520" cy="1005840"/>
           </a:xfrm>
           <a:prstGeom prst="rect">
             <a:avLst/>
@@ -9043,7 +9777,7 @@
                 </a:solidFill>
                 <a:latin typeface="Source Serif 4"/>
               </a:rPr>
-              <a:t>Myth.</a:t>
+              <a:t>Rate it.</a:t>
             </a:r>
           </a:p>
           <a:p>
@@ -9059,7 +9793,7 @@
                 </a:solidFill>
                 <a:latin typeface="Source Serif 4"/>
               </a:rPr>
-              <a:t>You can do hard things nervous. That's often how the alarm learns.</a:t>
+              <a:t>How sure are you, 0 to 100%?</a:t>
             </a:r>
           </a:p>
         </p:txBody>
@@ -9072,8 +9806,8 @@
         </p:nvSpPr>
         <p:spPr>
           <a:xfrm>
-            <a:off x="822960" y="3666744"/>
-            <a:ext cx="548640" cy="804672"/>
+            <a:off x="822960" y="4206240"/>
+            <a:ext cx="548640" cy="1005840"/>
           </a:xfrm>
           <a:prstGeom prst="rect">
             <a:avLst/>
@@ -9111,8 +9845,8 @@
         </p:nvSpPr>
         <p:spPr>
           <a:xfrm>
-            <a:off x="1463040" y="3703320"/>
-            <a:ext cx="9875520" cy="804672"/>
+            <a:off x="1463040" y="4242816"/>
+            <a:ext cx="9875520" cy="1005840"/>
           </a:xfrm>
           <a:prstGeom prst="rect">
             <a:avLst/>
@@ -9137,7 +9871,7 @@
                 </a:solidFill>
                 <a:latin typeface="Source Serif 4"/>
               </a:rPr>
-              <a:t>Fact.</a:t>
+              <a:t>Drop the safety moves.</a:t>
             </a:r>
           </a:p>
           <a:p>
@@ -9153,7 +9887,7 @@
                 </a:solidFill>
                 <a:latin typeface="Source Serif 4"/>
               </a:rPr>
-              <a:t>In a national survey of over 10,000 teens.</a:t>
+              <a:t>The script, the excuse, the friend who talks for you.</a:t>
             </a:r>
           </a:p>
         </p:txBody>
@@ -9166,8 +9900,8 @@
         </p:nvSpPr>
         <p:spPr>
           <a:xfrm>
-            <a:off x="822960" y="4471416"/>
-            <a:ext cx="548640" cy="804672"/>
+            <a:off x="822960" y="5212080"/>
+            <a:ext cx="548640" cy="1005840"/>
           </a:xfrm>
           <a:prstGeom prst="rect">
             <a:avLst/>
@@ -9205,8 +9939,8 @@
         </p:nvSpPr>
         <p:spPr>
           <a:xfrm>
-            <a:off x="1463040" y="4507992"/>
-            <a:ext cx="9875520" cy="804672"/>
+            <a:off x="1463040" y="5248656"/>
+            <a:ext cx="9875520" cy="1005840"/>
           </a:xfrm>
           <a:prstGeom prst="rect">
             <a:avLst/>
@@ -9231,7 +9965,7 @@
                 </a:solidFill>
                 <a:latin typeface="Source Serif 4"/>
               </a:rPr>
-              <a:t>Mostly myth.</a:t>
+              <a:t>Compare.</a:t>
             </a:r>
           </a:p>
           <a:p>
@@ -9247,101 +9981,7 @@
                 </a:solidFill>
                 <a:latin typeface="Source Serif 4"/>
               </a:rPr>
-              <a:t>It's the alarm at full volume with no fire. Get checked once.</a:t>
-            </a:r>
-          </a:p>
-        </p:txBody>
-      </p:sp>
-      <p:sp>
-        <p:nvSpPr>
-          <p:cNvPr id="14" name="TextBox 13"/>
-          <p:cNvSpPr txBox="1"/>
-          <p:nvPr/>
-        </p:nvSpPr>
-        <p:spPr>
-          <a:xfrm>
-            <a:off x="822960" y="5276088"/>
-            <a:ext cx="548640" cy="804672"/>
-          </a:xfrm>
-          <a:prstGeom prst="rect">
-            <a:avLst/>
-          </a:prstGeom>
-          <a:noFill/>
-        </p:spPr>
-        <p:txBody>
-          <a:bodyPr wrap="square" anchor="t" lIns="0" rIns="0" tIns="0" bIns="0">
-            <a:spAutoFit/>
-          </a:bodyPr>
-          <a:lstStyle/>
-          <a:p>
-            <a:pPr algn="l">
-              <a:spcAft>
-                <a:spcPts val="1170"/>
-              </a:spcAft>
-            </a:pPr>
-            <a:r>
-              <a:rPr sz="2600" b="1" i="0">
-                <a:solidFill>
-                  <a:srgbClr val="F47B20"/>
-                </a:solidFill>
-                <a:latin typeface="Source Serif 4"/>
-              </a:rPr>
-              <a:t>5</a:t>
-            </a:r>
-          </a:p>
-        </p:txBody>
-      </p:sp>
-      <p:sp>
-        <p:nvSpPr>
-          <p:cNvPr id="15" name="TextBox 14"/>
-          <p:cNvSpPr txBox="1"/>
-          <p:nvPr/>
-        </p:nvSpPr>
-        <p:spPr>
-          <a:xfrm>
-            <a:off x="1463040" y="5312664"/>
-            <a:ext cx="9875520" cy="804672"/>
-          </a:xfrm>
-          <a:prstGeom prst="rect">
-            <a:avLst/>
-          </a:prstGeom>
-          <a:noFill/>
-        </p:spPr>
-        <p:txBody>
-          <a:bodyPr wrap="square" anchor="t" lIns="0" rIns="0" tIns="0" bIns="0">
-            <a:spAutoFit/>
-          </a:bodyPr>
-          <a:lstStyle/>
-          <a:p>
-            <a:pPr algn="l">
-              <a:spcAft>
-                <a:spcPts val="945"/>
-              </a:spcAft>
-            </a:pPr>
-            <a:r>
-              <a:rPr sz="2100" b="1" i="0">
-                <a:solidFill>
-                  <a:srgbClr val="1C1B19"/>
-                </a:solidFill>
-                <a:latin typeface="Source Serif 4"/>
-              </a:rPr>
-              <a:t>Fact.</a:t>
-            </a:r>
-          </a:p>
-          <a:p>
-            <a:pPr algn="l">
-              <a:spcAft>
-                <a:spcPts val="945"/>
-              </a:spcAft>
-            </a:pPr>
-            <a:r>
-              <a:rPr sz="1600" b="0" i="0">
-                <a:solidFill>
-                  <a:srgbClr val="5D5A54"/>
-                </a:solidFill>
-                <a:latin typeface="Source Serif 4"/>
-              </a:rPr>
-              <a:t>Most teens in a big trial improved with treatment.</a:t>
+              <a:t>What happened? How close was the forecast?</a:t>
             </a:r>
           </a:p>
         </p:txBody>
@@ -9450,7 +10090,7 @@
                 </a:solidFill>
                 <a:latin typeface="Inter Tight"/>
               </a:rPr>
-              <a:t>HOW ANXIETY LEARNS</a:t>
+              <a:t>TOAST OR FIRE?</a:t>
             </a:r>
           </a:p>
         </p:txBody>
@@ -9528,7 +10168,7 @@
                 </a:solidFill>
                 <a:latin typeface="Source Serif 4"/>
               </a:rPr>
-              <a:t>The avoidance loop</a:t>
+              <a:t>Real danger, false alarm, or somewhere in between?</a:t>
             </a:r>
           </a:p>
         </p:txBody>
@@ -9541,8 +10181,8 @@
         </p:nvSpPr>
         <p:spPr>
           <a:xfrm>
-            <a:off x="822960" y="2743200"/>
-            <a:ext cx="1874519" cy="1005840"/>
+            <a:off x="822960" y="2103120"/>
+            <a:ext cx="3322320" cy="3840480"/>
           </a:xfrm>
           <a:prstGeom prst="rect">
             <a:avLst/>
@@ -9552,7 +10192,7 @@
           </a:solidFill>
           <a:ln w="15875">
             <a:solidFill>
-              <a:srgbClr val="0B2D5B"/>
+              <a:srgbClr val="D8D2C6"/>
             </a:solidFill>
           </a:ln>
           <a:effectLst/>
@@ -9587,8 +10227,8 @@
         </p:nvSpPr>
         <p:spPr>
           <a:xfrm>
-            <a:off x="822960" y="2743200"/>
-            <a:ext cx="1874519" cy="1005840"/>
+            <a:off x="1051560" y="2286000"/>
+            <a:ext cx="2865120" cy="365760"/>
           </a:xfrm>
           <a:prstGeom prst="rect">
             <a:avLst/>
@@ -9596,64 +10236,67 @@
           <a:noFill/>
         </p:spPr>
         <p:txBody>
-          <a:bodyPr wrap="square" anchor="ctr" lIns="0" rIns="0" tIns="0" bIns="0">
+          <a:bodyPr wrap="square" anchor="t" lIns="0" rIns="0" tIns="0" bIns="0">
             <a:spAutoFit/>
           </a:bodyPr>
           <a:lstStyle/>
           <a:p>
-            <a:pPr algn="ctr">
-              <a:spcAft>
-                <a:spcPts val="900"/>
-              </a:spcAft>
-            </a:pPr>
-            <a:r>
-              <a:rPr sz="2000" b="1" i="0">
+            <a:pPr algn="l">
+              <a:spcAft>
+                <a:spcPts val="585"/>
+              </a:spcAft>
+            </a:pPr>
+            <a:r>
+              <a:rPr sz="1300" b="1" i="0">
+                <a:solidFill>
+                  <a:srgbClr val="0B2D5B"/>
+                </a:solidFill>
+                <a:latin typeface="Inter Tight"/>
+              </a:rPr>
+              <a:t>JALEN</a:t>
+            </a:r>
+          </a:p>
+        </p:txBody>
+      </p:sp>
+      <p:sp>
+        <p:nvSpPr>
+          <p:cNvPr id="8" name="TextBox 7"/>
+          <p:cNvSpPr txBox="1"/>
+          <p:nvPr/>
+        </p:nvSpPr>
+        <p:spPr>
+          <a:xfrm>
+            <a:off x="1051560" y="2743200"/>
+            <a:ext cx="2865120" cy="3017520"/>
+          </a:xfrm>
+          <a:prstGeom prst="rect">
+            <a:avLst/>
+          </a:prstGeom>
+          <a:noFill/>
+        </p:spPr>
+        <p:txBody>
+          <a:bodyPr wrap="square" anchor="t" lIns="0" rIns="0" tIns="0" bIns="0">
+            <a:spAutoFit/>
+          </a:bodyPr>
+          <a:lstStyle/>
+          <a:p>
+            <a:pPr algn="l">
+              <a:spcAft>
+                <a:spcPts val="810"/>
+              </a:spcAft>
+            </a:pPr>
+            <a:r>
+              <a:rPr sz="1800" b="0" i="0">
                 <a:solidFill>
                   <a:srgbClr val="1C1B19"/>
                 </a:solidFill>
                 <a:latin typeface="Source Serif 4"/>
               </a:rPr>
-              <a:t>Alarm fires</a:t>
-            </a:r>
-          </a:p>
-        </p:txBody>
-      </p:sp>
-      <p:cxnSp>
-        <p:nvCxnSpPr>
-          <p:cNvPr id="8" name="Connector 7"/>
-          <p:cNvCxnSpPr/>
-          <p:nvPr/>
-        </p:nvCxnSpPr>
-        <p:spPr>
-          <a:xfrm>
-            <a:off x="2752344" y="3246120"/>
-            <a:ext cx="176021" cy="0"/>
-          </a:xfrm>
-          <a:prstGeom prst="line">
-            <a:avLst/>
-          </a:prstGeom>
-          <a:ln w="31750">
-            <a:solidFill>
-              <a:srgbClr val="F47B20"/>
-            </a:solidFill>
-            <a:tailEnd type="triangle"/>
-          </a:ln>
-        </p:spPr>
-        <p:style>
-          <a:lnRef idx="2">
-            <a:schemeClr val="accent1"/>
-          </a:lnRef>
-          <a:fillRef idx="0">
-            <a:schemeClr val="accent1"/>
-          </a:fillRef>
-          <a:effectRef idx="1">
-            <a:schemeClr val="accent1"/>
-          </a:effectRef>
-          <a:fontRef idx="minor">
-            <a:schemeClr val="tx1"/>
-          </a:fontRef>
-        </p:style>
-      </p:cxnSp>
+              <a:t>Tryouts for the school play are Saturday. His hands shake every time he thinks about it, and he's drafting a text to drop out.</a:t>
+            </a:r>
+          </a:p>
+        </p:txBody>
+      </p:sp>
       <p:sp>
         <p:nvSpPr>
           <p:cNvPr id="9" name="Rectangle 8"/>
@@ -9662,8 +10305,8 @@
         </p:nvSpPr>
         <p:spPr>
           <a:xfrm>
-            <a:off x="2983229" y="2743200"/>
-            <a:ext cx="1874519" cy="1005840"/>
+            <a:off x="4419600" y="2103120"/>
+            <a:ext cx="3322320" cy="3840480"/>
           </a:xfrm>
           <a:prstGeom prst="rect">
             <a:avLst/>
@@ -9673,7 +10316,7 @@
           </a:solidFill>
           <a:ln w="15875">
             <a:solidFill>
-              <a:srgbClr val="0B2D5B"/>
+              <a:srgbClr val="D8D2C6"/>
             </a:solidFill>
           </a:ln>
           <a:effectLst/>
@@ -9708,8 +10351,8 @@
         </p:nvSpPr>
         <p:spPr>
           <a:xfrm>
-            <a:off x="2983229" y="2743200"/>
-            <a:ext cx="1874519" cy="1005840"/>
+            <a:off x="4648200" y="2286000"/>
+            <a:ext cx="2865120" cy="365760"/>
           </a:xfrm>
           <a:prstGeom prst="rect">
             <a:avLst/>
@@ -9717,64 +10360,67 @@
           <a:noFill/>
         </p:spPr>
         <p:txBody>
-          <a:bodyPr wrap="square" anchor="ctr" lIns="0" rIns="0" tIns="0" bIns="0">
+          <a:bodyPr wrap="square" anchor="t" lIns="0" rIns="0" tIns="0" bIns="0">
             <a:spAutoFit/>
           </a:bodyPr>
           <a:lstStyle/>
           <a:p>
-            <a:pPr algn="ctr">
-              <a:spcAft>
-                <a:spcPts val="900"/>
-              </a:spcAft>
-            </a:pPr>
-            <a:r>
-              <a:rPr sz="2000" b="1" i="0">
+            <a:pPr algn="l">
+              <a:spcAft>
+                <a:spcPts val="585"/>
+              </a:spcAft>
+            </a:pPr>
+            <a:r>
+              <a:rPr sz="1300" b="1" i="0">
+                <a:solidFill>
+                  <a:srgbClr val="0B2D5B"/>
+                </a:solidFill>
+                <a:latin typeface="Inter Tight"/>
+              </a:rPr>
+              <a:t>SOFIA</a:t>
+            </a:r>
+          </a:p>
+        </p:txBody>
+      </p:sp>
+      <p:sp>
+        <p:nvSpPr>
+          <p:cNvPr id="11" name="TextBox 10"/>
+          <p:cNvSpPr txBox="1"/>
+          <p:nvPr/>
+        </p:nvSpPr>
+        <p:spPr>
+          <a:xfrm>
+            <a:off x="4648200" y="2743200"/>
+            <a:ext cx="2865120" cy="3017520"/>
+          </a:xfrm>
+          <a:prstGeom prst="rect">
+            <a:avLst/>
+          </a:prstGeom>
+          <a:noFill/>
+        </p:spPr>
+        <p:txBody>
+          <a:bodyPr wrap="square" anchor="t" lIns="0" rIns="0" tIns="0" bIns="0">
+            <a:spAutoFit/>
+          </a:bodyPr>
+          <a:lstStyle/>
+          <a:p>
+            <a:pPr algn="l">
+              <a:spcAft>
+                <a:spcPts val="810"/>
+              </a:spcAft>
+            </a:pPr>
+            <a:r>
+              <a:rPr sz="1800" b="0" i="0">
                 <a:solidFill>
                   <a:srgbClr val="1C1B19"/>
                 </a:solidFill>
                 <a:latin typeface="Source Serif 4"/>
               </a:rPr>
-              <a:t>You leave</a:t>
-            </a:r>
-          </a:p>
-        </p:txBody>
-      </p:sp>
-      <p:cxnSp>
-        <p:nvCxnSpPr>
-          <p:cNvPr id="11" name="Connector 10"/>
-          <p:cNvCxnSpPr/>
-          <p:nvPr/>
-        </p:nvCxnSpPr>
-        <p:spPr>
-          <a:xfrm>
-            <a:off x="4912614" y="3246120"/>
-            <a:ext cx="176022" cy="0"/>
-          </a:xfrm>
-          <a:prstGeom prst="line">
-            <a:avLst/>
-          </a:prstGeom>
-          <a:ln w="31750">
-            <a:solidFill>
-              <a:srgbClr val="F47B20"/>
-            </a:solidFill>
-            <a:tailEnd type="triangle"/>
-          </a:ln>
-        </p:spPr>
-        <p:style>
-          <a:lnRef idx="2">
-            <a:schemeClr val="accent1"/>
-          </a:lnRef>
-          <a:fillRef idx="0">
-            <a:schemeClr val="accent1"/>
-          </a:fillRef>
-          <a:effectRef idx="1">
-            <a:schemeClr val="accent1"/>
-          </a:effectRef>
-          <a:fontRef idx="minor">
-            <a:schemeClr val="tx1"/>
-          </a:fontRef>
-        </p:style>
-      </p:cxnSp>
+              <a:t>At a sleepover, a friend is passed out and her breathing sounds strange. Someone says, "Let her sleep it off."</a:t>
+            </a:r>
+          </a:p>
+        </p:txBody>
+      </p:sp>
       <p:sp>
         <p:nvSpPr>
           <p:cNvPr id="12" name="Rectangle 11"/>
@@ -9783,8 +10429,8 @@
         </p:nvSpPr>
         <p:spPr>
           <a:xfrm>
-            <a:off x="5143500" y="2743200"/>
-            <a:ext cx="1874519" cy="1005840"/>
+            <a:off x="8016239" y="2103120"/>
+            <a:ext cx="3322320" cy="3840480"/>
           </a:xfrm>
           <a:prstGeom prst="rect">
             <a:avLst/>
@@ -9794,7 +10440,7 @@
           </a:solidFill>
           <a:ln w="15875">
             <a:solidFill>
-              <a:srgbClr val="0B2D5B"/>
+              <a:srgbClr val="D8D2C6"/>
             </a:solidFill>
           </a:ln>
           <a:effectLst/>
@@ -9829,289 +10475,8 @@
         </p:nvSpPr>
         <p:spPr>
           <a:xfrm>
-            <a:off x="5143500" y="2743200"/>
-            <a:ext cx="1874519" cy="1005840"/>
-          </a:xfrm>
-          <a:prstGeom prst="rect">
-            <a:avLst/>
-          </a:prstGeom>
-          <a:noFill/>
-        </p:spPr>
-        <p:txBody>
-          <a:bodyPr wrap="square" anchor="ctr" lIns="0" rIns="0" tIns="0" bIns="0">
-            <a:spAutoFit/>
-          </a:bodyPr>
-          <a:lstStyle/>
-          <a:p>
-            <a:pPr algn="ctr">
-              <a:spcAft>
-                <a:spcPts val="900"/>
-              </a:spcAft>
-            </a:pPr>
-            <a:r>
-              <a:rPr sz="2000" b="1" i="0">
-                <a:solidFill>
-                  <a:srgbClr val="1C1B19"/>
-                </a:solidFill>
-                <a:latin typeface="Source Serif 4"/>
-              </a:rPr>
-              <a:t>Quick relief</a:t>
-            </a:r>
-          </a:p>
-        </p:txBody>
-      </p:sp>
-      <p:cxnSp>
-        <p:nvCxnSpPr>
-          <p:cNvPr id="14" name="Connector 13"/>
-          <p:cNvCxnSpPr/>
-          <p:nvPr/>
-        </p:nvCxnSpPr>
-        <p:spPr>
-          <a:xfrm>
-            <a:off x="7072883" y="3246120"/>
-            <a:ext cx="176023" cy="0"/>
-          </a:xfrm>
-          <a:prstGeom prst="line">
-            <a:avLst/>
-          </a:prstGeom>
-          <a:ln w="31750">
-            <a:solidFill>
-              <a:srgbClr val="F47B20"/>
-            </a:solidFill>
-            <a:tailEnd type="triangle"/>
-          </a:ln>
-        </p:spPr>
-        <p:style>
-          <a:lnRef idx="2">
-            <a:schemeClr val="accent1"/>
-          </a:lnRef>
-          <a:fillRef idx="0">
-            <a:schemeClr val="accent1"/>
-          </a:fillRef>
-          <a:effectRef idx="1">
-            <a:schemeClr val="accent1"/>
-          </a:effectRef>
-          <a:fontRef idx="minor">
-            <a:schemeClr val="tx1"/>
-          </a:fontRef>
-        </p:style>
-      </p:cxnSp>
-      <p:sp>
-        <p:nvSpPr>
-          <p:cNvPr id="15" name="Rectangle 14"/>
-          <p:cNvSpPr/>
-          <p:nvPr/>
-        </p:nvSpPr>
-        <p:spPr>
-          <a:xfrm>
-            <a:off x="7303770" y="2743200"/>
-            <a:ext cx="1874519" cy="1005840"/>
-          </a:xfrm>
-          <a:prstGeom prst="rect">
-            <a:avLst/>
-          </a:prstGeom>
-          <a:solidFill>
-            <a:srgbClr val="FFFFFF"/>
-          </a:solidFill>
-          <a:ln w="15875">
-            <a:solidFill>
-              <a:srgbClr val="0B2D5B"/>
-            </a:solidFill>
-          </a:ln>
-          <a:effectLst/>
-        </p:spPr>
-        <p:style>
-          <a:lnRef idx="1">
-            <a:schemeClr val="accent1"/>
-          </a:lnRef>
-          <a:fillRef idx="3">
-            <a:schemeClr val="accent1"/>
-          </a:fillRef>
-          <a:effectRef idx="2">
-            <a:schemeClr val="accent1"/>
-          </a:effectRef>
-          <a:fontRef idx="minor">
-            <a:schemeClr val="lt1"/>
-          </a:fontRef>
-        </p:style>
-        <p:txBody>
-          <a:bodyPr rtlCol="0" anchor="ctr"/>
-          <a:lstStyle/>
-          <a:p>
-            <a:pPr algn="ctr"/>
-          </a:p>
-        </p:txBody>
-      </p:sp>
-      <p:sp>
-        <p:nvSpPr>
-          <p:cNvPr id="16" name="TextBox 15"/>
-          <p:cNvSpPr txBox="1"/>
-          <p:nvPr/>
-        </p:nvSpPr>
-        <p:spPr>
-          <a:xfrm>
-            <a:off x="7303770" y="2743200"/>
-            <a:ext cx="1874519" cy="1005840"/>
-          </a:xfrm>
-          <a:prstGeom prst="rect">
-            <a:avLst/>
-          </a:prstGeom>
-          <a:noFill/>
-        </p:spPr>
-        <p:txBody>
-          <a:bodyPr wrap="square" anchor="ctr" lIns="0" rIns="0" tIns="0" bIns="0">
-            <a:spAutoFit/>
-          </a:bodyPr>
-          <a:lstStyle/>
-          <a:p>
-            <a:pPr algn="ctr">
-              <a:spcAft>
-                <a:spcPts val="900"/>
-              </a:spcAft>
-            </a:pPr>
-            <a:r>
-              <a:rPr sz="2000" b="1" i="0">
-                <a:solidFill>
-                  <a:srgbClr val="1C1B19"/>
-                </a:solidFill>
-                <a:latin typeface="Source Serif 4"/>
-              </a:rPr>
-              <a:t>"That was dangerous"</a:t>
-            </a:r>
-          </a:p>
-        </p:txBody>
-      </p:sp>
-      <p:cxnSp>
-        <p:nvCxnSpPr>
-          <p:cNvPr id="17" name="Connector 16"/>
-          <p:cNvCxnSpPr/>
-          <p:nvPr/>
-        </p:nvCxnSpPr>
-        <p:spPr>
-          <a:xfrm>
-            <a:off x="9233154" y="3246120"/>
-            <a:ext cx="176022" cy="0"/>
-          </a:xfrm>
-          <a:prstGeom prst="line">
-            <a:avLst/>
-          </a:prstGeom>
-          <a:ln w="31750">
-            <a:solidFill>
-              <a:srgbClr val="F47B20"/>
-            </a:solidFill>
-            <a:tailEnd type="triangle"/>
-          </a:ln>
-        </p:spPr>
-        <p:style>
-          <a:lnRef idx="2">
-            <a:schemeClr val="accent1"/>
-          </a:lnRef>
-          <a:fillRef idx="0">
-            <a:schemeClr val="accent1"/>
-          </a:fillRef>
-          <a:effectRef idx="1">
-            <a:schemeClr val="accent1"/>
-          </a:effectRef>
-          <a:fontRef idx="minor">
-            <a:schemeClr val="tx1"/>
-          </a:fontRef>
-        </p:style>
-      </p:cxnSp>
-      <p:sp>
-        <p:nvSpPr>
-          <p:cNvPr id="18" name="Rectangle 17"/>
-          <p:cNvSpPr/>
-          <p:nvPr/>
-        </p:nvSpPr>
-        <p:spPr>
-          <a:xfrm>
-            <a:off x="9464040" y="2743200"/>
-            <a:ext cx="1874519" cy="1005840"/>
-          </a:xfrm>
-          <a:prstGeom prst="rect">
-            <a:avLst/>
-          </a:prstGeom>
-          <a:solidFill>
-            <a:srgbClr val="FFFFFF"/>
-          </a:solidFill>
-          <a:ln w="15875">
-            <a:solidFill>
-              <a:srgbClr val="0B2D5B"/>
-            </a:solidFill>
-          </a:ln>
-          <a:effectLst/>
-        </p:spPr>
-        <p:style>
-          <a:lnRef idx="1">
-            <a:schemeClr val="accent1"/>
-          </a:lnRef>
-          <a:fillRef idx="3">
-            <a:schemeClr val="accent1"/>
-          </a:fillRef>
-          <a:effectRef idx="2">
-            <a:schemeClr val="accent1"/>
-          </a:effectRef>
-          <a:fontRef idx="minor">
-            <a:schemeClr val="lt1"/>
-          </a:fontRef>
-        </p:style>
-        <p:txBody>
-          <a:bodyPr rtlCol="0" anchor="ctr"/>
-          <a:lstStyle/>
-          <a:p>
-            <a:pPr algn="ctr"/>
-          </a:p>
-        </p:txBody>
-      </p:sp>
-      <p:sp>
-        <p:nvSpPr>
-          <p:cNvPr id="19" name="TextBox 18"/>
-          <p:cNvSpPr txBox="1"/>
-          <p:nvPr/>
-        </p:nvSpPr>
-        <p:spPr>
-          <a:xfrm>
-            <a:off x="9464040" y="2743200"/>
-            <a:ext cx="1874519" cy="1005840"/>
-          </a:xfrm>
-          <a:prstGeom prst="rect">
-            <a:avLst/>
-          </a:prstGeom>
-          <a:noFill/>
-        </p:spPr>
-        <p:txBody>
-          <a:bodyPr wrap="square" anchor="ctr" lIns="0" rIns="0" tIns="0" bIns="0">
-            <a:spAutoFit/>
-          </a:bodyPr>
-          <a:lstStyle/>
-          <a:p>
-            <a:pPr algn="ctr">
-              <a:spcAft>
-                <a:spcPts val="900"/>
-              </a:spcAft>
-            </a:pPr>
-            <a:r>
-              <a:rPr sz="2000" b="1" i="0">
-                <a:solidFill>
-                  <a:srgbClr val="1C1B19"/>
-                </a:solidFill>
-                <a:latin typeface="Source Serif 4"/>
-              </a:rPr>
-              <a:t>Louder next time</a:t>
-            </a:r>
-          </a:p>
-        </p:txBody>
-      </p:sp>
-      <p:sp>
-        <p:nvSpPr>
-          <p:cNvPr id="20" name="TextBox 19"/>
-          <p:cNvSpPr txBox="1"/>
-          <p:nvPr/>
-        </p:nvSpPr>
-        <p:spPr>
-          <a:xfrm>
-            <a:off x="822960" y="4160520"/>
-            <a:ext cx="10515600" cy="457200"/>
+            <a:off x="8244839" y="2286000"/>
+            <a:ext cx="2865120" cy="365760"/>
           </a:xfrm>
           <a:prstGeom prst="rect">
             <a:avLst/>
@@ -10124,33 +10489,33 @@
           </a:bodyPr>
           <a:lstStyle/>
           <a:p>
-            <a:pPr algn="ctr">
-              <a:spcAft>
-                <a:spcPts val="810"/>
-              </a:spcAft>
-            </a:pPr>
-            <a:r>
-              <a:rPr sz="1800" b="1" i="0">
-                <a:solidFill>
-                  <a:srgbClr val="F47B20"/>
+            <a:pPr algn="l">
+              <a:spcAft>
+                <a:spcPts val="585"/>
+              </a:spcAft>
+            </a:pPr>
+            <a:r>
+              <a:rPr sz="1300" b="1" i="0">
+                <a:solidFill>
+                  <a:srgbClr val="0B2D5B"/>
                 </a:solidFill>
                 <a:latin typeface="Inter Tight"/>
               </a:rPr>
-              <a:t>↺  and around again</a:t>
-            </a:r>
-          </a:p>
-        </p:txBody>
-      </p:sp>
-      <p:sp>
-        <p:nvSpPr>
-          <p:cNvPr id="21" name="TextBox 20"/>
+              <a:t>DEV</a:t>
+            </a:r>
+          </a:p>
+        </p:txBody>
+      </p:sp>
+      <p:sp>
+        <p:nvSpPr>
+          <p:cNvPr id="14" name="TextBox 13"/>
           <p:cNvSpPr txBox="1"/>
           <p:nvPr/>
         </p:nvSpPr>
         <p:spPr>
           <a:xfrm>
-            <a:off x="822960" y="4846320"/>
-            <a:ext cx="10515600" cy="1188720"/>
+            <a:off x="8244839" y="2743200"/>
+            <a:ext cx="2865120" cy="3017520"/>
           </a:xfrm>
           <a:prstGeom prst="rect">
             <a:avLst/>
@@ -10163,19 +10528,19 @@
           </a:bodyPr>
           <a:lstStyle/>
           <a:p>
-            <a:pPr algn="ctr">
-              <a:spcAft>
-                <a:spcPts val="900"/>
-              </a:spcAft>
-            </a:pPr>
-            <a:r>
-              <a:rPr sz="2000" b="0" i="1">
-                <a:solidFill>
-                  <a:srgbClr val="5D5A54"/>
-                </a:solidFill>
-                <a:latin typeface="Source Serif 4"/>
-              </a:rPr>
-              <a:t>Leaving feels great for a minute. Your brain files it as proof.</a:t>
+            <a:pPr algn="l">
+              <a:spcAft>
+                <a:spcPts val="810"/>
+              </a:spcAft>
+            </a:pPr>
+            <a:r>
+              <a:rPr sz="1800" b="0" i="0">
+                <a:solidFill>
+                  <a:srgbClr val="1C1B19"/>
+                </a:solidFill>
+                <a:latin typeface="Source Serif 4"/>
+              </a:rPr>
+              <a:t>His new friends haven't answered his message in three hours. He's reread it twenty times and is writing an apology.</a:t>
             </a:r>
           </a:p>
         </p:txBody>
@@ -10284,7 +10649,7 @@
                 </a:solidFill>
                 <a:latin typeface="Inter Tight"/>
               </a:rPr>
-              <a:t>PANIC</a:t>
+              <a:t>BUILD A LADDER</a:t>
             </a:r>
           </a:p>
         </p:txBody>
@@ -10330,14 +10695,58 @@
       </p:sp>
       <p:sp>
         <p:nvSpPr>
-          <p:cNvPr id="5" name="TextBox 4"/>
+          <p:cNvPr id="5" name="Rectangle 4"/>
+          <p:cNvSpPr/>
+          <p:nvPr/>
+        </p:nvSpPr>
+        <p:spPr>
+          <a:xfrm>
+            <a:off x="822960" y="1371600"/>
+            <a:ext cx="73152" cy="3566160"/>
+          </a:xfrm>
+          <a:prstGeom prst="rect">
+            <a:avLst/>
+          </a:prstGeom>
+          <a:solidFill>
+            <a:srgbClr val="F47B20"/>
+          </a:solidFill>
+          <a:ln>
+            <a:noFill/>
+          </a:ln>
+          <a:effectLst/>
+        </p:spPr>
+        <p:style>
+          <a:lnRef idx="1">
+            <a:schemeClr val="accent1"/>
+          </a:lnRef>
+          <a:fillRef idx="3">
+            <a:schemeClr val="accent1"/>
+          </a:fillRef>
+          <a:effectRef idx="2">
+            <a:schemeClr val="accent1"/>
+          </a:effectRef>
+          <a:fontRef idx="minor">
+            <a:schemeClr val="lt1"/>
+          </a:fontRef>
+        </p:style>
+        <p:txBody>
+          <a:bodyPr rtlCol="0" anchor="ctr"/>
+          <a:lstStyle/>
+          <a:p>
+            <a:pPr algn="ctr"/>
+          </a:p>
+        </p:txBody>
+      </p:sp>
+      <p:sp>
+        <p:nvSpPr>
+          <p:cNvPr id="6" name="TextBox 5"/>
           <p:cNvSpPr txBox="1"/>
           <p:nvPr/>
         </p:nvSpPr>
         <p:spPr>
           <a:xfrm>
-            <a:off x="822960" y="1463040"/>
-            <a:ext cx="10515600" cy="3291840"/>
+            <a:off x="1188720" y="1371600"/>
+            <a:ext cx="10058400" cy="3566160"/>
           </a:xfrm>
           <a:prstGeom prst="rect">
             <a:avLst/>
@@ -10352,31 +10761,31 @@
           <a:p>
             <a:pPr algn="l">
               <a:spcAft>
-                <a:spcPts val="2070"/>
-              </a:spcAft>
-            </a:pPr>
-            <a:r>
-              <a:rPr sz="4600" b="1" i="0">
+                <a:spcPts val="1800"/>
+              </a:spcAft>
+            </a:pPr>
+            <a:r>
+              <a:rPr sz="4000" b="0" i="1">
                 <a:solidFill>
                   <a:srgbClr val="1C1B19"/>
                 </a:solidFill>
                 <a:latin typeface="Source Serif 4"/>
               </a:rPr>
-              <a:t>A panic attack is the alarm with no fire.</a:t>
-            </a:r>
-          </a:p>
-        </p:txBody>
-      </p:sp>
-      <p:sp>
-        <p:nvSpPr>
-          <p:cNvPr id="6" name="TextBox 5"/>
+              <a:t>One thing you avoid. Four steps, easy to hard.</a:t>
+            </a:r>
+          </a:p>
+        </p:txBody>
+      </p:sp>
+      <p:sp>
+        <p:nvSpPr>
+          <p:cNvPr id="7" name="TextBox 6"/>
           <p:cNvSpPr txBox="1"/>
           <p:nvPr/>
         </p:nvSpPr>
         <p:spPr>
           <a:xfrm>
-            <a:off x="822960" y="4846320"/>
-            <a:ext cx="10515600" cy="1097280"/>
+            <a:off x="1188720" y="5120640"/>
+            <a:ext cx="10058400" cy="914400"/>
           </a:xfrm>
           <a:prstGeom prst="rect">
             <a:avLst/>
@@ -10391,17 +10800,17 @@
           <a:p>
             <a:pPr algn="l">
               <a:spcAft>
-                <a:spcPts val="990"/>
-              </a:spcAft>
-            </a:pPr>
-            <a:r>
-              <a:rPr sz="2200" b="0" i="1">
+                <a:spcPts val="810"/>
+              </a:spcAft>
+            </a:pPr>
+            <a:r>
+              <a:rPr sz="1800" b="0" i="0">
                 <a:solidFill>
                   <a:srgbClr val="5D5A54"/>
                 </a:solidFill>
-                <a:latin typeface="Source Serif 4"/>
-              </a:rPr>
-              <a:t>It peaks within minutes and passes. Breathe out longer: in for 4, out for 6.</a:t>
+                <a:latin typeface="Inter Tight"/>
+              </a:rPr>
+              <a:t>Private. Write a prediction next to step 1. Nobody shares.</a:t>
             </a:r>
           </a:p>
         </p:txBody>

--- a/decks/the-false-alarm-lesson-v2.pptx
+++ b/decks/the-false-alarm-lesson-v2.pptx
@@ -7125,6 +7125,45 @@
                 <a:latin typeface="Inter Tight"/>
               </a:rPr>
               <a:t>Beaver Upper School · Counseling</a:t>
+            </a:r>
+          </a:p>
+        </p:txBody>
+      </p:sp>
+      <p:sp>
+        <p:nvSpPr>
+          <p:cNvPr id="8" name="TextBox 7"/>
+          <p:cNvSpPr txBox="1"/>
+          <p:nvPr/>
+        </p:nvSpPr>
+        <p:spPr>
+          <a:xfrm>
+            <a:off x="6766560" y="5897880"/>
+            <a:ext cx="4846320" cy="640080"/>
+          </a:xfrm>
+          <a:prstGeom prst="rect">
+            <a:avLst/>
+          </a:prstGeom>
+          <a:noFill/>
+        </p:spPr>
+        <p:txBody>
+          <a:bodyPr wrap="square" anchor="t" lIns="0" rIns="0" tIns="0" bIns="0">
+            <a:spAutoFit/>
+          </a:bodyPr>
+          <a:lstStyle/>
+          <a:p>
+            <a:pPr algn="r">
+              <a:spcAft>
+                <a:spcPts val="495"/>
+              </a:spcAft>
+            </a:pPr>
+            <a:r>
+              <a:rPr sz="1100" b="0" i="0">
+                <a:solidFill>
+                  <a:srgbClr val="E8E4DA"/>
+                </a:solidFill>
+                <a:latin typeface="Inter Tight"/>
+              </a:rPr>
+              <a:t>Written by Dr. Rick Wilson, with AI-assisted drafting. Every lesson is reviewed and edited by Dr. Wilson.</a:t>
             </a:r>
           </a:p>
         </p:txBody>
